--- a/docs/260724_Results_of_Residual_Algorithm.pptx
+++ b/docs/260724_Results_of_Residual_Algorithm.pptx
@@ -10280,112 +10280,83 @@
             <p:ph idx="1"/>
           </p:nvPr>
         </p:nvSpPr>
-        <p:spPr/>
+        <p:spPr>
+          <a:xfrm>
+            <a:off x="508000" y="897468"/>
+            <a:ext cx="11038774" cy="5063066"/>
+          </a:xfrm>
+        </p:spPr>
         <p:txBody>
-          <a:bodyPr/>
+          <a:bodyPr>
+            <a:normAutofit/>
+          </a:bodyPr>
           <a:lstStyle/>
           <a:p>
             <a:r>
-              <a:rPr lang="en-US" altLang="ko-KR" dirty="0">
+              <a:rPr lang="en-US" altLang="ko-KR" sz="1800" dirty="0">
                 <a:latin typeface="KoPub돋움체 Bold" panose="00000800000000000000" pitchFamily="2" charset="-127"/>
                 <a:ea typeface="KoPub돋움체 Bold" panose="00000800000000000000" pitchFamily="2" charset="-127"/>
               </a:rPr>
-              <a:t>Stage 1 </a:t>
-            </a:r>
-            <a:r>
-              <a:rPr lang="ko-KR" altLang="en-US" dirty="0">
-                <a:latin typeface="KoPub돋움체 Bold" panose="00000800000000000000" pitchFamily="2" charset="-127"/>
-                <a:ea typeface="KoPub돋움체 Bold" panose="00000800000000000000" pitchFamily="2" charset="-127"/>
-              </a:rPr>
-              <a:t>오류 패턴 분석 </a:t>
-            </a:r>
-            <a:r>
-              <a:rPr lang="en-US" altLang="ko-KR" dirty="0">
-                <a:latin typeface="KoPub돋움체 Bold" panose="00000800000000000000" pitchFamily="2" charset="-127"/>
-                <a:ea typeface="KoPub돋움체 Bold" panose="00000800000000000000" pitchFamily="2" charset="-127"/>
-              </a:rPr>
-              <a:t>(Error Feature Analysis)</a:t>
+              <a:t>Stage 1 screen-positive(TP/FP) 오류 패턴 분석 (Error Feature Analysis)</a:t>
             </a:r>
           </a:p>
           <a:p>
             <a:pPr lvl="1"/>
             <a:r>
-              <a:rPr lang="ko-KR" altLang="en-US" dirty="0"/>
-              <a:t>결론</a:t>
-            </a:r>
-            <a:r>
-              <a:rPr lang="en-US" altLang="ko-KR" dirty="0"/>
-              <a:t>: </a:t>
-            </a:r>
-            <a:r>
-              <a:rPr lang="ko-KR" altLang="en-US" dirty="0"/>
-              <a:t>키</a:t>
-            </a:r>
-            <a:r>
-              <a:rPr lang="en-US" altLang="ko-KR" dirty="0"/>
-              <a:t>/</a:t>
-            </a:r>
-            <a:r>
-              <a:rPr lang="ko-KR" altLang="en-US" dirty="0"/>
-              <a:t>몸무게 같은 </a:t>
-            </a:r>
-            <a:r>
-              <a:rPr lang="en-US" altLang="ko-KR" dirty="0"/>
-              <a:t>clinic </a:t>
-            </a:r>
-            <a:r>
-              <a:rPr lang="ko-KR" altLang="en-US" dirty="0"/>
-              <a:t>변수만으로는 체지방과 </a:t>
-            </a:r>
-            <a:r>
-              <a:rPr lang="ko-KR" altLang="en-US" dirty="0" err="1"/>
-              <a:t>근육량을</a:t>
-            </a:r>
-            <a:r>
-              <a:rPr lang="ko-KR" altLang="en-US" dirty="0"/>
-              <a:t> 구분할 수 없다</a:t>
-            </a:r>
-            <a:endParaRPr lang="en-US" altLang="ko-KR" dirty="0"/>
-          </a:p>
-          <a:p>
-            <a:pPr lvl="1"/>
-            <a:r>
-              <a:rPr lang="ko-KR" altLang="en-US" dirty="0"/>
-              <a:t>→ 실제 </a:t>
-            </a:r>
-            <a:r>
-              <a:rPr lang="ko-KR" altLang="en-US" dirty="0" err="1"/>
-              <a:t>근육량을</a:t>
-            </a:r>
-            <a:r>
-              <a:rPr lang="ko-KR" altLang="en-US" dirty="0"/>
-              <a:t> 보는 영상</a:t>
-            </a:r>
-            <a:r>
-              <a:rPr lang="en-US" altLang="ko-KR" dirty="0"/>
-              <a:t>(CT) </a:t>
-            </a:r>
-            <a:r>
-              <a:rPr lang="ko-KR" altLang="en-US" dirty="0"/>
-              <a:t>기반 </a:t>
-            </a:r>
-            <a:r>
-              <a:rPr lang="en-US" altLang="ko-KR" dirty="0"/>
-              <a:t>Stage 2</a:t>
-            </a:r>
-            <a:r>
-              <a:rPr lang="ko-KR" altLang="en-US" dirty="0"/>
-              <a:t>가 필요한 이유</a:t>
+              <a:rPr lang="ko-KR" altLang="en-US" sz="1600" dirty="0"/>
+              <a:t>결론: TP-FP 간 bmi/height/weight도 유의하게 다르지만(p&lt;0.03), 그 차이만으로는 screen의 오탐(FP)을 걸러내지 못한다</a:t>
+            </a:r>
+            <a:endParaRPr lang="en-US" altLang="ko-KR" sz="1600" dirty="0"/>
+          </a:p>
+          <a:p>
+            <a:pPr marL="457200" lvl="1" indent="0">
+              <a:buNone/>
+            </a:pPr>
+            <a:r>
+              <a:rPr lang="ko-KR" altLang="en-US" sz="1600" dirty="0"/>
+              <a:t>→ CT(AEC-128) 기반 정보가 필요한 이유 (AEC는 모든 CT 촬영 시 스캐너가 자동 기록하는 데이터 </a:t>
+            </a:r>
+            <a:r>
+              <a:rPr lang="en-US" altLang="ko-KR" sz="1600" dirty="0"/>
+              <a:t>-</a:t>
+            </a:r>
+            <a:r>
+              <a:rPr lang="ko-KR" altLang="en-US" sz="1600" dirty="0"/>
+              <a:t> 세그멘테이션 없이 추가 비용 없이 얻을 수 있는 신호)</a:t>
             </a:r>
           </a:p>
         </p:txBody>
       </p:sp>
+      <p:pic>
+        <p:nvPicPr>
+          <p:cNvPr id="6" name="Picture 5" descr="tp_vs_fp_scatter.png"/>
+          <p:cNvPicPr>
+            <a:picLocks noChangeAspect="1"/>
+          </p:cNvPicPr>
+          <p:nvPr/>
+        </p:nvPicPr>
+        <p:blipFill>
+          <a:blip r:embed="rId3"/>
+          <a:stretch>
+            <a:fillRect/>
+          </a:stretch>
+        </p:blipFill>
+        <p:spPr>
+          <a:xfrm>
+            <a:off x="7085319" y="3206338"/>
+            <a:ext cx="4598681" cy="3103418"/>
+          </a:xfrm>
+          <a:prstGeom prst="rect">
+            <a:avLst/>
+          </a:prstGeom>
+        </p:spPr>
+      </p:pic>
       <p:graphicFrame>
         <p:nvGraphicFramePr>
-          <p:cNvPr id="5" name="Table 4">
+          <p:cNvPr id="4" name="표 3">
             <a:extLst>
               <a:ext uri="{FF2B5EF4-FFF2-40B4-BE49-F238E27FC236}">
-                <a16:creationId xmlns:a16="http://schemas.microsoft.com/office/drawing/2014/main" id="{AD8EFA6F-1755-6A57-6F33-7094CD62C7F0}"/>
+                <a16:creationId xmlns:a16="http://schemas.microsoft.com/office/drawing/2014/main" id="{6783CF32-47FA-C908-47D8-C963EB5ADDC6}"/>
               </a:ext>
             </a:extLst>
           </p:cNvPr>
@@ -10395,14 +10366,14 @@
           <p:nvPr>
             <p:extLst>
               <p:ext uri="{D42A27DB-BD31-4B8C-83A1-F6EECF244321}">
-                <p14:modId xmlns:p14="http://schemas.microsoft.com/office/powerpoint/2010/main" val="671317018"/>
+                <p14:modId xmlns:p14="http://schemas.microsoft.com/office/powerpoint/2010/main" val="2666102397"/>
               </p:ext>
             </p:extLst>
           </p:nvPr>
         </p:nvGraphicFramePr>
         <p:xfrm>
-          <a:off x="731520" y="2831911"/>
-          <a:ext cx="10698480" cy="1569368"/>
+          <a:off x="567374" y="3206338"/>
+          <a:ext cx="6090720" cy="1483360"/>
         </p:xfrm>
         <a:graphic>
           <a:graphicData uri="http://schemas.openxmlformats.org/drawingml/2006/table">
@@ -10411,50 +10382,50 @@
                 <a:tableStyleId>{9D7B26C5-4107-4FEC-AEDC-1716B250A1EF}</a:tableStyleId>
               </a:tblPr>
               <a:tblGrid>
-                <a:gridCol w="1783080">
+                <a:gridCol w="1015120">
                   <a:extLst>
                     <a:ext uri="{9D8B030D-6E8A-4147-A177-3AD203B41FA5}">
-                      <a16:colId xmlns:a16="http://schemas.microsoft.com/office/drawing/2014/main" val="20000"/>
+                      <a16:colId xmlns:a16="http://schemas.microsoft.com/office/drawing/2014/main" val="2297975198"/>
                     </a:ext>
                   </a:extLst>
                 </a:gridCol>
-                <a:gridCol w="1783080">
+                <a:gridCol w="1015120">
                   <a:extLst>
                     <a:ext uri="{9D8B030D-6E8A-4147-A177-3AD203B41FA5}">
-                      <a16:colId xmlns:a16="http://schemas.microsoft.com/office/drawing/2014/main" val="20001"/>
+                      <a16:colId xmlns:a16="http://schemas.microsoft.com/office/drawing/2014/main" val="1011738737"/>
                     </a:ext>
                   </a:extLst>
                 </a:gridCol>
-                <a:gridCol w="1783080">
+                <a:gridCol w="1015120">
                   <a:extLst>
                     <a:ext uri="{9D8B030D-6E8A-4147-A177-3AD203B41FA5}">
-                      <a16:colId xmlns:a16="http://schemas.microsoft.com/office/drawing/2014/main" val="20002"/>
+                      <a16:colId xmlns:a16="http://schemas.microsoft.com/office/drawing/2014/main" val="291453867"/>
                     </a:ext>
                   </a:extLst>
                 </a:gridCol>
-                <a:gridCol w="1783080">
+                <a:gridCol w="1015120">
                   <a:extLst>
                     <a:ext uri="{9D8B030D-6E8A-4147-A177-3AD203B41FA5}">
-                      <a16:colId xmlns:a16="http://schemas.microsoft.com/office/drawing/2014/main" val="20003"/>
+                      <a16:colId xmlns:a16="http://schemas.microsoft.com/office/drawing/2014/main" val="1154735498"/>
                     </a:ext>
                   </a:extLst>
                 </a:gridCol>
-                <a:gridCol w="1783080">
+                <a:gridCol w="1015120">
                   <a:extLst>
                     <a:ext uri="{9D8B030D-6E8A-4147-A177-3AD203B41FA5}">
-                      <a16:colId xmlns:a16="http://schemas.microsoft.com/office/drawing/2014/main" val="20004"/>
+                      <a16:colId xmlns:a16="http://schemas.microsoft.com/office/drawing/2014/main" val="4279169750"/>
                     </a:ext>
                   </a:extLst>
                 </a:gridCol>
-                <a:gridCol w="1783080">
+                <a:gridCol w="1015120">
                   <a:extLst>
                     <a:ext uri="{9D8B030D-6E8A-4147-A177-3AD203B41FA5}">
-                      <a16:colId xmlns:a16="http://schemas.microsoft.com/office/drawing/2014/main" val="20005"/>
+                      <a16:colId xmlns:a16="http://schemas.microsoft.com/office/drawing/2014/main" val="1848357860"/>
                     </a:ext>
                   </a:extLst>
                 </a:gridCol>
               </a:tblGrid>
-              <a:tr h="392342">
+              <a:tr h="370840">
                 <a:tc>
                   <a:txBody>
                     <a:bodyPr/>
@@ -10477,8 +10448,8 @@
                     <a:p>
                       <a:pPr algn="ctr"/>
                       <a:r>
-                        <a:rPr sz="1300" b="1"/>
-                        <a:t>Group A (mean)</a:t>
+                        <a:rPr sz="1300"/>
+                        <a:t>TP (mean)</a:t>
                       </a:r>
                     </a:p>
                   </a:txBody>
@@ -10491,8 +10462,8 @@
                     <a:p>
                       <a:pPr algn="ctr"/>
                       <a:r>
-                        <a:rPr sz="1300" b="1"/>
-                        <a:t>Group B (mean)</a:t>
+                        <a:rPr sz="1300"/>
+                        <a:t>FP (mean)</a:t>
                       </a:r>
                     </a:p>
                   </a:txBody>
@@ -10542,11 +10513,11 @@
                 </a:tc>
                 <a:extLst>
                   <a:ext uri="{0D108BD9-81ED-4DB2-BD59-A6C34878D82A}">
-                    <a16:rowId xmlns:a16="http://schemas.microsoft.com/office/drawing/2014/main" val="10000"/>
+                    <a16:rowId xmlns:a16="http://schemas.microsoft.com/office/drawing/2014/main" val="1129282602"/>
                   </a:ext>
                 </a:extLst>
               </a:tr>
-              <a:tr h="392342">
+              <a:tr h="370840">
                 <a:tc>
                   <a:txBody>
                     <a:bodyPr/>
@@ -10554,8 +10525,8 @@
                     <a:p>
                       <a:pPr algn="ctr"/>
                       <a:r>
-                        <a:rPr sz="1300"/>
-                        <a:t>BMI: TP vs FN</a:t>
+                        <a:rPr sz="1300" dirty="0"/>
+                        <a:t>BMI</a:t>
                       </a:r>
                     </a:p>
                   </a:txBody>
@@ -10568,7 +10539,7 @@
                     <a:p>
                       <a:pPr algn="ctr"/>
                       <a:r>
-                        <a:rPr sz="1300"/>
+                        <a:rPr sz="1300" dirty="0"/>
                         <a:t>20.62 (TP)</a:t>
                       </a:r>
                     </a:p>
@@ -10582,98 +10553,7 @@
                     <a:p>
                       <a:pPr algn="ctr"/>
                       <a:r>
-                        <a:rPr sz="1300"/>
-                        <a:t>24.72 (FN)</a:t>
-                      </a:r>
-                    </a:p>
-                  </a:txBody>
-                  <a:tcPr anchor="ctr"/>
-                </a:tc>
-                <a:tc>
-                  <a:txBody>
-                    <a:bodyPr/>
-                    <a:lstStyle/>
-                    <a:p>
-                      <a:pPr algn="ctr"/>
-                      <a:r>
-                        <a:rPr sz="1300"/>
-                        <a:t>-4.10</a:t>
-                      </a:r>
-                    </a:p>
-                  </a:txBody>
-                  <a:tcPr anchor="ctr"/>
-                </a:tc>
-                <a:tc>
-                  <a:txBody>
-                    <a:bodyPr/>
-                    <a:lstStyle/>
-                    <a:p>
-                      <a:pPr algn="ctr"/>
-                      <a:r>
-                        <a:rPr sz="1300"/>
-                        <a:t>-4.50</a:t>
-                      </a:r>
-                    </a:p>
-                  </a:txBody>
-                  <a:tcPr anchor="ctr"/>
-                </a:tc>
-                <a:tc>
-                  <a:txBody>
-                    <a:bodyPr/>
-                    <a:lstStyle/>
-                    <a:p>
-                      <a:pPr algn="ctr"/>
-                      <a:r>
-                        <a:rPr sz="1300"/>
-                        <a:t>0.0006</a:t>
-                      </a:r>
-                    </a:p>
-                  </a:txBody>
-                  <a:tcPr anchor="ctr"/>
-                </a:tc>
-                <a:extLst>
-                  <a:ext uri="{0D108BD9-81ED-4DB2-BD59-A6C34878D82A}">
-                    <a16:rowId xmlns:a16="http://schemas.microsoft.com/office/drawing/2014/main" val="10001"/>
-                  </a:ext>
-                </a:extLst>
-              </a:tr>
-              <a:tr h="392342">
-                <a:tc>
-                  <a:txBody>
-                    <a:bodyPr/>
-                    <a:lstStyle/>
-                    <a:p>
-                      <a:pPr algn="ctr"/>
-                      <a:r>
-                        <a:rPr sz="1300"/>
-                        <a:t>BMI: TN vs FP</a:t>
-                      </a:r>
-                    </a:p>
-                  </a:txBody>
-                  <a:tcPr anchor="ctr"/>
-                </a:tc>
-                <a:tc>
-                  <a:txBody>
-                    <a:bodyPr/>
-                    <a:lstStyle/>
-                    <a:p>
-                      <a:pPr algn="ctr"/>
-                      <a:r>
-                        <a:rPr sz="1300"/>
-                        <a:t>25.40 (TN)</a:t>
-                      </a:r>
-                    </a:p>
-                  </a:txBody>
-                  <a:tcPr anchor="ctr"/>
-                </a:tc>
-                <a:tc>
-                  <a:txBody>
-                    <a:bodyPr/>
-                    <a:lstStyle/>
-                    <a:p>
-                      <a:pPr algn="ctr"/>
-                      <a:r>
-                        <a:rPr sz="1300"/>
+                        <a:rPr sz="1300" dirty="0"/>
                         <a:t>21.95 (FP)</a:t>
                       </a:r>
                     </a:p>
@@ -10688,7 +10568,7 @@
                       <a:pPr algn="ctr"/>
                       <a:r>
                         <a:rPr sz="1300"/>
-                        <a:t>+3.45</a:t>
+                        <a:t>-1.33</a:t>
                       </a:r>
                     </a:p>
                   </a:txBody>
@@ -10702,7 +10582,7 @@
                       <a:pPr algn="ctr"/>
                       <a:r>
                         <a:rPr sz="1300"/>
-                        <a:t>22.09</a:t>
+                        <a:t>-4.80</a:t>
                       </a:r>
                     </a:p>
                   </a:txBody>
@@ -10715,7 +10595,7 @@
                     <a:p>
                       <a:pPr algn="ctr"/>
                       <a:r>
-                        <a:rPr sz="1300"/>
+                        <a:rPr sz="1300" dirty="0"/>
                         <a:t>&lt;0.001</a:t>
                       </a:r>
                     </a:p>
@@ -10724,11 +10604,11 @@
                 </a:tc>
                 <a:extLst>
                   <a:ext uri="{0D108BD9-81ED-4DB2-BD59-A6C34878D82A}">
-                    <a16:rowId xmlns:a16="http://schemas.microsoft.com/office/drawing/2014/main" val="10002"/>
+                    <a16:rowId xmlns:a16="http://schemas.microsoft.com/office/drawing/2014/main" val="3169079054"/>
                   </a:ext>
                 </a:extLst>
               </a:tr>
-              <a:tr h="392342">
+              <a:tr h="370840">
                 <a:tc>
                   <a:txBody>
                     <a:bodyPr/>
@@ -10737,7 +10617,7 @@
                       <a:pPr algn="ctr"/>
                       <a:r>
                         <a:rPr sz="1300" dirty="0"/>
-                        <a:t>Height: TN vs FP</a:t>
+                        <a:t>Height</a:t>
                       </a:r>
                     </a:p>
                   </a:txBody>
@@ -10750,8 +10630,8 @@
                     <a:p>
                       <a:pPr algn="ctr"/>
                       <a:r>
-                        <a:rPr sz="1300"/>
-                        <a:t>158.48 (TN)</a:t>
+                        <a:rPr sz="1300" dirty="0"/>
+                        <a:t>166.96 (TP)</a:t>
                       </a:r>
                     </a:p>
                   </a:txBody>
@@ -10778,8 +10658,22 @@
                     <a:p>
                       <a:pPr algn="ctr"/>
                       <a:r>
-                        <a:rPr sz="1300"/>
-                        <a:t>-6.74</a:t>
+                        <a:rPr sz="1300" dirty="0"/>
+                        <a:t>+1.73</a:t>
+                      </a:r>
+                    </a:p>
+                  </a:txBody>
+                  <a:tcPr anchor="ctr"/>
+                </a:tc>
+                <a:tc>
+                  <a:txBody>
+                    <a:bodyPr/>
+                    <a:lstStyle/>
+                    <a:p>
+                      <a:pPr algn="ctr"/>
+                      <a:r>
+                        <a:rPr sz="1300" dirty="0"/>
+                        <a:t>2.32</a:t>
                       </a:r>
                     </a:p>
                   </a:txBody>
@@ -10793,7 +10687,70 @@
                       <a:pPr algn="ctr"/>
                       <a:r>
                         <a:rPr sz="1300"/>
-                        <a:t>-14.12</a:t>
+                        <a:t>0.0213</a:t>
+                      </a:r>
+                    </a:p>
+                  </a:txBody>
+                  <a:tcPr anchor="ctr"/>
+                </a:tc>
+                <a:extLst>
+                  <a:ext uri="{0D108BD9-81ED-4DB2-BD59-A6C34878D82A}">
+                    <a16:rowId xmlns:a16="http://schemas.microsoft.com/office/drawing/2014/main" val="1446832005"/>
+                  </a:ext>
+                </a:extLst>
+              </a:tr>
+              <a:tr h="370840">
+                <a:tc>
+                  <a:txBody>
+                    <a:bodyPr/>
+                    <a:lstStyle/>
+                    <a:p>
+                      <a:pPr algn="ctr"/>
+                      <a:r>
+                        <a:rPr sz="1300" dirty="0"/>
+                        <a:t>Weight</a:t>
+                      </a:r>
+                    </a:p>
+                  </a:txBody>
+                  <a:tcPr anchor="ctr"/>
+                </a:tc>
+                <a:tc>
+                  <a:txBody>
+                    <a:bodyPr/>
+                    <a:lstStyle/>
+                    <a:p>
+                      <a:pPr algn="ctr"/>
+                      <a:r>
+                        <a:rPr sz="1300"/>
+                        <a:t>57.86 (TP)</a:t>
+                      </a:r>
+                    </a:p>
+                  </a:txBody>
+                  <a:tcPr anchor="ctr"/>
+                </a:tc>
+                <a:tc>
+                  <a:txBody>
+                    <a:bodyPr/>
+                    <a:lstStyle/>
+                    <a:p>
+                      <a:pPr algn="ctr"/>
+                      <a:r>
+                        <a:rPr sz="1300"/>
+                        <a:t>60.31 (FP)</a:t>
+                      </a:r>
+                    </a:p>
+                  </a:txBody>
+                  <a:tcPr anchor="ctr"/>
+                </a:tc>
+                <a:tc>
+                  <a:txBody>
+                    <a:bodyPr/>
+                    <a:lstStyle/>
+                    <a:p>
+                      <a:pPr algn="ctr"/>
+                      <a:r>
+                        <a:rPr sz="1300"/>
+                        <a:t>-2.45</a:t>
                       </a:r>
                     </a:p>
                   </a:txBody>
@@ -10807,7 +10764,21 @@
                       <a:pPr algn="ctr"/>
                       <a:r>
                         <a:rPr sz="1300" dirty="0"/>
-                        <a:t>&lt;0.001</a:t>
+                        <a:t>-2.23</a:t>
+                      </a:r>
+                    </a:p>
+                  </a:txBody>
+                  <a:tcPr anchor="ctr"/>
+                </a:tc>
+                <a:tc>
+                  <a:txBody>
+                    <a:bodyPr/>
+                    <a:lstStyle/>
+                    <a:p>
+                      <a:pPr algn="ctr"/>
+                      <a:r>
+                        <a:rPr sz="1300" dirty="0"/>
+                        <a:t>0.0272</a:t>
                       </a:r>
                     </a:p>
                   </a:txBody>
@@ -10815,7 +10786,7 @@
                 </a:tc>
                 <a:extLst>
                   <a:ext uri="{0D108BD9-81ED-4DB2-BD59-A6C34878D82A}">
-                    <a16:rowId xmlns:a16="http://schemas.microsoft.com/office/drawing/2014/main" val="10003"/>
+                    <a16:rowId xmlns:a16="http://schemas.microsoft.com/office/drawing/2014/main" val="91012224"/>
                   </a:ext>
                 </a:extLst>
               </a:tr>
@@ -10888,6 +10859,548 @@
           </a:p>
         </p:txBody>
       </p:sp>
+      <p:sp>
+        <p:nvSpPr>
+          <p:cNvPr id="3" name="내용 개체 틀 2">
+            <a:extLst>
+              <a:ext uri="{FF2B5EF4-FFF2-40B4-BE49-F238E27FC236}">
+                <a16:creationId xmlns:a16="http://schemas.microsoft.com/office/drawing/2014/main" id="{3A2DAB41-2035-BDBA-E4F8-3F894B486658}"/>
+              </a:ext>
+            </a:extLst>
+          </p:cNvPr>
+          <p:cNvSpPr>
+            <a:spLocks noGrp="1"/>
+          </p:cNvSpPr>
+          <p:nvPr>
+            <p:ph idx="1"/>
+          </p:nvPr>
+        </p:nvSpPr>
+        <p:spPr/>
+        <p:txBody>
+          <a:bodyPr>
+            <a:normAutofit/>
+          </a:bodyPr>
+          <a:lstStyle/>
+          <a:p>
+            <a:r>
+              <a:rPr sz="1800" dirty="0"/>
+              <a:t>Stage 2 </a:t>
+            </a:r>
+            <a:r>
+              <a:rPr sz="1800" dirty="0" err="1"/>
+              <a:t>대상군</a:t>
+            </a:r>
+            <a:r>
+              <a:rPr sz="1800" dirty="0"/>
+              <a:t>(TP/FP) AEC-128 </a:t>
+            </a:r>
+            <a:r>
+              <a:rPr sz="1800" dirty="0" err="1"/>
+              <a:t>곡선</a:t>
+            </a:r>
+            <a:r>
+              <a:rPr sz="1800" dirty="0"/>
+              <a:t> </a:t>
+            </a:r>
+            <a:r>
+              <a:rPr sz="1800" dirty="0" err="1"/>
+              <a:t>비교</a:t>
+            </a:r>
+            <a:endParaRPr sz="1800" dirty="0"/>
+          </a:p>
+          <a:p>
+            <a:pPr lvl="1"/>
+            <a:r>
+              <a:rPr sz="1600" dirty="0"/>
+              <a:t>TP vs FP </a:t>
+            </a:r>
+            <a:r>
+              <a:rPr sz="1600" dirty="0" err="1"/>
+              <a:t>환자군의</a:t>
+            </a:r>
+            <a:r>
+              <a:rPr sz="1600" dirty="0"/>
+              <a:t> patient-normalized AEC-128 </a:t>
+            </a:r>
+            <a:r>
+              <a:rPr sz="1600" dirty="0" err="1"/>
+              <a:t>곡선</a:t>
+            </a:r>
+            <a:r>
+              <a:rPr sz="1600" dirty="0"/>
+              <a:t> </a:t>
+            </a:r>
+            <a:r>
+              <a:rPr sz="1600" dirty="0" err="1"/>
+              <a:t>비교</a:t>
+            </a:r>
+            <a:r>
+              <a:rPr sz="1600" dirty="0"/>
+              <a:t> (</a:t>
+            </a:r>
+            <a:r>
+              <a:rPr sz="1600" dirty="0" err="1"/>
+              <a:t>잔차화</a:t>
+            </a:r>
+            <a:r>
+              <a:rPr sz="1600" dirty="0"/>
+              <a:t> 전, raw curve)</a:t>
+            </a:r>
+          </a:p>
+          <a:p>
+            <a:pPr marL="457200" lvl="1" indent="0">
+              <a:buNone/>
+            </a:pPr>
+            <a:r>
+              <a:rPr sz="1600" dirty="0"/>
+              <a:t>→ raw </a:t>
+            </a:r>
+            <a:r>
+              <a:rPr sz="1600" dirty="0" err="1"/>
+              <a:t>AEC만으로는</a:t>
+            </a:r>
+            <a:r>
+              <a:rPr sz="1600" dirty="0"/>
+              <a:t> </a:t>
+            </a:r>
+            <a:r>
+              <a:rPr sz="1600" dirty="0" err="1"/>
+              <a:t>코호트</a:t>
+            </a:r>
+            <a:r>
+              <a:rPr sz="1600" dirty="0"/>
+              <a:t> 간 </a:t>
+            </a:r>
+            <a:r>
+              <a:rPr sz="1600" dirty="0" err="1"/>
+              <a:t>일관된</a:t>
+            </a:r>
+            <a:r>
+              <a:rPr sz="1600" dirty="0"/>
+              <a:t> TP/FP </a:t>
+            </a:r>
+            <a:r>
+              <a:rPr sz="1600" dirty="0" err="1"/>
+              <a:t>신호</a:t>
+            </a:r>
+            <a:r>
+              <a:rPr sz="1600" dirty="0"/>
+              <a:t> </a:t>
+            </a:r>
+            <a:r>
+              <a:rPr sz="1600" dirty="0" err="1"/>
+              <a:t>없음</a:t>
+            </a:r>
+            <a:r>
+              <a:rPr sz="1600" dirty="0"/>
+              <a:t> — clinical </a:t>
+            </a:r>
+            <a:r>
+              <a:rPr sz="1600" dirty="0" err="1"/>
+              <a:t>변수</a:t>
+            </a:r>
+            <a:r>
+              <a:rPr sz="1600" dirty="0"/>
+              <a:t> confound </a:t>
+            </a:r>
+            <a:r>
+              <a:rPr sz="1600" dirty="0" err="1"/>
+              <a:t>가능성</a:t>
+            </a:r>
+            <a:r>
+              <a:rPr sz="1600" dirty="0"/>
+              <a:t>, residual </a:t>
+            </a:r>
+            <a:r>
+              <a:rPr sz="1600" dirty="0" err="1"/>
+              <a:t>접근</a:t>
+            </a:r>
+            <a:r>
+              <a:rPr sz="1600" dirty="0"/>
+              <a:t> </a:t>
+            </a:r>
+            <a:r>
+              <a:rPr sz="1600" dirty="0" err="1"/>
+              <a:t>필요성을</a:t>
+            </a:r>
+            <a:r>
+              <a:rPr sz="1600" dirty="0"/>
+              <a:t> </a:t>
+            </a:r>
+            <a:r>
+              <a:rPr sz="1600" dirty="0" err="1"/>
+              <a:t>뒷받침</a:t>
+            </a:r>
+            <a:endParaRPr sz="1600" dirty="0"/>
+          </a:p>
+        </p:txBody>
+      </p:sp>
+      <p:grpSp>
+        <p:nvGrpSpPr>
+          <p:cNvPr id="7" name="그룹 6">
+            <a:extLst>
+              <a:ext uri="{FF2B5EF4-FFF2-40B4-BE49-F238E27FC236}">
+                <a16:creationId xmlns:a16="http://schemas.microsoft.com/office/drawing/2014/main" id="{26C388CB-8A1B-1F40-7549-1CEDA1A4F6F8}"/>
+              </a:ext>
+            </a:extLst>
+          </p:cNvPr>
+          <p:cNvGrpSpPr/>
+          <p:nvPr/>
+        </p:nvGrpSpPr>
+        <p:grpSpPr>
+          <a:xfrm>
+            <a:off x="1809738" y="3633441"/>
+            <a:ext cx="8572523" cy="2654186"/>
+            <a:chOff x="-2177264" y="198565"/>
+            <a:chExt cx="11304347" cy="3500001"/>
+          </a:xfrm>
+        </p:grpSpPr>
+        <p:pic>
+          <p:nvPicPr>
+            <p:cNvPr id="4" name="Picture 3" descr="16_aec_curve_tp_vs_fp.png"/>
+            <p:cNvPicPr>
+              <a:picLocks noChangeAspect="1"/>
+            </p:cNvPicPr>
+            <p:nvPr/>
+          </p:nvPicPr>
+          <p:blipFill>
+            <a:blip r:embed="rId3"/>
+            <a:stretch>
+              <a:fillRect/>
+            </a:stretch>
+          </p:blipFill>
+          <p:spPr>
+            <a:xfrm>
+              <a:off x="-2177264" y="198566"/>
+              <a:ext cx="5124000" cy="3500000"/>
+            </a:xfrm>
+            <a:prstGeom prst="rect">
+              <a:avLst/>
+            </a:prstGeom>
+          </p:spPr>
+        </p:pic>
+        <p:pic>
+          <p:nvPicPr>
+            <p:cNvPr id="5" name="Picture 4" descr="16_aec_curve_tp_vs_fp.png"/>
+            <p:cNvPicPr>
+              <a:picLocks noChangeAspect="1"/>
+            </p:cNvPicPr>
+            <p:nvPr/>
+          </p:nvPicPr>
+          <p:blipFill>
+            <a:blip r:embed="rId4"/>
+            <a:stretch>
+              <a:fillRect/>
+            </a:stretch>
+          </p:blipFill>
+          <p:spPr>
+            <a:xfrm>
+              <a:off x="4003083" y="198565"/>
+              <a:ext cx="5124000" cy="3499999"/>
+            </a:xfrm>
+            <a:prstGeom prst="rect">
+              <a:avLst/>
+            </a:prstGeom>
+          </p:spPr>
+        </p:pic>
+      </p:grpSp>
+      <p:graphicFrame>
+        <p:nvGraphicFramePr>
+          <p:cNvPr id="6" name="Table 5"/>
+          <p:cNvGraphicFramePr>
+            <a:graphicFrameLocks noGrp="1"/>
+          </p:cNvGraphicFramePr>
+          <p:nvPr>
+            <p:extLst>
+              <p:ext uri="{D42A27DB-BD31-4B8C-83A1-F6EECF244321}">
+                <p14:modId xmlns:p14="http://schemas.microsoft.com/office/powerpoint/2010/main" val="2546154062"/>
+              </p:ext>
+            </p:extLst>
+          </p:nvPr>
+        </p:nvGraphicFramePr>
+        <p:xfrm>
+          <a:off x="2500162" y="2429001"/>
+          <a:ext cx="7191675" cy="1000000"/>
+        </p:xfrm>
+        <a:graphic>
+          <a:graphicData uri="http://schemas.openxmlformats.org/drawingml/2006/table">
+            <a:tbl>
+              <a:tblPr firstRow="1" bandRow="1">
+                <a:tableStyleId>{9D7B26C5-4107-4FEC-AEDC-1716B250A1EF}</a:tableStyleId>
+              </a:tblPr>
+              <a:tblGrid>
+                <a:gridCol w="1438335">
+                  <a:extLst>
+                    <a:ext uri="{9D8B030D-6E8A-4147-A177-3AD203B41FA5}">
+                      <a16:colId xmlns:a16="http://schemas.microsoft.com/office/drawing/2014/main" val="20000"/>
+                    </a:ext>
+                  </a:extLst>
+                </a:gridCol>
+                <a:gridCol w="1438335">
+                  <a:extLst>
+                    <a:ext uri="{9D8B030D-6E8A-4147-A177-3AD203B41FA5}">
+                      <a16:colId xmlns:a16="http://schemas.microsoft.com/office/drawing/2014/main" val="20001"/>
+                    </a:ext>
+                  </a:extLst>
+                </a:gridCol>
+                <a:gridCol w="1438335">
+                  <a:extLst>
+                    <a:ext uri="{9D8B030D-6E8A-4147-A177-3AD203B41FA5}">
+                      <a16:colId xmlns:a16="http://schemas.microsoft.com/office/drawing/2014/main" val="20002"/>
+                    </a:ext>
+                  </a:extLst>
+                </a:gridCol>
+                <a:gridCol w="1438335">
+                  <a:extLst>
+                    <a:ext uri="{9D8B030D-6E8A-4147-A177-3AD203B41FA5}">
+                      <a16:colId xmlns:a16="http://schemas.microsoft.com/office/drawing/2014/main" val="20003"/>
+                    </a:ext>
+                  </a:extLst>
+                </a:gridCol>
+                <a:gridCol w="1438335">
+                  <a:extLst>
+                    <a:ext uri="{9D8B030D-6E8A-4147-A177-3AD203B41FA5}">
+                      <a16:colId xmlns:a16="http://schemas.microsoft.com/office/drawing/2014/main" val="20004"/>
+                    </a:ext>
+                  </a:extLst>
+                </a:gridCol>
+              </a:tblGrid>
+              <a:tr h="333333">
+                <a:tc>
+                  <a:txBody>
+                    <a:bodyPr/>
+                    <a:lstStyle/>
+                    <a:p>
+                      <a:pPr algn="ctr"/>
+                      <a:r>
+                        <a:rPr sz="1200"/>
+                        <a:t>코호트</a:t>
+                      </a:r>
+                    </a:p>
+                  </a:txBody>
+                  <a:tcPr anchor="ctr"/>
+                </a:tc>
+                <a:tc>
+                  <a:txBody>
+                    <a:bodyPr/>
+                    <a:lstStyle/>
+                    <a:p>
+                      <a:pPr algn="ctr"/>
+                      <a:r>
+                        <a:rPr sz="1200"/>
+                        <a:t>curve RMSD</a:t>
+                      </a:r>
+                    </a:p>
+                  </a:txBody>
+                  <a:tcPr anchor="ctr"/>
+                </a:tc>
+                <a:tc>
+                  <a:txBody>
+                    <a:bodyPr/>
+                    <a:lstStyle/>
+                    <a:p>
+                      <a:pPr algn="ctr"/>
+                      <a:r>
+                        <a:rPr sz="1200"/>
+                        <a:t>perm p</a:t>
+                      </a:r>
+                    </a:p>
+                  </a:txBody>
+                  <a:tcPr anchor="ctr"/>
+                </a:tc>
+                <a:tc>
+                  <a:txBody>
+                    <a:bodyPr/>
+                    <a:lstStyle/>
+                    <a:p>
+                      <a:pPr algn="ctr"/>
+                      <a:r>
+                        <a:rPr sz="1200"/>
+                        <a:t>유의성</a:t>
+                      </a:r>
+                    </a:p>
+                  </a:txBody>
+                  <a:tcPr anchor="ctr"/>
+                </a:tc>
+                <a:tc>
+                  <a:txBody>
+                    <a:bodyPr/>
+                    <a:lstStyle/>
+                    <a:p>
+                      <a:pPr algn="ctr"/>
+                      <a:r>
+                        <a:rPr sz="1200"/>
+                        <a:t>peak slice / 방향</a:t>
+                      </a:r>
+                    </a:p>
+                  </a:txBody>
+                  <a:tcPr anchor="ctr"/>
+                </a:tc>
+                <a:extLst>
+                  <a:ext uri="{0D108BD9-81ED-4DB2-BD59-A6C34878D82A}">
+                    <a16:rowId xmlns:a16="http://schemas.microsoft.com/office/drawing/2014/main" val="10000"/>
+                  </a:ext>
+                </a:extLst>
+              </a:tr>
+              <a:tr h="333333">
+                <a:tc>
+                  <a:txBody>
+                    <a:bodyPr/>
+                    <a:lstStyle/>
+                    <a:p>
+                      <a:pPr algn="ctr"/>
+                      <a:r>
+                        <a:rPr sz="1200" dirty="0"/>
+                        <a:t>Gangnam</a:t>
+                      </a:r>
+                    </a:p>
+                  </a:txBody>
+                  <a:tcPr anchor="ctr"/>
+                </a:tc>
+                <a:tc>
+                  <a:txBody>
+                    <a:bodyPr/>
+                    <a:lstStyle/>
+                    <a:p>
+                      <a:pPr algn="ctr"/>
+                      <a:r>
+                        <a:rPr sz="1200"/>
+                        <a:t>0.0155</a:t>
+                      </a:r>
+                    </a:p>
+                  </a:txBody>
+                  <a:tcPr anchor="ctr"/>
+                </a:tc>
+                <a:tc>
+                  <a:txBody>
+                    <a:bodyPr/>
+                    <a:lstStyle/>
+                    <a:p>
+                      <a:pPr algn="ctr"/>
+                      <a:r>
+                        <a:rPr sz="1200"/>
+                        <a:t>0.227</a:t>
+                      </a:r>
+                    </a:p>
+                  </a:txBody>
+                  <a:tcPr anchor="ctr"/>
+                </a:tc>
+                <a:tc>
+                  <a:txBody>
+                    <a:bodyPr/>
+                    <a:lstStyle/>
+                    <a:p>
+                      <a:pPr algn="ctr"/>
+                      <a:r>
+                        <a:rPr sz="1200"/>
+                        <a:t>유의하지 않음</a:t>
+                      </a:r>
+                    </a:p>
+                  </a:txBody>
+                  <a:tcPr anchor="ctr"/>
+                </a:tc>
+                <a:tc>
+                  <a:txBody>
+                    <a:bodyPr/>
+                    <a:lstStyle/>
+                    <a:p>
+                      <a:pPr algn="ctr"/>
+                      <a:r>
+                        <a:rPr sz="1200"/>
+                        <a:t>slice 124</a:t>
+                      </a:r>
+                    </a:p>
+                  </a:txBody>
+                  <a:tcPr anchor="ctr"/>
+                </a:tc>
+                <a:extLst>
+                  <a:ext uri="{0D108BD9-81ED-4DB2-BD59-A6C34878D82A}">
+                    <a16:rowId xmlns:a16="http://schemas.microsoft.com/office/drawing/2014/main" val="10001"/>
+                  </a:ext>
+                </a:extLst>
+              </a:tr>
+              <a:tr h="333334">
+                <a:tc>
+                  <a:txBody>
+                    <a:bodyPr/>
+                    <a:lstStyle/>
+                    <a:p>
+                      <a:pPr algn="ctr"/>
+                      <a:r>
+                        <a:rPr sz="1200" dirty="0"/>
+                        <a:t>Sinchon</a:t>
+                      </a:r>
+                    </a:p>
+                  </a:txBody>
+                  <a:tcPr anchor="ctr"/>
+                </a:tc>
+                <a:tc>
+                  <a:txBody>
+                    <a:bodyPr/>
+                    <a:lstStyle/>
+                    <a:p>
+                      <a:pPr algn="ctr"/>
+                      <a:r>
+                        <a:rPr sz="1200"/>
+                        <a:t>0.0274</a:t>
+                      </a:r>
+                    </a:p>
+                  </a:txBody>
+                  <a:tcPr anchor="ctr"/>
+                </a:tc>
+                <a:tc>
+                  <a:txBody>
+                    <a:bodyPr/>
+                    <a:lstStyle/>
+                    <a:p>
+                      <a:pPr algn="ctr"/>
+                      <a:r>
+                        <a:rPr sz="1200" dirty="0"/>
+                        <a:t>0.0175</a:t>
+                      </a:r>
+                    </a:p>
+                  </a:txBody>
+                  <a:tcPr anchor="ctr"/>
+                </a:tc>
+                <a:tc>
+                  <a:txBody>
+                    <a:bodyPr/>
+                    <a:lstStyle/>
+                    <a:p>
+                      <a:pPr algn="ctr"/>
+                      <a:r>
+                        <a:rPr sz="1200" dirty="0" err="1"/>
+                        <a:t>유의함</a:t>
+                      </a:r>
+                      <a:endParaRPr sz="1200" dirty="0"/>
+                    </a:p>
+                  </a:txBody>
+                  <a:tcPr anchor="ctr"/>
+                </a:tc>
+                <a:tc>
+                  <a:txBody>
+                    <a:bodyPr/>
+                    <a:lstStyle/>
+                    <a:p>
+                      <a:pPr algn="ctr"/>
+                      <a:r>
+                        <a:rPr sz="1200" dirty="0"/>
+                        <a:t>slice 3</a:t>
+                      </a:r>
+                    </a:p>
+                  </a:txBody>
+                  <a:tcPr anchor="ctr"/>
+                </a:tc>
+                <a:extLst>
+                  <a:ext uri="{0D108BD9-81ED-4DB2-BD59-A6C34878D82A}">
+                    <a16:rowId xmlns:a16="http://schemas.microsoft.com/office/drawing/2014/main" val="10002"/>
+                  </a:ext>
+                </a:extLst>
+              </a:tr>
+            </a:tbl>
+          </a:graphicData>
+        </a:graphic>
+      </p:graphicFrame>
     </p:spTree>
     <p:extLst>
       <p:ext uri="{BB962C8B-B14F-4D97-AF65-F5344CB8AC3E}">

--- a/docs/260724_Results_of_Residual_Algorithm.pptx
+++ b/docs/260724_Results_of_Residual_Algorithm.pptx
@@ -5,38 +5,38 @@
     <p:sldMasterId id="2147483648" r:id="rId1"/>
   </p:sldMasterIdLst>
   <p:notesMasterIdLst>
-    <p:notesMasterId r:id="rId18"/>
+    <p:notesMasterId r:id="rId20"/>
   </p:notesMasterIdLst>
   <p:sldIdLst>
     <p:sldId id="256" r:id="rId2"/>
-    <p:sldId id="531" r:id="rId27"/>
-    <p:sldId id="532" r:id="rId28"/>
-    <p:sldId id="495" r:id="rId3"/>
-    <p:sldId id="507" r:id="rId4"/>
-    <p:sldId id="481" r:id="rId5"/>
-    <p:sldId id="519" r:id="rId6"/>
-    <p:sldId id="523" r:id="rId7"/>
-    <p:sldId id="530" r:id="rId8"/>
-    <p:sldId id="527" r:id="rId9"/>
-    <p:sldId id="493" r:id="rId10"/>
-    <p:sldId id="479" r:id="rId11"/>
-    <p:sldId id="512" r:id="rId12"/>
-    <p:sldId id="514" r:id="rId13"/>
-    <p:sldId id="526" r:id="rId14"/>
-    <p:sldId id="525" r:id="rId15"/>
-    <p:sldId id="528" r:id="rId16"/>
-    <p:sldId id="529" r:id="rId17"/>
+    <p:sldId id="531" r:id="rId3"/>
+    <p:sldId id="532" r:id="rId4"/>
+    <p:sldId id="495" r:id="rId5"/>
+    <p:sldId id="507" r:id="rId6"/>
+    <p:sldId id="481" r:id="rId7"/>
+    <p:sldId id="519" r:id="rId8"/>
+    <p:sldId id="523" r:id="rId9"/>
+    <p:sldId id="530" r:id="rId10"/>
+    <p:sldId id="527" r:id="rId11"/>
+    <p:sldId id="493" r:id="rId12"/>
+    <p:sldId id="479" r:id="rId13"/>
+    <p:sldId id="512" r:id="rId14"/>
+    <p:sldId id="514" r:id="rId15"/>
+    <p:sldId id="526" r:id="rId16"/>
+    <p:sldId id="525" r:id="rId17"/>
+    <p:sldId id="528" r:id="rId18"/>
+    <p:sldId id="529" r:id="rId19"/>
   </p:sldIdLst>
   <p:sldSz cx="12192000" cy="6858000"/>
   <p:notesSz cx="6858000" cy="9144000"/>
   <p:embeddedFontLst>
     <p:embeddedFont>
       <p:font typeface="KoPub돋움체 Bold" panose="00000800000000000000" pitchFamily="2" charset="-127"/>
-      <p:bold r:id="rId19"/>
+      <p:bold r:id="rId21"/>
     </p:embeddedFont>
     <p:embeddedFont>
       <p:font typeface="KoPub돋움체 Medium" panose="00000600000000000000" pitchFamily="2" charset="-127"/>
-      <p:regular r:id="rId20"/>
+      <p:regular r:id="rId22"/>
     </p:embeddedFont>
   </p:embeddedFontLst>
   <p:defaultTextStyle>
@@ -140,6 +140,8 @@
         <p14:section name="기본 구역" id="{097B6DF2-66C3-4074-9053-F9AA00FED5D5}">
           <p14:sldIdLst>
             <p14:sldId id="256"/>
+            <p14:sldId id="531"/>
+            <p14:sldId id="532"/>
             <p14:sldId id="495"/>
             <p14:sldId id="507"/>
             <p14:sldId id="481"/>
@@ -2804,6 +2806,247 @@
 </file>
 
 <file path=ppt/notesSlides/notesSlide10.xml><?xml version="1.0" encoding="utf-8"?>
+<p:notes xmlns:a="http://schemas.openxmlformats.org/drawingml/2006/main" xmlns:r="http://schemas.openxmlformats.org/officeDocument/2006/relationships" xmlns:p="http://schemas.openxmlformats.org/presentationml/2006/main">
+  <p:cSld>
+    <p:spTree>
+      <p:nvGrpSpPr>
+        <p:cNvPr id="1" name="">
+          <a:extLst>
+            <a:ext uri="{FF2B5EF4-FFF2-40B4-BE49-F238E27FC236}">
+              <a16:creationId xmlns:a16="http://schemas.microsoft.com/office/drawing/2014/main" id="{BB7E0E5C-04C1-45BB-B829-C4A47540F35A}"/>
+            </a:ext>
+          </a:extLst>
+        </p:cNvPr>
+        <p:cNvGrpSpPr/>
+        <p:nvPr/>
+      </p:nvGrpSpPr>
+      <p:grpSpPr>
+        <a:xfrm>
+          <a:off x="0" y="0"/>
+          <a:ext cx="0" cy="0"/>
+          <a:chOff x="0" y="0"/>
+          <a:chExt cx="0" cy="0"/>
+        </a:xfrm>
+      </p:grpSpPr>
+      <p:sp>
+        <p:nvSpPr>
+          <p:cNvPr id="2" name="Slide Image Placeholder 1">
+            <a:extLst>
+              <a:ext uri="{FF2B5EF4-FFF2-40B4-BE49-F238E27FC236}">
+                <a16:creationId xmlns:a16="http://schemas.microsoft.com/office/drawing/2014/main" id="{1CDAB559-215F-5DB1-4E7E-701BE7F3379E}"/>
+              </a:ext>
+            </a:extLst>
+          </p:cNvPr>
+          <p:cNvSpPr>
+            <a:spLocks noGrp="1" noRot="1" noChangeAspect="1"/>
+          </p:cNvSpPr>
+          <p:nvPr>
+            <p:ph type="sldImg" idx="2"/>
+          </p:nvPr>
+        </p:nvSpPr>
+        <p:spPr/>
+      </p:sp>
+      <p:sp>
+        <p:nvSpPr>
+          <p:cNvPr id="3" name="Notes Placeholder 2">
+            <a:extLst>
+              <a:ext uri="{FF2B5EF4-FFF2-40B4-BE49-F238E27FC236}">
+                <a16:creationId xmlns:a16="http://schemas.microsoft.com/office/drawing/2014/main" id="{1C596FD6-6801-38EC-8C36-F53F5E1F8D86}"/>
+              </a:ext>
+            </a:extLst>
+          </p:cNvPr>
+          <p:cNvSpPr>
+            <a:spLocks noGrp="1"/>
+          </p:cNvSpPr>
+          <p:nvPr>
+            <p:ph type="body" sz="quarter" idx="3"/>
+          </p:nvPr>
+        </p:nvSpPr>
+        <p:spPr/>
+        <p:txBody>
+          <a:bodyPr/>
+          <a:lstStyle/>
+          <a:p>
+            <a:r>
+              <a:t>산출: code/stage2_model.py main() (outputs/stage2_model/, CLIN_BRANCH_VARIANT="frozen_lr" 기본값, Stage-1 score를 predict_proba에서 decision_function(log-odds)으로 전환 후 재실행, 2026-07-22).</a:t>
+            </a:r>
+          </a:p>
+          <a:p>
+            <a:r>
+              <a:t>버그: frozen_lr의 z_clin이 Stage-1 raw LR score(decision_function, log-odds)를 그대로 사용 -- 확률이 아니라 log-odds라 부호 자체는 문제가 아니었다(Stage-2 코호트 94%가 음수). 실제 문제는 척도: raw score가 mean=-1.5704/std=0.9154로 원점에서 크게 벗어나 있어, 표준화 없이 그대로 fusion에 넣으면 학습이 이 오프셋에 끌려간다(raw 그대로 학습 시 internal Net NRI=+49/external Net NRI=0 -- 슬라이드7 참고). 수정: raw score를 internal Stage-2 코호트 기준으로 z-score 표준화(mean/std를 internal에서 1회 fit, external엔 frozen 적용 -- clinical feature 표준화와 동일 패턴)하여 이 오프셋을 제거.</a:t>
+            </a:r>
+          </a:p>
+          <a:p>
+            <a:r>
+              <a:t>Net NRI = fp_removed - tp_lost (build_clinical_vs_aec_row) -- Stage-2가 screen-positive(TP/FP)만 재분류하므로 가능한 전이는 Positive-&gt;Negative 한 방향뿐. 특이도/민감도 McNemar는 exact_mcnemar_p(discordant pair 이항검정).</a:t>
+            </a:r>
+          </a:p>
+          <a:p>
+            <a:r>
+              <a:t>internal: Net NRI +71, sens 0.907-&gt;0.868(p=0.0625 n.s.), spec 0.535-&gt;0.614(p&lt;0.0001). NI test: sens 86.8%&gt;=floor 86.2% PASS.</a:t>
+            </a:r>
+          </a:p>
+          <a:p>
+            <a:r>
+              <a:t>external: Net NRI +34(raw 그대로면 0 -- 슬라이드7 참고), sens 0.929-&gt;0.887(p=0.0312), spec 0.493-&gt;0.544(p&lt;0.0001). NI test: sens 88.7%&gt;=floor 88.3% PASS.</a:t>
+            </a:r>
+          </a:p>
+          <a:p>
+            <a:r>
+              <a:t>전체곡선 AUC/DeLong: internal 0.828-&gt;0.828(diff +0.0001, p=0.858 n.s.), external 0.835-&gt;0.835(diff +0.00002, p=0.247 n.s.) -- stage1_vs_full_pipeline_auc.csv. AUC 비교는 marker의 incremental value 검출에 저출력이라(Pepe 2004; Pencina 2008) NRI/McNemar를 1차 유의성 지표로 삼음.</a:t>
+            </a:r>
+          </a:p>
+          <a:p>
+            <a:r>
+              <a:t>해석: raw log-odds를 표준화 없이 그대로 쓰면 external에서 전혀 재분류가 일어나지 않는다(Net NRI=0) -- 표준화가 정보를 추가한 게 아니라 raw score가 갖고 있던 스케일/오프셋 의존성을 제거해 학습이 실제 판별정보에 도달하게 한 것.</a:t>
+            </a:r>
+          </a:p>
+          <a:p>
+            <a:r>
+              <a:t>[참고] 위 mlp-&gt;frozen_lr 비교(+38-&gt;+74 internal, +10-&gt;+15 external)는 클리니컬 브랜치 구조 자체를 바꾼 별도 ablation 결과이며, predict_proba 기반 raw score와 구 표준화 fix 기준이라 이번 decision_function 전환(2026-07-22) 이전 수치임 -- 재실행 전까지 참고용으로만 볼 것 (관련: 슬라이드15 Clinical Branch 비교표도 동일 사유로 재실행 필요).</a:t>
+            </a:r>
+          </a:p>
+        </p:txBody>
+      </p:sp>
+      <p:sp>
+        <p:nvSpPr>
+          <p:cNvPr id="4" name="Slide Number Placeholder 3">
+            <a:extLst>
+              <a:ext uri="{FF2B5EF4-FFF2-40B4-BE49-F238E27FC236}">
+                <a16:creationId xmlns:a16="http://schemas.microsoft.com/office/drawing/2014/main" id="{5A06CFD1-2C5C-893A-DFA3-8C07CCEC77D4}"/>
+              </a:ext>
+            </a:extLst>
+          </p:cNvPr>
+          <p:cNvSpPr>
+            <a:spLocks noGrp="1"/>
+          </p:cNvSpPr>
+          <p:nvPr>
+            <p:ph type="sldNum" sz="quarter" idx="5"/>
+          </p:nvPr>
+        </p:nvSpPr>
+        <p:spPr/>
+      </p:sp>
+    </p:spTree>
+    <p:extLst>
+      <p:ext uri="{BB962C8B-B14F-4D97-AF65-F5344CB8AC3E}">
+        <p14:creationId xmlns:p14="http://schemas.microsoft.com/office/powerpoint/2010/main" val="2301682998"/>
+      </p:ext>
+    </p:extLst>
+  </p:cSld>
+  <p:clrMapOvr>
+    <a:masterClrMapping/>
+  </p:clrMapOvr>
+</p:notes>
+</file>
+
+<file path=ppt/notesSlides/notesSlide11.xml><?xml version="1.0" encoding="utf-8"?>
+<p:notes xmlns:a="http://schemas.openxmlformats.org/drawingml/2006/main" xmlns:r="http://schemas.openxmlformats.org/officeDocument/2006/relationships" xmlns:p="http://schemas.openxmlformats.org/presentationml/2006/main">
+  <p:cSld>
+    <p:spTree>
+      <p:nvGrpSpPr>
+        <p:cNvPr id="1" name="">
+          <a:extLst>
+            <a:ext uri="{FF2B5EF4-FFF2-40B4-BE49-F238E27FC236}">
+              <a16:creationId xmlns:a16="http://schemas.microsoft.com/office/drawing/2014/main" id="{43184DDD-DB88-1198-AE20-99EE558424C0}"/>
+            </a:ext>
+          </a:extLst>
+        </p:cNvPr>
+        <p:cNvGrpSpPr/>
+        <p:nvPr/>
+      </p:nvGrpSpPr>
+      <p:grpSpPr>
+        <a:xfrm>
+          <a:off x="0" y="0"/>
+          <a:ext cx="0" cy="0"/>
+          <a:chOff x="0" y="0"/>
+          <a:chExt cx="0" cy="0"/>
+        </a:xfrm>
+      </p:grpSpPr>
+      <p:sp>
+        <p:nvSpPr>
+          <p:cNvPr id="2" name="Slide Image Placeholder 1">
+            <a:extLst>
+              <a:ext uri="{FF2B5EF4-FFF2-40B4-BE49-F238E27FC236}">
+                <a16:creationId xmlns:a16="http://schemas.microsoft.com/office/drawing/2014/main" id="{F7E975FB-D658-DC16-816D-FF3FDA948C88}"/>
+              </a:ext>
+            </a:extLst>
+          </p:cNvPr>
+          <p:cNvSpPr>
+            <a:spLocks noGrp="1" noRot="1" noChangeAspect="1"/>
+          </p:cNvSpPr>
+          <p:nvPr>
+            <p:ph type="sldImg" idx="2"/>
+          </p:nvPr>
+        </p:nvSpPr>
+        <p:spPr/>
+      </p:sp>
+      <p:sp>
+        <p:nvSpPr>
+          <p:cNvPr id="3" name="Notes Placeholder 2">
+            <a:extLst>
+              <a:ext uri="{FF2B5EF4-FFF2-40B4-BE49-F238E27FC236}">
+                <a16:creationId xmlns:a16="http://schemas.microsoft.com/office/drawing/2014/main" id="{DD142530-BB5E-9577-34FA-97B57F1BE2D6}"/>
+              </a:ext>
+            </a:extLst>
+          </p:cNvPr>
+          <p:cNvSpPr>
+            <a:spLocks noGrp="1"/>
+          </p:cNvSpPr>
+          <p:nvPr>
+            <p:ph type="body" sz="quarter" idx="3"/>
+          </p:nvPr>
+        </p:nvSpPr>
+        <p:spPr/>
+        <p:txBody>
+          <a:bodyPr/>
+          <a:lstStyle/>
+          <a:p>
+            <a:r>
+              <a:t>[초안 -- 슬라이드 본문이 아직 비어 있어 앞선 슬라이드(6번, confound 제거 후보 4가지) 논리를 이어 구두 설명용으로 작성함. 슬라이드 본문 채울 때 참고]</a:t>
+            </a:r>
+          </a:p>
+          <a:p>
+            <a:endParaRPr/>
+          </a:p>
+          <a:p>
+            <a:r>
+              <a:t>우선순위: ④ joint fusion은 이미 stage2_model.py에 적용 중이므로, 나머지 confound 제거 후보 중 ① cross-validated confound regression(Snoek 2019, fold별 재적합)을 가장 먼저 재도입 -- 기존 잔차화가 internal 전체에 1회만 적합해 생긴 편향을 바로잡는 가장 직접적인 수정이기 때문. 그다음 external 잔여confound가 여전히 남을 경우 ② counterfactual adjustment(Chaibub Neto 2021)로 dataset shift에 더 안정적인 대안을 시도. ③ covariate-adjusted subspace projection(Li 2017)은 파이프라인 전체를 재설계해야 해서 우선순위가 가장 낮음.</a:t>
+            </a:r>
+          </a:p>
+        </p:txBody>
+      </p:sp>
+      <p:sp>
+        <p:nvSpPr>
+          <p:cNvPr id="4" name="Slide Number Placeholder 3">
+            <a:extLst>
+              <a:ext uri="{FF2B5EF4-FFF2-40B4-BE49-F238E27FC236}">
+                <a16:creationId xmlns:a16="http://schemas.microsoft.com/office/drawing/2014/main" id="{E283E6E2-A4F3-0543-FDD9-B032A1CF5983}"/>
+              </a:ext>
+            </a:extLst>
+          </p:cNvPr>
+          <p:cNvSpPr>
+            <a:spLocks noGrp="1"/>
+          </p:cNvSpPr>
+          <p:nvPr>
+            <p:ph type="sldNum" sz="quarter" idx="5"/>
+          </p:nvPr>
+        </p:nvSpPr>
+        <p:spPr/>
+      </p:sp>
+    </p:spTree>
+    <p:extLst>
+      <p:ext uri="{BB962C8B-B14F-4D97-AF65-F5344CB8AC3E}">
+        <p14:creationId xmlns:p14="http://schemas.microsoft.com/office/powerpoint/2010/main" val="150755397"/>
+      </p:ext>
+    </p:extLst>
+  </p:cSld>
+  <p:clrMapOvr>
+    <a:masterClrMapping/>
+  </p:clrMapOvr>
+</p:notes>
+</file>
+
+<file path=ppt/notesSlides/notesSlide12.xml><?xml version="1.0" encoding="utf-8"?>
 <p:notes xmlns:a="http://schemas.openxmlformats.org/drawingml/2006/main" xmlns:r="http://schemas.openxmlformats.org/officeDocument/2006/relationships" xmlns:p="http://schemas.openxmlformats.org/presentationml/2006/main" showMasterSp="0" showMasterPhAnim="0">
   <p:cSld>
     <p:spTree>
@@ -2931,7 +3174,7 @@
             </a:pPr>
             <a:fld id="{00000000-1234-1234-1234-123412341234}" type="slidenum">
               <a:rPr lang="en-US"/>
-              <a:t>10</a:t>
+              <a:t>12</a:t>
             </a:fld>
             <a:endParaRPr/>
           </a:p>
@@ -2950,7 +3193,7 @@
 </p:notes>
 </file>
 
-<file path=ppt/notesSlides/notesSlide11.xml><?xml version="1.0" encoding="utf-8"?>
+<file path=ppt/notesSlides/notesSlide13.xml><?xml version="1.0" encoding="utf-8"?>
 <p:notes xmlns:a="http://schemas.openxmlformats.org/drawingml/2006/main" xmlns:r="http://schemas.openxmlformats.org/officeDocument/2006/relationships" xmlns:p="http://schemas.openxmlformats.org/presentationml/2006/main">
   <p:cSld>
     <p:spTree>
@@ -3435,7 +3678,7 @@
             <a:fld id="{433C9518-700F-4811-95BB-24DAF3FA92F2}" type="slidenum">
               <a:rPr lang="ko-KR" altLang="en-US" smtClean="0"/>
               <a:pPr/>
-              <a:t>11</a:t>
+              <a:t>13</a:t>
             </a:fld>
             <a:endParaRPr lang="ko-KR" altLang="en-US" dirty="0"/>
           </a:p>
@@ -3454,7 +3697,7 @@
 </p:notes>
 </file>
 
-<file path=ppt/notesSlides/notesSlide12.xml><?xml version="1.0" encoding="utf-8"?>
+<file path=ppt/notesSlides/notesSlide14.xml><?xml version="1.0" encoding="utf-8"?>
 <p:notes xmlns:a="http://schemas.openxmlformats.org/drawingml/2006/main" xmlns:r="http://schemas.openxmlformats.org/officeDocument/2006/relationships" xmlns:p="http://schemas.openxmlformats.org/presentationml/2006/main">
   <p:cSld>
     <p:spTree>
@@ -3551,7 +3794,7 @@
 </p:notes>
 </file>
 
-<file path=ppt/notesSlides/notesSlide13.xml><?xml version="1.0" encoding="utf-8"?>
+<file path=ppt/notesSlides/notesSlide15.xml><?xml version="1.0" encoding="utf-8"?>
 <p:notes xmlns:a="http://schemas.openxmlformats.org/drawingml/2006/main" xmlns:r="http://schemas.openxmlformats.org/officeDocument/2006/relationships" xmlns:p="http://schemas.openxmlformats.org/presentationml/2006/main">
   <p:cSld>
     <p:spTree>
@@ -3648,7 +3891,7 @@
 </p:notes>
 </file>
 
-<file path=ppt/notesSlides/notesSlide14.xml><?xml version="1.0" encoding="utf-8"?>
+<file path=ppt/notesSlides/notesSlide16.xml><?xml version="1.0" encoding="utf-8"?>
 <p:notes xmlns:a="http://schemas.openxmlformats.org/drawingml/2006/main" xmlns:r="http://schemas.openxmlformats.org/officeDocument/2006/relationships" xmlns:p="http://schemas.openxmlformats.org/presentationml/2006/main">
   <p:cSld>
     <p:spTree>
@@ -3745,7 +3988,7 @@
 </p:notes>
 </file>
 
-<file path=ppt/notesSlides/notesSlide15.xml><?xml version="1.0" encoding="utf-8"?>
+<file path=ppt/notesSlides/notesSlide17.xml><?xml version="1.0" encoding="utf-8"?>
 <p:notes xmlns:a="http://schemas.openxmlformats.org/drawingml/2006/main" xmlns:r="http://schemas.openxmlformats.org/officeDocument/2006/relationships" xmlns:p="http://schemas.openxmlformats.org/presentationml/2006/main">
   <p:cSld>
     <p:spTree>
@@ -3835,7 +4078,7 @@
 </p:notes>
 </file>
 
-<file path=ppt/notesSlides/notesSlide16.xml><?xml version="1.0" encoding="utf-8"?>
+<file path=ppt/notesSlides/notesSlide18.xml><?xml version="1.0" encoding="utf-8"?>
 <p:notes xmlns:a="http://schemas.openxmlformats.org/drawingml/2006/main" xmlns:r="http://schemas.openxmlformats.org/officeDocument/2006/relationships" xmlns:p="http://schemas.openxmlformats.org/presentationml/2006/main">
   <p:cSld>
     <p:spTree>
@@ -3930,8 +4173,8 @@
 </p:notes>
 </file>
 
-<file path=ppt/notesSlides/notesSlide17.xml><?xml version="1.0" encoding="utf-8"?>
-<p:notes xmlns:a="http://schemas.openxmlformats.org/drawingml/2006/main" xmlns:p="http://schemas.openxmlformats.org/presentationml/2006/main" xmlns:r="http://schemas.openxmlformats.org/officeDocument/2006/relationships">
+<file path=ppt/notesSlides/notesSlide2.xml><?xml version="1.0" encoding="utf-8"?>
+<p:notes xmlns:a="http://schemas.openxmlformats.org/drawingml/2006/main" xmlns:r="http://schemas.openxmlformats.org/officeDocument/2006/relationships" xmlns:p="http://schemas.openxmlformats.org/presentationml/2006/main">
   <p:cSld>
     <p:spTree>
       <p:nvGrpSpPr>
@@ -3951,7 +4194,7 @@
         <p:nvSpPr>
           <p:cNvPr id="2" name="Slide Image Placeholder 1"/>
           <p:cNvSpPr>
-            <a:spLocks noGrp="1"/>
+            <a:spLocks noGrp="1" noRot="1" noChangeAspect="1"/>
           </p:cNvSpPr>
           <p:nvPr>
             <p:ph type="sldImg" idx="2"/>
@@ -3966,7 +4209,7 @@
             <a:spLocks noGrp="1"/>
           </p:cNvSpPr>
           <p:nvPr>
-            <p:ph type="body" idx="3" sz="quarter"/>
+            <p:ph type="body" sz="quarter" idx="3"/>
           </p:nvPr>
         </p:nvSpPr>
         <p:spPr/>
@@ -3987,7 +4230,7 @@
             <a:spLocks noGrp="1"/>
           </p:cNvSpPr>
           <p:nvPr>
-            <p:ph type="sldNum" idx="5" sz="quarter"/>
+            <p:ph type="sldNum" sz="quarter" idx="5"/>
           </p:nvPr>
         </p:nvSpPr>
         <p:spPr/>
@@ -4000,8 +4243,8 @@
 </p:notes>
 </file>
 
-<file path=ppt/notesSlides/notesSlide18.xml><?xml version="1.0" encoding="utf-8"?>
-<p:notes xmlns:a="http://schemas.openxmlformats.org/drawingml/2006/main" xmlns:p="http://schemas.openxmlformats.org/presentationml/2006/main" xmlns:r="http://schemas.openxmlformats.org/officeDocument/2006/relationships">
+<file path=ppt/notesSlides/notesSlide3.xml><?xml version="1.0" encoding="utf-8"?>
+<p:notes xmlns:a="http://schemas.openxmlformats.org/drawingml/2006/main" xmlns:r="http://schemas.openxmlformats.org/officeDocument/2006/relationships" xmlns:p="http://schemas.openxmlformats.org/presentationml/2006/main">
   <p:cSld>
     <p:spTree>
       <p:nvGrpSpPr>
@@ -4021,7 +4264,7 @@
         <p:nvSpPr>
           <p:cNvPr id="2" name="Slide Image Placeholder 1"/>
           <p:cNvSpPr>
-            <a:spLocks noGrp="1"/>
+            <a:spLocks noGrp="1" noRot="1" noChangeAspect="1"/>
           </p:cNvSpPr>
           <p:nvPr>
             <p:ph type="sldImg" idx="2"/>
@@ -4036,7 +4279,7 @@
             <a:spLocks noGrp="1"/>
           </p:cNvSpPr>
           <p:nvPr>
-            <p:ph type="body" idx="3" sz="quarter"/>
+            <p:ph type="body" sz="quarter" idx="3"/>
           </p:nvPr>
         </p:nvSpPr>
         <p:spPr/>
@@ -4057,7 +4300,7 @@
             <a:spLocks noGrp="1"/>
           </p:cNvSpPr>
           <p:nvPr>
-            <p:ph type="sldNum" idx="5" sz="quarter"/>
+            <p:ph type="sldNum" sz="quarter" idx="5"/>
           </p:nvPr>
         </p:nvSpPr>
         <p:spPr/>
@@ -4070,7 +4313,7 @@
 </p:notes>
 </file>
 
-<file path=ppt/notesSlides/notesSlide2.xml><?xml version="1.0" encoding="utf-8"?>
+<file path=ppt/notesSlides/notesSlide4.xml><?xml version="1.0" encoding="utf-8"?>
 <p:notes xmlns:a="http://schemas.openxmlformats.org/drawingml/2006/main" xmlns:r="http://schemas.openxmlformats.org/officeDocument/2006/relationships" xmlns:p="http://schemas.openxmlformats.org/presentationml/2006/main">
   <p:cSld>
     <p:spTree>
@@ -4836,7 +5079,7 @@
 </p:notes>
 </file>
 
-<file path=ppt/notesSlides/notesSlide3.xml><?xml version="1.0" encoding="utf-8"?>
+<file path=ppt/notesSlides/notesSlide5.xml><?xml version="1.0" encoding="utf-8"?>
 <p:notes xmlns:a="http://schemas.openxmlformats.org/drawingml/2006/main" xmlns:r="http://schemas.openxmlformats.org/officeDocument/2006/relationships" xmlns:p="http://schemas.openxmlformats.org/presentationml/2006/main">
   <p:cSld>
     <p:spTree>
@@ -5008,7 +5251,7 @@
 </p:notes>
 </file>
 
-<file path=ppt/notesSlides/notesSlide4.xml><?xml version="1.0" encoding="utf-8"?>
+<file path=ppt/notesSlides/notesSlide6.xml><?xml version="1.0" encoding="utf-8"?>
 <p:notes xmlns:a="http://schemas.openxmlformats.org/drawingml/2006/main" xmlns:r="http://schemas.openxmlformats.org/officeDocument/2006/relationships" xmlns:p="http://schemas.openxmlformats.org/presentationml/2006/main">
   <p:cSld>
     <p:spTree>
@@ -5628,1538 +5871,6 @@
 </p:notes>
 </file>
 
-<file path=ppt/notesSlides/notesSlide5.xml><?xml version="1.0" encoding="utf-8"?>
-<p:notes xmlns:a="http://schemas.openxmlformats.org/drawingml/2006/main" xmlns:r="http://schemas.openxmlformats.org/officeDocument/2006/relationships" xmlns:p="http://schemas.openxmlformats.org/presentationml/2006/main">
-  <p:cSld>
-    <p:spTree>
-      <p:nvGrpSpPr>
-        <p:cNvPr id="1" name=""/>
-        <p:cNvGrpSpPr/>
-        <p:nvPr/>
-      </p:nvGrpSpPr>
-      <p:grpSpPr>
-        <a:xfrm>
-          <a:off x="0" y="0"/>
-          <a:ext cx="0" cy="0"/>
-          <a:chOff x="0" y="0"/>
-          <a:chExt cx="0" cy="0"/>
-        </a:xfrm>
-      </p:grpSpPr>
-      <p:sp>
-        <p:nvSpPr>
-          <p:cNvPr id="2" name="Slide Image Placeholder 1"/>
-          <p:cNvSpPr>
-            <a:spLocks noGrp="1" noRot="1" noChangeAspect="1"/>
-          </p:cNvSpPr>
-          <p:nvPr>
-            <p:ph type="sldImg" idx="2"/>
-          </p:nvPr>
-        </p:nvSpPr>
-        <p:spPr/>
-      </p:sp>
-      <p:sp>
-        <p:nvSpPr>
-          <p:cNvPr id="3" name="Notes Placeholder 2"/>
-          <p:cNvSpPr>
-            <a:spLocks noGrp="1"/>
-          </p:cNvSpPr>
-          <p:nvPr>
-            <p:ph type="body" sz="quarter" idx="3"/>
-          </p:nvPr>
-        </p:nvSpPr>
-        <p:spPr/>
-        <p:txBody>
-          <a:bodyPr/>
-          <a:lstStyle/>
-          <a:p>
-            <a:r>
-              <a:rPr dirty="0"/>
-              <a:t>[Intro] Clinic 4개 </a:t>
-            </a:r>
-            <a:r>
-              <a:rPr dirty="0" err="1"/>
-              <a:t>인체계측</a:t>
-            </a:r>
-            <a:r>
-              <a:rPr dirty="0"/>
-              <a:t> </a:t>
-            </a:r>
-            <a:r>
-              <a:rPr dirty="0" err="1"/>
-              <a:t>변수</a:t>
-            </a:r>
-            <a:r>
-              <a:rPr dirty="0"/>
-              <a:t>(</a:t>
-            </a:r>
-            <a:r>
-              <a:rPr dirty="0" err="1"/>
-              <a:t>성별·나이·키·체중</a:t>
-            </a:r>
-            <a:r>
-              <a:rPr dirty="0"/>
-              <a:t>)는 </a:t>
-            </a:r>
-            <a:r>
-              <a:rPr dirty="0" err="1"/>
-              <a:t>체성분</a:t>
-            </a:r>
-            <a:r>
-              <a:rPr dirty="0"/>
-              <a:t>(</a:t>
-            </a:r>
-            <a:r>
-              <a:rPr dirty="0" err="1"/>
-              <a:t>특히</a:t>
-            </a:r>
-            <a:r>
-              <a:rPr dirty="0"/>
-              <a:t> </a:t>
-            </a:r>
-            <a:r>
-              <a:rPr dirty="0" err="1"/>
-              <a:t>골격근량</a:t>
-            </a:r>
-            <a:r>
-              <a:rPr dirty="0"/>
-              <a:t>)의 </a:t>
-            </a:r>
-            <a:r>
-              <a:rPr dirty="0" err="1"/>
-              <a:t>간접적</a:t>
-            </a:r>
-            <a:r>
-              <a:rPr dirty="0"/>
-              <a:t> </a:t>
-            </a:r>
-            <a:r>
-              <a:rPr dirty="0" err="1"/>
-              <a:t>대리지표일</a:t>
-            </a:r>
-            <a:r>
-              <a:rPr dirty="0"/>
-              <a:t> 뿐 </a:t>
-            </a:r>
-            <a:r>
-              <a:rPr dirty="0" err="1"/>
-              <a:t>근육의</a:t>
-            </a:r>
-            <a:r>
-              <a:rPr dirty="0"/>
-              <a:t> </a:t>
-            </a:r>
-            <a:r>
-              <a:rPr dirty="0" err="1"/>
-              <a:t>질·조성을</a:t>
-            </a:r>
-            <a:r>
-              <a:rPr dirty="0"/>
-              <a:t> </a:t>
-            </a:r>
-            <a:r>
-              <a:rPr dirty="0" err="1"/>
-              <a:t>직접</a:t>
-            </a:r>
-            <a:r>
-              <a:rPr dirty="0"/>
-              <a:t> </a:t>
-            </a:r>
-            <a:r>
-              <a:rPr dirty="0" err="1"/>
-              <a:t>반영하지</a:t>
-            </a:r>
-            <a:r>
-              <a:rPr dirty="0"/>
-              <a:t> </a:t>
-            </a:r>
-            <a:r>
-              <a:rPr dirty="0" err="1"/>
-              <a:t>않는다</a:t>
-            </a:r>
-            <a:r>
-              <a:rPr dirty="0"/>
-              <a:t> — </a:t>
-            </a:r>
-            <a:r>
-              <a:rPr dirty="0" err="1"/>
-              <a:t>anthropometry만으로</a:t>
-            </a:r>
-            <a:r>
-              <a:rPr dirty="0"/>
-              <a:t> </a:t>
-            </a:r>
-            <a:r>
-              <a:rPr dirty="0" err="1"/>
-              <a:t>설명</a:t>
-            </a:r>
-            <a:r>
-              <a:rPr dirty="0"/>
-              <a:t> </a:t>
-            </a:r>
-            <a:r>
-              <a:rPr dirty="0" err="1"/>
-              <a:t>가능한</a:t>
-            </a:r>
-            <a:r>
-              <a:rPr dirty="0"/>
-              <a:t> </a:t>
-            </a:r>
-            <a:r>
-              <a:rPr dirty="0" err="1"/>
-              <a:t>분산에는</a:t>
-            </a:r>
-            <a:r>
-              <a:rPr dirty="0"/>
-              <a:t> </a:t>
-            </a:r>
-            <a:r>
-              <a:rPr dirty="0" err="1"/>
-              <a:t>이론적</a:t>
-            </a:r>
-            <a:r>
-              <a:rPr dirty="0"/>
-              <a:t> </a:t>
-            </a:r>
-            <a:r>
-              <a:rPr dirty="0" err="1"/>
-              <a:t>상한이</a:t>
-            </a:r>
-            <a:r>
-              <a:rPr dirty="0"/>
-              <a:t> </a:t>
-            </a:r>
-            <a:r>
-              <a:rPr dirty="0" err="1"/>
-              <a:t>있다</a:t>
-            </a:r>
-            <a:r>
-              <a:rPr dirty="0"/>
-              <a:t>. </a:t>
-            </a:r>
-            <a:r>
-              <a:rPr dirty="0" err="1"/>
-              <a:t>Clinic과</a:t>
-            </a:r>
-            <a:r>
-              <a:rPr dirty="0"/>
-              <a:t> </a:t>
-            </a:r>
-            <a:r>
-              <a:rPr dirty="0" err="1"/>
-              <a:t>독립적인</a:t>
-            </a:r>
-            <a:r>
-              <a:rPr dirty="0"/>
-              <a:t> </a:t>
-            </a:r>
-            <a:r>
-              <a:rPr dirty="0" err="1"/>
-              <a:t>정보원인</a:t>
-            </a:r>
-            <a:r>
-              <a:rPr dirty="0"/>
-              <a:t> AEC </a:t>
-            </a:r>
-            <a:r>
-              <a:rPr dirty="0" err="1"/>
-              <a:t>임피던스</a:t>
-            </a:r>
-            <a:r>
-              <a:rPr dirty="0"/>
-              <a:t> </a:t>
-            </a:r>
-            <a:r>
-              <a:rPr dirty="0" err="1"/>
-              <a:t>곡선을</a:t>
-            </a:r>
-            <a:r>
-              <a:rPr dirty="0"/>
-              <a:t> </a:t>
-            </a:r>
-            <a:r>
-              <a:rPr dirty="0" err="1"/>
-              <a:t>결합하면</a:t>
-            </a:r>
-            <a:r>
-              <a:rPr dirty="0"/>
-              <a:t> 이 </a:t>
-            </a:r>
-            <a:r>
-              <a:rPr dirty="0" err="1"/>
-              <a:t>상한을</a:t>
-            </a:r>
-            <a:r>
-              <a:rPr dirty="0"/>
-              <a:t> </a:t>
-            </a:r>
-            <a:r>
-              <a:rPr dirty="0" err="1"/>
-              <a:t>넘어설</a:t>
-            </a:r>
-            <a:r>
-              <a:rPr dirty="0"/>
-              <a:t> </a:t>
-            </a:r>
-            <a:r>
-              <a:rPr dirty="0" err="1"/>
-              <a:t>가능성이</a:t>
-            </a:r>
-            <a:r>
-              <a:rPr dirty="0"/>
-              <a:t> </a:t>
-            </a:r>
-            <a:r>
-              <a:rPr dirty="0" err="1"/>
-              <a:t>있으며</a:t>
-            </a:r>
-            <a:r>
-              <a:rPr dirty="0"/>
-              <a:t>, </a:t>
-            </a:r>
-            <a:r>
-              <a:rPr dirty="0" err="1"/>
-              <a:t>이것이</a:t>
-            </a:r>
-            <a:r>
-              <a:rPr dirty="0"/>
-              <a:t> </a:t>
-            </a:r>
-            <a:r>
-              <a:rPr dirty="0" err="1"/>
-              <a:t>아래</a:t>
-            </a:r>
-            <a:r>
-              <a:rPr dirty="0"/>
-              <a:t> TP/FP AEC-128 </a:t>
-            </a:r>
-            <a:r>
-              <a:rPr dirty="0" err="1"/>
-              <a:t>곡선</a:t>
-            </a:r>
-            <a:r>
-              <a:rPr dirty="0"/>
-              <a:t> </a:t>
-            </a:r>
-            <a:r>
-              <a:rPr dirty="0" err="1"/>
-              <a:t>비교</a:t>
-            </a:r>
-            <a:r>
-              <a:rPr dirty="0"/>
-              <a:t> 및 </a:t>
-            </a:r>
-            <a:r>
-              <a:rPr dirty="0" err="1"/>
-              <a:t>이후</a:t>
-            </a:r>
-            <a:r>
-              <a:rPr dirty="0"/>
-              <a:t> Stage-2 fusion </a:t>
-            </a:r>
-            <a:r>
-              <a:rPr dirty="0" err="1"/>
-              <a:t>시도의</a:t>
-            </a:r>
-            <a:r>
-              <a:rPr dirty="0"/>
-              <a:t> </a:t>
-            </a:r>
-            <a:r>
-              <a:rPr dirty="0" err="1"/>
-              <a:t>근거다</a:t>
-            </a:r>
-            <a:r>
-              <a:rPr dirty="0"/>
-              <a:t>.</a:t>
-            </a:r>
-          </a:p>
-          <a:p>
-            <a:endParaRPr dirty="0"/>
-          </a:p>
-          <a:p>
-            <a:r>
-              <a:rPr dirty="0"/>
-              <a:t>이 </a:t>
-            </a:r>
-            <a:r>
-              <a:rPr dirty="0" err="1"/>
-              <a:t>슬라이드</a:t>
-            </a:r>
-            <a:r>
-              <a:rPr dirty="0"/>
-              <a:t> </a:t>
-            </a:r>
-            <a:r>
-              <a:rPr dirty="0" err="1"/>
-              <a:t>이전</a:t>
-            </a:r>
-            <a:r>
-              <a:rPr dirty="0"/>
-              <a:t> </a:t>
-            </a:r>
-            <a:r>
-              <a:rPr dirty="0" err="1"/>
-              <a:t>맥락</a:t>
-            </a:r>
-            <a:r>
-              <a:rPr dirty="0"/>
-              <a:t>(</a:t>
-            </a:r>
-            <a:r>
-              <a:rPr dirty="0" err="1"/>
-              <a:t>구두</a:t>
-            </a:r>
-            <a:r>
-              <a:rPr dirty="0"/>
-              <a:t> </a:t>
-            </a:r>
-            <a:r>
-              <a:rPr dirty="0" err="1"/>
-              <a:t>설명용</a:t>
-            </a:r>
-            <a:r>
-              <a:rPr dirty="0"/>
-              <a:t>, </a:t>
-            </a:r>
-            <a:r>
-              <a:rPr dirty="0" err="1"/>
-              <a:t>슬라이드엔</a:t>
-            </a:r>
-            <a:r>
-              <a:rPr dirty="0"/>
-              <a:t> </a:t>
-            </a:r>
-            <a:r>
-              <a:rPr dirty="0" err="1"/>
-              <a:t>없음</a:t>
-            </a:r>
-            <a:r>
-              <a:rPr dirty="0"/>
-              <a:t>): raw(</a:t>
-            </a:r>
-            <a:r>
-              <a:rPr dirty="0" err="1"/>
-              <a:t>비매칭</a:t>
-            </a:r>
-            <a:r>
-              <a:rPr dirty="0"/>
-              <a:t>) TP vs FP AEC-128 </a:t>
-            </a:r>
-            <a:r>
-              <a:rPr dirty="0" err="1"/>
-              <a:t>곡선</a:t>
-            </a:r>
-            <a:r>
-              <a:rPr dirty="0"/>
-              <a:t> </a:t>
-            </a:r>
-            <a:r>
-              <a:rPr dirty="0" err="1"/>
-              <a:t>비교는</a:t>
-            </a:r>
-            <a:r>
-              <a:rPr dirty="0"/>
-              <a:t> </a:t>
-            </a:r>
-            <a:r>
-              <a:rPr dirty="0" err="1"/>
-              <a:t>코호트</a:t>
-            </a:r>
-            <a:r>
-              <a:rPr dirty="0"/>
-              <a:t> 간 </a:t>
-            </a:r>
-            <a:r>
-              <a:rPr dirty="0" err="1"/>
-              <a:t>결과가</a:t>
-            </a:r>
-            <a:r>
-              <a:rPr dirty="0"/>
-              <a:t> </a:t>
-            </a:r>
-            <a:r>
-              <a:rPr dirty="0" err="1"/>
-              <a:t>불일치했다</a:t>
-            </a:r>
-            <a:r>
-              <a:rPr dirty="0"/>
-              <a:t> (Gangnam RMSD=0.0155, p=0.227 </a:t>
-            </a:r>
-            <a:r>
-              <a:rPr dirty="0" err="1"/>
-              <a:t>n.s</a:t>
-            </a:r>
-            <a:r>
-              <a:rPr dirty="0"/>
-              <a:t>. / Sinchon RMSD=0.0274, p=0.0175). TP/FP </a:t>
-            </a:r>
-            <a:r>
-              <a:rPr dirty="0" err="1"/>
-              <a:t>그룹이</a:t>
-            </a:r>
-            <a:r>
-              <a:rPr dirty="0"/>
-              <a:t> clinic </a:t>
-            </a:r>
-            <a:r>
-              <a:rPr dirty="0" err="1"/>
-              <a:t>공변량</a:t>
-            </a:r>
-            <a:r>
-              <a:rPr dirty="0"/>
-              <a:t>(</a:t>
-            </a:r>
-            <a:r>
-              <a:rPr dirty="0" err="1"/>
-              <a:t>성별·나이·신장·체중</a:t>
-            </a:r>
-            <a:r>
-              <a:rPr dirty="0"/>
-              <a:t>) </a:t>
-            </a:r>
-            <a:r>
-              <a:rPr dirty="0" err="1"/>
-              <a:t>분포</a:t>
-            </a:r>
-            <a:r>
-              <a:rPr dirty="0"/>
-              <a:t> </a:t>
-            </a:r>
-            <a:r>
-              <a:rPr dirty="0" err="1"/>
-              <a:t>자체가</a:t>
-            </a:r>
-            <a:r>
-              <a:rPr dirty="0"/>
-              <a:t> </a:t>
-            </a:r>
-            <a:r>
-              <a:rPr dirty="0" err="1"/>
-              <a:t>다를</a:t>
-            </a:r>
-            <a:r>
-              <a:rPr dirty="0"/>
-              <a:t> </a:t>
-            </a:r>
-            <a:r>
-              <a:rPr dirty="0" err="1"/>
-              <a:t>가능성</a:t>
-            </a:r>
-            <a:r>
-              <a:rPr dirty="0"/>
-              <a:t>(confound)을 </a:t>
-            </a:r>
-            <a:r>
-              <a:rPr dirty="0" err="1"/>
-              <a:t>배제하기</a:t>
-            </a:r>
-            <a:r>
-              <a:rPr dirty="0"/>
-              <a:t> </a:t>
-            </a:r>
-            <a:r>
-              <a:rPr dirty="0" err="1"/>
-              <a:t>위해</a:t>
-            </a:r>
-            <a:r>
-              <a:rPr dirty="0"/>
-              <a:t>, </a:t>
-            </a:r>
-            <a:r>
-              <a:rPr dirty="0" err="1"/>
-              <a:t>모델</a:t>
-            </a:r>
-            <a:r>
-              <a:rPr dirty="0"/>
-              <a:t> </a:t>
-            </a:r>
-            <a:r>
-              <a:rPr dirty="0" err="1"/>
-              <a:t>기반</a:t>
-            </a:r>
-            <a:r>
-              <a:rPr dirty="0"/>
-              <a:t> </a:t>
-            </a:r>
-            <a:r>
-              <a:rPr dirty="0" err="1"/>
-              <a:t>잔차화</a:t>
-            </a:r>
-            <a:r>
-              <a:rPr dirty="0"/>
-              <a:t> </a:t>
-            </a:r>
-            <a:r>
-              <a:rPr dirty="0" err="1"/>
-              <a:t>대신</a:t>
-            </a:r>
-            <a:r>
-              <a:rPr dirty="0"/>
-              <a:t> </a:t>
-            </a:r>
-            <a:r>
-              <a:rPr dirty="0" err="1"/>
-              <a:t>표본</a:t>
-            </a:r>
-            <a:r>
-              <a:rPr dirty="0"/>
-              <a:t> </a:t>
-            </a:r>
-            <a:r>
-              <a:rPr dirty="0" err="1"/>
-              <a:t>설계</a:t>
-            </a:r>
-            <a:r>
-              <a:rPr dirty="0"/>
-              <a:t> </a:t>
-            </a:r>
-            <a:r>
-              <a:rPr dirty="0" err="1"/>
-              <a:t>단계에서</a:t>
-            </a:r>
-            <a:r>
-              <a:rPr dirty="0"/>
-              <a:t> </a:t>
-            </a:r>
-            <a:r>
-              <a:rPr dirty="0" err="1"/>
-              <a:t>confound를</a:t>
-            </a:r>
-            <a:r>
-              <a:rPr dirty="0"/>
-              <a:t> </a:t>
-            </a:r>
-            <a:r>
-              <a:rPr dirty="0" err="1"/>
-              <a:t>통제하는</a:t>
-            </a:r>
-            <a:r>
-              <a:rPr dirty="0"/>
-              <a:t> propensity-score </a:t>
-            </a:r>
-            <a:r>
-              <a:rPr dirty="0" err="1"/>
-              <a:t>matching을</a:t>
-            </a:r>
-            <a:r>
-              <a:rPr dirty="0"/>
-              <a:t> </a:t>
-            </a:r>
-            <a:r>
-              <a:rPr dirty="0" err="1"/>
-              <a:t>적용했다</a:t>
-            </a:r>
-            <a:r>
-              <a:rPr dirty="0"/>
-              <a:t>.</a:t>
-            </a:r>
-          </a:p>
-          <a:p>
-            <a:endParaRPr dirty="0"/>
-          </a:p>
-          <a:p>
-            <a:r>
-              <a:rPr dirty="0" err="1"/>
-              <a:t>방법</a:t>
-            </a:r>
-            <a:r>
-              <a:rPr dirty="0"/>
-              <a:t>: stage2_input_clin의 </a:t>
-            </a:r>
-            <a:r>
-              <a:rPr dirty="0" err="1"/>
-              <a:t>표준화</a:t>
-            </a:r>
-            <a:r>
-              <a:rPr dirty="0"/>
-              <a:t> </a:t>
-            </a:r>
-            <a:r>
-              <a:rPr dirty="0" err="1"/>
-              <a:t>공변량으로</a:t>
-            </a:r>
-            <a:r>
-              <a:rPr dirty="0"/>
-              <a:t> </a:t>
-            </a:r>
-            <a:r>
-              <a:rPr dirty="0" err="1"/>
-              <a:t>로지스틱회귀</a:t>
-            </a:r>
-            <a:r>
-              <a:rPr dirty="0"/>
-              <a:t> propensity </a:t>
-            </a:r>
-            <a:r>
-              <a:rPr dirty="0" err="1"/>
-              <a:t>score를</a:t>
-            </a:r>
-            <a:r>
-              <a:rPr dirty="0"/>
-              <a:t> </a:t>
-            </a:r>
-            <a:r>
-              <a:rPr dirty="0" err="1"/>
-              <a:t>추정하고</a:t>
-            </a:r>
-            <a:r>
-              <a:rPr dirty="0"/>
-              <a:t>, logit(propensity) </a:t>
-            </a:r>
-            <a:r>
-              <a:rPr dirty="0" err="1"/>
-              <a:t>기준</a:t>
-            </a:r>
-            <a:r>
-              <a:rPr dirty="0"/>
-              <a:t> caliper(0.2×SD) </a:t>
-            </a:r>
-            <a:r>
-              <a:rPr dirty="0" err="1"/>
-              <a:t>안에서</a:t>
-            </a:r>
-            <a:r>
-              <a:rPr dirty="0"/>
-              <a:t> TP-FP </a:t>
-            </a:r>
-            <a:r>
-              <a:rPr dirty="0" err="1"/>
-              <a:t>전체</a:t>
-            </a:r>
-            <a:r>
-              <a:rPr dirty="0"/>
-              <a:t> 총 </a:t>
-            </a:r>
-            <a:r>
-              <a:rPr dirty="0" err="1"/>
-              <a:t>거리를</a:t>
-            </a:r>
-            <a:r>
-              <a:rPr dirty="0"/>
-              <a:t> </a:t>
-            </a:r>
-            <a:r>
-              <a:rPr dirty="0" err="1"/>
-              <a:t>최소화하는</a:t>
-            </a:r>
-            <a:r>
-              <a:rPr dirty="0"/>
-              <a:t> </a:t>
-            </a:r>
-            <a:r>
-              <a:rPr dirty="0" err="1"/>
-              <a:t>전역</a:t>
-            </a:r>
-            <a:r>
-              <a:rPr dirty="0"/>
-              <a:t> </a:t>
-            </a:r>
-            <a:r>
-              <a:rPr dirty="0" err="1"/>
-              <a:t>최적</a:t>
-            </a:r>
-            <a:r>
-              <a:rPr dirty="0"/>
-              <a:t> 1:1 </a:t>
-            </a:r>
-            <a:r>
-              <a:rPr dirty="0" err="1"/>
-              <a:t>할당</a:t>
-            </a:r>
-            <a:r>
-              <a:rPr dirty="0"/>
-              <a:t>(Hungarian algorithm, </a:t>
-            </a:r>
-            <a:r>
-              <a:rPr dirty="0" err="1"/>
-              <a:t>scipy.optimize.linear_sum_assignment</a:t>
-            </a:r>
-            <a:r>
-              <a:rPr dirty="0"/>
-              <a:t>)</a:t>
-            </a:r>
-            <a:r>
-              <a:rPr dirty="0" err="1"/>
-              <a:t>으로</a:t>
-            </a:r>
-            <a:r>
-              <a:rPr dirty="0"/>
-              <a:t> </a:t>
-            </a:r>
-            <a:r>
-              <a:rPr dirty="0" err="1"/>
-              <a:t>매칭했다</a:t>
-            </a:r>
-            <a:r>
-              <a:rPr dirty="0"/>
-              <a:t> (code/stage2_aec_tp_fp_matched_comparison.py). </a:t>
-            </a:r>
-            <a:r>
-              <a:rPr dirty="0" err="1"/>
-              <a:t>매칭</a:t>
-            </a:r>
-            <a:r>
-              <a:rPr dirty="0"/>
-              <a:t> 후 4개 </a:t>
-            </a:r>
-            <a:r>
-              <a:rPr dirty="0" err="1"/>
-              <a:t>공변량</a:t>
-            </a:r>
-            <a:r>
-              <a:rPr dirty="0"/>
-              <a:t> </a:t>
-            </a:r>
-            <a:r>
-              <a:rPr dirty="0" err="1"/>
-              <a:t>SMD가</a:t>
-            </a:r>
-            <a:r>
-              <a:rPr dirty="0"/>
-              <a:t> </a:t>
-            </a:r>
-            <a:r>
-              <a:rPr dirty="0" err="1"/>
-              <a:t>모두</a:t>
-            </a:r>
-            <a:r>
-              <a:rPr dirty="0"/>
-              <a:t> 0.08 </a:t>
-            </a:r>
-            <a:r>
-              <a:rPr dirty="0" err="1"/>
-              <a:t>미만으로</a:t>
-            </a:r>
-            <a:r>
-              <a:rPr dirty="0"/>
-              <a:t> (</a:t>
-            </a:r>
-            <a:r>
-              <a:rPr dirty="0" err="1"/>
-              <a:t>매칭</a:t>
-            </a:r>
-            <a:r>
-              <a:rPr dirty="0"/>
-              <a:t> 전 0.18~0.31) </a:t>
-            </a:r>
-            <a:r>
-              <a:rPr dirty="0" err="1"/>
-              <a:t>balance가</a:t>
-            </a:r>
-            <a:r>
-              <a:rPr dirty="0"/>
-              <a:t> 잘 </a:t>
-            </a:r>
-            <a:r>
-              <a:rPr dirty="0" err="1"/>
-              <a:t>통제됐다</a:t>
-            </a:r>
-            <a:r>
-              <a:rPr dirty="0"/>
-              <a:t>.</a:t>
-            </a:r>
-          </a:p>
-          <a:p>
-            <a:endParaRPr dirty="0"/>
-          </a:p>
-          <a:p>
-            <a:r>
-              <a:rPr dirty="0" err="1"/>
-              <a:t>결과</a:t>
-            </a:r>
-            <a:r>
-              <a:rPr dirty="0"/>
-              <a:t>: </a:t>
-            </a:r>
-            <a:r>
-              <a:rPr dirty="0" err="1"/>
-              <a:t>Gangnam은</a:t>
-            </a:r>
-            <a:r>
-              <a:rPr dirty="0"/>
-              <a:t> </a:t>
-            </a:r>
-            <a:r>
-              <a:rPr dirty="0" err="1"/>
-              <a:t>매칭</a:t>
-            </a:r>
-            <a:r>
-              <a:rPr dirty="0"/>
-              <a:t> 후 더 </a:t>
-            </a:r>
-            <a:r>
-              <a:rPr dirty="0" err="1"/>
-              <a:t>확실히</a:t>
-            </a:r>
-            <a:r>
-              <a:rPr dirty="0"/>
-              <a:t> </a:t>
-            </a:r>
-            <a:r>
-              <a:rPr dirty="0" err="1"/>
-              <a:t>신호</a:t>
-            </a:r>
-            <a:r>
-              <a:rPr dirty="0"/>
-              <a:t> </a:t>
-            </a:r>
-            <a:r>
-              <a:rPr dirty="0" err="1"/>
-              <a:t>없음</a:t>
-            </a:r>
-            <a:r>
-              <a:rPr dirty="0"/>
-              <a:t> (RMSD=0.0057, p=0.983, 97쌍), </a:t>
-            </a:r>
-            <a:r>
-              <a:rPr dirty="0" err="1"/>
-              <a:t>Sinchon은</a:t>
-            </a:r>
-            <a:r>
-              <a:rPr dirty="0"/>
-              <a:t> </a:t>
-            </a:r>
-            <a:r>
-              <a:rPr dirty="0" err="1"/>
-              <a:t>매칭</a:t>
-            </a:r>
-            <a:r>
-              <a:rPr dirty="0"/>
-              <a:t> </a:t>
-            </a:r>
-            <a:r>
-              <a:rPr dirty="0" err="1"/>
-              <a:t>후에도</a:t>
-            </a:r>
-            <a:r>
-              <a:rPr dirty="0"/>
-              <a:t> </a:t>
-            </a:r>
-            <a:r>
-              <a:rPr dirty="0" err="1"/>
-              <a:t>여전히</a:t>
-            </a:r>
-            <a:r>
-              <a:rPr dirty="0"/>
-              <a:t> </a:t>
-            </a:r>
-            <a:r>
-              <a:rPr dirty="0" err="1"/>
-              <a:t>유의</a:t>
-            </a:r>
-            <a:r>
-              <a:rPr dirty="0"/>
-              <a:t> (RMSD=0.0422, p=0.0165, 94쌍). 즉 </a:t>
-            </a:r>
-            <a:r>
-              <a:rPr dirty="0" err="1"/>
-              <a:t>confound를</a:t>
-            </a:r>
-            <a:r>
-              <a:rPr dirty="0"/>
-              <a:t> </a:t>
-            </a:r>
-            <a:r>
-              <a:rPr dirty="0" err="1"/>
-              <a:t>설계로</a:t>
-            </a:r>
-            <a:r>
-              <a:rPr dirty="0"/>
-              <a:t> </a:t>
-            </a:r>
-            <a:r>
-              <a:rPr dirty="0" err="1"/>
-              <a:t>통제해도</a:t>
-            </a:r>
-            <a:r>
-              <a:rPr dirty="0"/>
-              <a:t> </a:t>
-            </a:r>
-            <a:r>
-              <a:rPr dirty="0" err="1"/>
-              <a:t>코호트</a:t>
-            </a:r>
-            <a:r>
-              <a:rPr dirty="0"/>
-              <a:t> 간 </a:t>
-            </a:r>
-            <a:r>
-              <a:rPr dirty="0" err="1"/>
-              <a:t>불일치가</a:t>
-            </a:r>
-            <a:r>
-              <a:rPr dirty="0"/>
-              <a:t> </a:t>
-            </a:r>
-            <a:r>
-              <a:rPr dirty="0" err="1"/>
-              <a:t>그대로</a:t>
-            </a:r>
-            <a:r>
-              <a:rPr dirty="0"/>
-              <a:t> </a:t>
-            </a:r>
-            <a:r>
-              <a:rPr dirty="0" err="1"/>
-              <a:t>남는다</a:t>
-            </a:r>
-            <a:r>
-              <a:rPr dirty="0"/>
-              <a:t> -- </a:t>
-            </a:r>
-            <a:r>
-              <a:rPr dirty="0" err="1"/>
-              <a:t>이는</a:t>
-            </a:r>
-            <a:r>
-              <a:rPr dirty="0"/>
-              <a:t> balance </a:t>
-            </a:r>
-            <a:r>
-              <a:rPr dirty="0" err="1"/>
-              <a:t>문제가</a:t>
-            </a:r>
-            <a:r>
-              <a:rPr dirty="0"/>
-              <a:t> </a:t>
-            </a:r>
-            <a:r>
-              <a:rPr dirty="0" err="1"/>
-              <a:t>아니라</a:t>
-            </a:r>
-            <a:r>
-              <a:rPr dirty="0"/>
-              <a:t> raw AEC-128 </a:t>
-            </a:r>
-            <a:r>
-              <a:rPr dirty="0" err="1"/>
-              <a:t>신호</a:t>
-            </a:r>
-            <a:r>
-              <a:rPr dirty="0"/>
-              <a:t> </a:t>
-            </a:r>
-            <a:r>
-              <a:rPr dirty="0" err="1"/>
-              <a:t>자체가</a:t>
-            </a:r>
-            <a:r>
-              <a:rPr dirty="0"/>
-              <a:t> </a:t>
-            </a:r>
-            <a:r>
-              <a:rPr dirty="0" err="1"/>
-              <a:t>코호트마다</a:t>
-            </a:r>
-            <a:r>
-              <a:rPr dirty="0"/>
-              <a:t> </a:t>
-            </a:r>
-            <a:r>
-              <a:rPr dirty="0" err="1"/>
-              <a:t>다르게</a:t>
-            </a:r>
-            <a:r>
-              <a:rPr dirty="0"/>
-              <a:t> </a:t>
-            </a:r>
-            <a:r>
-              <a:rPr dirty="0" err="1"/>
-              <a:t>나타난다는</a:t>
-            </a:r>
-            <a:r>
-              <a:rPr dirty="0"/>
-              <a:t> </a:t>
-            </a:r>
-            <a:r>
-              <a:rPr dirty="0" err="1"/>
-              <a:t>뜻이며</a:t>
-            </a:r>
-            <a:r>
-              <a:rPr dirty="0"/>
-              <a:t>, </a:t>
-            </a:r>
-            <a:r>
-              <a:rPr dirty="0" err="1"/>
-              <a:t>다음</a:t>
-            </a:r>
-            <a:r>
-              <a:rPr dirty="0"/>
-              <a:t> </a:t>
-            </a:r>
-            <a:r>
-              <a:rPr dirty="0" err="1"/>
-              <a:t>슬라이드의</a:t>
-            </a:r>
-            <a:r>
-              <a:rPr dirty="0"/>
-              <a:t> confound </a:t>
-            </a:r>
-            <a:r>
-              <a:rPr dirty="0" err="1"/>
-              <a:t>제거</a:t>
-            </a:r>
-            <a:r>
-              <a:rPr dirty="0"/>
-              <a:t>/joint fusion </a:t>
-            </a:r>
-            <a:r>
-              <a:rPr dirty="0" err="1"/>
-              <a:t>접근이</a:t>
-            </a:r>
-            <a:r>
-              <a:rPr dirty="0"/>
-              <a:t> </a:t>
-            </a:r>
-            <a:r>
-              <a:rPr dirty="0" err="1"/>
-              <a:t>필요한</a:t>
-            </a:r>
-            <a:r>
-              <a:rPr dirty="0"/>
-              <a:t> </a:t>
-            </a:r>
-            <a:r>
-              <a:rPr dirty="0" err="1"/>
-              <a:t>근거가</a:t>
-            </a:r>
-            <a:r>
-              <a:rPr dirty="0"/>
-              <a:t> </a:t>
-            </a:r>
-            <a:r>
-              <a:rPr dirty="0" err="1"/>
-              <a:t>된다</a:t>
-            </a:r>
-            <a:r>
-              <a:rPr dirty="0"/>
-              <a:t>.</a:t>
-            </a:r>
-          </a:p>
-        </p:txBody>
-      </p:sp>
-      <p:sp>
-        <p:nvSpPr>
-          <p:cNvPr id="4" name="Slide Number Placeholder 3"/>
-          <p:cNvSpPr>
-            <a:spLocks noGrp="1"/>
-          </p:cNvSpPr>
-          <p:nvPr>
-            <p:ph type="sldNum" sz="quarter" idx="5"/>
-          </p:nvPr>
-        </p:nvSpPr>
-        <p:spPr/>
-      </p:sp>
-    </p:spTree>
-  </p:cSld>
-  <p:clrMapOvr>
-    <a:masterClrMapping/>
-  </p:clrMapOvr>
-</p:notes>
-</file>
-
-<file path=ppt/notesSlides/notesSlide6.xml><?xml version="1.0" encoding="utf-8"?>
-<p:notes xmlns:a="http://schemas.openxmlformats.org/drawingml/2006/main" xmlns:r="http://schemas.openxmlformats.org/officeDocument/2006/relationships" xmlns:p="http://schemas.openxmlformats.org/presentationml/2006/main">
-  <p:cSld>
-    <p:spTree>
-      <p:nvGrpSpPr>
-        <p:cNvPr id="1" name=""/>
-        <p:cNvGrpSpPr/>
-        <p:nvPr/>
-      </p:nvGrpSpPr>
-      <p:grpSpPr>
-        <a:xfrm>
-          <a:off x="0" y="0"/>
-          <a:ext cx="0" cy="0"/>
-          <a:chOff x="0" y="0"/>
-          <a:chExt cx="0" cy="0"/>
-        </a:xfrm>
-      </p:grpSpPr>
-      <p:sp>
-        <p:nvSpPr>
-          <p:cNvPr id="2" name="Slide Image Placeholder 1"/>
-          <p:cNvSpPr>
-            <a:spLocks noGrp="1" noRot="1" noChangeAspect="1"/>
-          </p:cNvSpPr>
-          <p:nvPr>
-            <p:ph type="sldImg" idx="2"/>
-          </p:nvPr>
-        </p:nvSpPr>
-        <p:spPr/>
-      </p:sp>
-      <p:sp>
-        <p:nvSpPr>
-          <p:cNvPr id="3" name="Notes Placeholder 2"/>
-          <p:cNvSpPr>
-            <a:spLocks noGrp="1"/>
-          </p:cNvSpPr>
-          <p:nvPr>
-            <p:ph type="body" sz="quarter" idx="3"/>
-          </p:nvPr>
-        </p:nvSpPr>
-        <p:spPr/>
-        <p:txBody>
-          <a:bodyPr/>
-          <a:lstStyle/>
-          <a:p>
-            <a:r>
-              <a:rPr dirty="0"/>
-              <a:t>code/stage2_model.py </a:t>
-            </a:r>
-            <a:r>
-              <a:rPr dirty="0" err="1"/>
-              <a:t>LateFusionNet</a:t>
-            </a:r>
-            <a:r>
-              <a:rPr dirty="0"/>
-              <a:t>, CLIN_BRANCH_VARIANT="</a:t>
-            </a:r>
-            <a:r>
-              <a:rPr dirty="0" err="1"/>
-              <a:t>frozen_lr</a:t>
-            </a:r>
-            <a:r>
-              <a:rPr dirty="0"/>
-              <a:t>"(</a:t>
-            </a:r>
-            <a:r>
-              <a:rPr dirty="0" err="1"/>
-              <a:t>기본값</a:t>
-            </a:r>
-            <a:r>
-              <a:rPr dirty="0"/>
-              <a:t>, L64-72/136-164)로 </a:t>
-            </a:r>
-            <a:r>
-              <a:rPr dirty="0" err="1"/>
-              <a:t>시각화</a:t>
-            </a:r>
-            <a:r>
-              <a:rPr dirty="0"/>
-              <a:t>.</a:t>
-            </a:r>
-          </a:p>
-          <a:p>
-            <a:r>
-              <a:t>근거</a:t>
-            </a:r>
-            <a:r>
-              <a:rPr dirty="0"/>
-              <a:t>: code/stage2_model_clinical_branch_ablation.py -- </a:t>
-            </a:r>
-            <a:r>
-              <a:rPr dirty="0" err="1"/>
-              <a:t>동일</a:t>
-            </a:r>
-            <a:r>
-              <a:rPr dirty="0"/>
-              <a:t> OOF/frozen-external </a:t>
-            </a:r>
-            <a:r>
-              <a:rPr dirty="0" err="1"/>
-              <a:t>프로토콜에서</a:t>
-            </a:r>
-            <a:r>
-              <a:rPr dirty="0"/>
-              <a:t> </a:t>
-            </a:r>
-            <a:r>
-              <a:rPr dirty="0" err="1"/>
-              <a:t>mlp</a:t>
-            </a:r>
-            <a:r>
-              <a:rPr dirty="0"/>
-              <a:t>/linear(Linear(4,16),</a:t>
-            </a:r>
-            <a:r>
-              <a:rPr dirty="0" err="1"/>
-              <a:t>활성화없음</a:t>
-            </a:r>
-            <a:r>
-              <a:rPr dirty="0"/>
-              <a:t>)/</a:t>
-            </a:r>
-            <a:r>
-              <a:rPr dirty="0" err="1"/>
-              <a:t>frozen_lr</a:t>
-            </a:r>
-            <a:r>
-              <a:rPr dirty="0"/>
-              <a:t> 세 </a:t>
-            </a:r>
-            <a:r>
-              <a:rPr dirty="0" err="1"/>
-              <a:t>변형을</a:t>
-            </a:r>
-            <a:r>
-              <a:rPr dirty="0"/>
-              <a:t> </a:t>
-            </a:r>
-            <a:r>
-              <a:rPr dirty="0" err="1"/>
-              <a:t>비교</a:t>
-            </a:r>
-            <a:r>
-              <a:rPr dirty="0"/>
-              <a:t>. Net NRI: </a:t>
-            </a:r>
-            <a:r>
-              <a:rPr dirty="0" err="1"/>
-              <a:t>mlp</a:t>
-            </a:r>
-            <a:r>
-              <a:rPr dirty="0"/>
-              <a:t> internal+38/external+10, linear +29/+23, </a:t>
-            </a:r>
-            <a:r>
-              <a:rPr dirty="0" err="1"/>
-              <a:t>frozen_lr</a:t>
-            </a:r>
-            <a:r>
-              <a:rPr dirty="0"/>
-              <a:t> +74/+15 -- </a:t>
-            </a:r>
-            <a:r>
-              <a:rPr dirty="0" err="1"/>
-              <a:t>frozen_lr이</a:t>
-            </a:r>
-            <a:r>
-              <a:rPr dirty="0"/>
-              <a:t> </a:t>
-            </a:r>
-            <a:r>
-              <a:rPr dirty="0" err="1"/>
-              <a:t>internal에서</a:t>
-            </a:r>
-            <a:r>
-              <a:rPr dirty="0"/>
-              <a:t> </a:t>
-            </a:r>
-            <a:r>
-              <a:rPr dirty="0" err="1"/>
-              <a:t>거의</a:t>
-            </a:r>
-            <a:r>
-              <a:rPr dirty="0"/>
-              <a:t> 2배, </a:t>
-            </a:r>
-            <a:r>
-              <a:rPr dirty="0" err="1"/>
-              <a:t>external에서도</a:t>
-            </a:r>
-            <a:r>
-              <a:rPr dirty="0"/>
-              <a:t> </a:t>
-            </a:r>
-            <a:r>
-              <a:rPr dirty="0" err="1"/>
-              <a:t>mlp보다</a:t>
-            </a:r>
-            <a:r>
-              <a:rPr dirty="0"/>
-              <a:t> </a:t>
-            </a:r>
-            <a:r>
-              <a:rPr dirty="0" err="1"/>
-              <a:t>우세</a:t>
-            </a:r>
-            <a:r>
-              <a:rPr dirty="0"/>
-              <a:t>. AEC branch(Conv1d 1-&gt;8,k7 / Conv1d 8-&gt;16,k5 / AdaptiveAvgPool1d(1) / Linear 16-&gt;16, </a:t>
-            </a:r>
-            <a:r>
-              <a:rPr dirty="0" err="1"/>
-              <a:t>전부</a:t>
-            </a:r>
-            <a:r>
-              <a:rPr dirty="0"/>
-              <a:t> code/stage2_model.py L109-130)는 </a:t>
-            </a:r>
-            <a:r>
-              <a:rPr dirty="0" err="1"/>
-              <a:t>그대로</a:t>
-            </a:r>
-            <a:r>
-              <a:rPr dirty="0"/>
-              <a:t> </a:t>
-            </a:r>
-            <a:r>
-              <a:rPr dirty="0" err="1"/>
-              <a:t>유지</a:t>
-            </a:r>
-            <a:r>
-              <a:rPr dirty="0"/>
-              <a:t> -- 4-input </a:t>
-            </a:r>
-            <a:r>
-              <a:rPr dirty="0" err="1"/>
-              <a:t>clinical만</a:t>
-            </a:r>
-            <a:r>
-              <a:rPr dirty="0"/>
-              <a:t> MLP </a:t>
-            </a:r>
-            <a:r>
-              <a:rPr dirty="0" err="1"/>
-              <a:t>용량이</a:t>
-            </a:r>
-            <a:r>
-              <a:rPr dirty="0"/>
-              <a:t> </a:t>
-            </a:r>
-            <a:r>
-              <a:rPr dirty="0" err="1"/>
-              <a:t>과했다는</a:t>
-            </a:r>
-            <a:r>
-              <a:rPr dirty="0"/>
-              <a:t> 뜻(TP=117/131 </a:t>
-            </a:r>
-            <a:r>
-              <a:rPr dirty="0" err="1"/>
-              <a:t>표본에</a:t>
-            </a:r>
-            <a:r>
-              <a:rPr dirty="0"/>
-              <a:t> 688 </a:t>
-            </a:r>
-            <a:r>
-              <a:rPr dirty="0" err="1"/>
-              <a:t>파라미터를</a:t>
-            </a:r>
-            <a:r>
-              <a:rPr dirty="0"/>
-              <a:t> </a:t>
-            </a:r>
-            <a:r>
-              <a:rPr dirty="0" err="1"/>
-              <a:t>같이</a:t>
-            </a:r>
-            <a:r>
-              <a:rPr dirty="0"/>
-              <a:t> </a:t>
-            </a:r>
-            <a:r>
-              <a:rPr dirty="0" err="1"/>
-              <a:t>학습시키면서</a:t>
-            </a:r>
-            <a:r>
-              <a:rPr dirty="0"/>
-              <a:t> AEC </a:t>
-            </a:r>
-            <a:r>
-              <a:rPr dirty="0" err="1"/>
-              <a:t>신호를</a:t>
-            </a:r>
-            <a:r>
-              <a:rPr dirty="0"/>
-              <a:t> </a:t>
-            </a:r>
-            <a:r>
-              <a:rPr dirty="0" err="1"/>
-              <a:t>오히려</a:t>
-            </a:r>
-            <a:r>
-              <a:rPr dirty="0"/>
-              <a:t> </a:t>
-            </a:r>
-            <a:r>
-              <a:rPr dirty="0" err="1"/>
-              <a:t>희석했을</a:t>
-            </a:r>
-            <a:r>
-              <a:rPr dirty="0"/>
-              <a:t> </a:t>
-            </a:r>
-            <a:r>
-              <a:rPr dirty="0" err="1"/>
-              <a:t>가능성</a:t>
-            </a:r>
-            <a:r>
-              <a:rPr dirty="0"/>
-              <a:t>).</a:t>
-            </a:r>
-          </a:p>
-          <a:p>
-            <a:r>
-              <a:rPr dirty="0" err="1"/>
-              <a:t>fusion_head</a:t>
-            </a:r>
-            <a:r>
-              <a:rPr dirty="0"/>
-              <a:t> </a:t>
-            </a:r>
-            <a:r>
-              <a:rPr dirty="0" err="1"/>
-              <a:t>입력</a:t>
-            </a:r>
-            <a:r>
-              <a:rPr dirty="0"/>
-              <a:t> </a:t>
-            </a:r>
-            <a:r>
-              <a:rPr dirty="0" err="1"/>
-              <a:t>차원도</a:t>
-            </a:r>
-            <a:r>
-              <a:rPr dirty="0"/>
-              <a:t> 32(16+16)-&gt;17(1+16)로 </a:t>
-            </a:r>
-            <a:r>
-              <a:rPr dirty="0" err="1"/>
-              <a:t>줄어듦</a:t>
-            </a:r>
-            <a:r>
-              <a:rPr dirty="0"/>
-              <a:t> (</a:t>
-            </a:r>
-            <a:r>
-              <a:rPr dirty="0" err="1"/>
-              <a:t>LateFusionNet</a:t>
-            </a:r>
-            <a:r>
-              <a:rPr dirty="0"/>
-              <a:t>.__</a:t>
-            </a:r>
-            <a:r>
-              <a:rPr dirty="0" err="1"/>
-              <a:t>init</a:t>
-            </a:r>
-            <a:r>
-              <a:rPr dirty="0"/>
-              <a:t>__, </a:t>
-            </a:r>
-            <a:r>
-              <a:rPr dirty="0" err="1"/>
-              <a:t>embed_dim+clin_embed_dim</a:t>
-            </a:r>
-            <a:r>
-              <a:rPr dirty="0"/>
-              <a:t>).</a:t>
-            </a:r>
-          </a:p>
-        </p:txBody>
-      </p:sp>
-      <p:sp>
-        <p:nvSpPr>
-          <p:cNvPr id="4" name="Slide Number Placeholder 3"/>
-          <p:cNvSpPr>
-            <a:spLocks noGrp="1"/>
-          </p:cNvSpPr>
-          <p:nvPr>
-            <p:ph type="sldNum" sz="quarter" idx="5"/>
-          </p:nvPr>
-        </p:nvSpPr>
-        <p:spPr/>
-      </p:sp>
-    </p:spTree>
-  </p:cSld>
-  <p:clrMapOvr>
-    <a:masterClrMapping/>
-  </p:clrMapOvr>
-</p:notes>
-</file>
-
 <file path=ppt/notesSlides/notesSlide7.xml><?xml version="1.0" encoding="utf-8"?>
 <p:notes xmlns:a="http://schemas.openxmlformats.org/drawingml/2006/main" xmlns:r="http://schemas.openxmlformats.org/officeDocument/2006/relationships" xmlns:p="http://schemas.openxmlformats.org/presentationml/2006/main">
   <p:cSld>
@@ -7205,22 +5916,1067 @@
           <a:lstStyle/>
           <a:p>
             <a:r>
-              <a:t>산출: code/stage2_model.py fit_score_standardizer() (2026-07-22 decision_function 전환 후 재적합). internal Stage-2 코호트(screen-positive, TP=117/FP=447, n=564)의 raw score(Stage-1 LR decision_function, log-odds)에서 mean/std를 1회 fit하고, external에는 이 값을 그대로(frozen) 적용 -- raw clinical feature 표준화(fit_clinical_standardizer)와 동일한 패턴.</a:t>
-            </a:r>
-          </a:p>
-          <a:p>
-            <a:r>
-              <a:t>문제: raw score는 predict_proba가 아니라 decision_function(log-odds)이라 부호 자체는 문제가 아님 -- Stage-2 코호트(screen-positive, score&gt;=th=-2.7083) 중 94%(530/564)가 여전히 음수. 실제 문제는 척도: mean=-1.5704, std=0.9154로 원점에서 크게 벗어나 있고(min=-2.7083, 25%=-2.2636, 중앙값=-1.8144, 75%=-1.0498, max=3.0610), 표준화 없이 그대로 fusion에 넣으면 학습이 이 오프셋에 끌려간다. A/B로 확인: raw 그대로 학습 시 internal Net NRI=+49, external Net NRI=0(재분류 전무, stage-1-only와 완전히 동일) -- 표준화 없이는 external에서 전혀 작동하지 않음.</a:t>
-            </a:r>
-          </a:p>
-          <a:p>
-            <a:r>
-              <a:t>해결: z_clin = (score - (-1.5704)) / 0.9154. 결과 분포는 564명 중 41%가 양수/59%가 음수로 재배치. 판별정보는 보존: FP 평균 환자 z=-0.195, TP 평균 환자 z=+0.746 -- TP가 더 높다는 순서는 그대로.</a:t>
-            </a:r>
-          </a:p>
-          <a:p>
-            <a:r>
-              <a:t>효과: 표준화 전(raw log-odds 그대로) internal Net NRI=+49/external Net NRI=0 -&gt; 표준화 후 internal +71/external +34. external은 0에서 +34로 처음 작동하기 시작한 것 -- raw score가 갖던 스케일/오프셋 의존성이 제거되며 external 전이(일반화)가 비로소 가능해진 것으로 해석. 상세 A/B 비교 스크립트: 대화 중 임시 비교 실행 참고(같은 코드베이스, 표준화만 on/off).</a:t>
+              <a:rPr dirty="0"/>
+              <a:t>[Intro] Clinic 4개 </a:t>
+            </a:r>
+            <a:r>
+              <a:rPr dirty="0" err="1"/>
+              <a:t>인체계측</a:t>
+            </a:r>
+            <a:r>
+              <a:rPr dirty="0"/>
+              <a:t> </a:t>
+            </a:r>
+            <a:r>
+              <a:rPr dirty="0" err="1"/>
+              <a:t>변수</a:t>
+            </a:r>
+            <a:r>
+              <a:rPr dirty="0"/>
+              <a:t>(</a:t>
+            </a:r>
+            <a:r>
+              <a:rPr dirty="0" err="1"/>
+              <a:t>성별·나이·키·체중</a:t>
+            </a:r>
+            <a:r>
+              <a:rPr dirty="0"/>
+              <a:t>)는 </a:t>
+            </a:r>
+            <a:r>
+              <a:rPr dirty="0" err="1"/>
+              <a:t>체성분</a:t>
+            </a:r>
+            <a:r>
+              <a:rPr dirty="0"/>
+              <a:t>(</a:t>
+            </a:r>
+            <a:r>
+              <a:rPr dirty="0" err="1"/>
+              <a:t>특히</a:t>
+            </a:r>
+            <a:r>
+              <a:rPr dirty="0"/>
+              <a:t> </a:t>
+            </a:r>
+            <a:r>
+              <a:rPr dirty="0" err="1"/>
+              <a:t>골격근량</a:t>
+            </a:r>
+            <a:r>
+              <a:rPr dirty="0"/>
+              <a:t>)의 </a:t>
+            </a:r>
+            <a:r>
+              <a:rPr dirty="0" err="1"/>
+              <a:t>간접적</a:t>
+            </a:r>
+            <a:r>
+              <a:rPr dirty="0"/>
+              <a:t> </a:t>
+            </a:r>
+            <a:r>
+              <a:rPr dirty="0" err="1"/>
+              <a:t>대리지표일</a:t>
+            </a:r>
+            <a:r>
+              <a:rPr dirty="0"/>
+              <a:t> 뿐 </a:t>
+            </a:r>
+            <a:r>
+              <a:rPr dirty="0" err="1"/>
+              <a:t>근육의</a:t>
+            </a:r>
+            <a:r>
+              <a:rPr dirty="0"/>
+              <a:t> </a:t>
+            </a:r>
+            <a:r>
+              <a:rPr dirty="0" err="1"/>
+              <a:t>질·조성을</a:t>
+            </a:r>
+            <a:r>
+              <a:rPr dirty="0"/>
+              <a:t> </a:t>
+            </a:r>
+            <a:r>
+              <a:rPr dirty="0" err="1"/>
+              <a:t>직접</a:t>
+            </a:r>
+            <a:r>
+              <a:rPr dirty="0"/>
+              <a:t> </a:t>
+            </a:r>
+            <a:r>
+              <a:rPr dirty="0" err="1"/>
+              <a:t>반영하지</a:t>
+            </a:r>
+            <a:r>
+              <a:rPr dirty="0"/>
+              <a:t> </a:t>
+            </a:r>
+            <a:r>
+              <a:rPr dirty="0" err="1"/>
+              <a:t>않는다</a:t>
+            </a:r>
+            <a:r>
+              <a:rPr dirty="0"/>
+              <a:t> — </a:t>
+            </a:r>
+            <a:r>
+              <a:rPr dirty="0" err="1"/>
+              <a:t>anthropometry만으로</a:t>
+            </a:r>
+            <a:r>
+              <a:rPr dirty="0"/>
+              <a:t> </a:t>
+            </a:r>
+            <a:r>
+              <a:rPr dirty="0" err="1"/>
+              <a:t>설명</a:t>
+            </a:r>
+            <a:r>
+              <a:rPr dirty="0"/>
+              <a:t> </a:t>
+            </a:r>
+            <a:r>
+              <a:rPr dirty="0" err="1"/>
+              <a:t>가능한</a:t>
+            </a:r>
+            <a:r>
+              <a:rPr dirty="0"/>
+              <a:t> </a:t>
+            </a:r>
+            <a:r>
+              <a:rPr dirty="0" err="1"/>
+              <a:t>분산에는</a:t>
+            </a:r>
+            <a:r>
+              <a:rPr dirty="0"/>
+              <a:t> </a:t>
+            </a:r>
+            <a:r>
+              <a:rPr dirty="0" err="1"/>
+              <a:t>이론적</a:t>
+            </a:r>
+            <a:r>
+              <a:rPr dirty="0"/>
+              <a:t> </a:t>
+            </a:r>
+            <a:r>
+              <a:rPr dirty="0" err="1"/>
+              <a:t>상한이</a:t>
+            </a:r>
+            <a:r>
+              <a:rPr dirty="0"/>
+              <a:t> </a:t>
+            </a:r>
+            <a:r>
+              <a:rPr dirty="0" err="1"/>
+              <a:t>있다</a:t>
+            </a:r>
+            <a:r>
+              <a:rPr dirty="0"/>
+              <a:t>. </a:t>
+            </a:r>
+            <a:r>
+              <a:rPr dirty="0" err="1"/>
+              <a:t>Clinic과</a:t>
+            </a:r>
+            <a:r>
+              <a:rPr dirty="0"/>
+              <a:t> </a:t>
+            </a:r>
+            <a:r>
+              <a:rPr dirty="0" err="1"/>
+              <a:t>독립적인</a:t>
+            </a:r>
+            <a:r>
+              <a:rPr dirty="0"/>
+              <a:t> </a:t>
+            </a:r>
+            <a:r>
+              <a:rPr dirty="0" err="1"/>
+              <a:t>정보원인</a:t>
+            </a:r>
+            <a:r>
+              <a:rPr dirty="0"/>
+              <a:t> AEC </a:t>
+            </a:r>
+            <a:r>
+              <a:rPr dirty="0" err="1"/>
+              <a:t>임피던스</a:t>
+            </a:r>
+            <a:r>
+              <a:rPr dirty="0"/>
+              <a:t> </a:t>
+            </a:r>
+            <a:r>
+              <a:rPr dirty="0" err="1"/>
+              <a:t>곡선을</a:t>
+            </a:r>
+            <a:r>
+              <a:rPr dirty="0"/>
+              <a:t> </a:t>
+            </a:r>
+            <a:r>
+              <a:rPr dirty="0" err="1"/>
+              <a:t>결합하면</a:t>
+            </a:r>
+            <a:r>
+              <a:rPr dirty="0"/>
+              <a:t> 이 </a:t>
+            </a:r>
+            <a:r>
+              <a:rPr dirty="0" err="1"/>
+              <a:t>상한을</a:t>
+            </a:r>
+            <a:r>
+              <a:rPr dirty="0"/>
+              <a:t> </a:t>
+            </a:r>
+            <a:r>
+              <a:rPr dirty="0" err="1"/>
+              <a:t>넘어설</a:t>
+            </a:r>
+            <a:r>
+              <a:rPr dirty="0"/>
+              <a:t> </a:t>
+            </a:r>
+            <a:r>
+              <a:rPr dirty="0" err="1"/>
+              <a:t>가능성이</a:t>
+            </a:r>
+            <a:r>
+              <a:rPr dirty="0"/>
+              <a:t> </a:t>
+            </a:r>
+            <a:r>
+              <a:rPr dirty="0" err="1"/>
+              <a:t>있으며</a:t>
+            </a:r>
+            <a:r>
+              <a:rPr dirty="0"/>
+              <a:t>, </a:t>
+            </a:r>
+            <a:r>
+              <a:rPr dirty="0" err="1"/>
+              <a:t>이것이</a:t>
+            </a:r>
+            <a:r>
+              <a:rPr dirty="0"/>
+              <a:t> </a:t>
+            </a:r>
+            <a:r>
+              <a:rPr dirty="0" err="1"/>
+              <a:t>아래</a:t>
+            </a:r>
+            <a:r>
+              <a:rPr dirty="0"/>
+              <a:t> TP/FP AEC-128 </a:t>
+            </a:r>
+            <a:r>
+              <a:rPr dirty="0" err="1"/>
+              <a:t>곡선</a:t>
+            </a:r>
+            <a:r>
+              <a:rPr dirty="0"/>
+              <a:t> </a:t>
+            </a:r>
+            <a:r>
+              <a:rPr dirty="0" err="1"/>
+              <a:t>비교</a:t>
+            </a:r>
+            <a:r>
+              <a:rPr dirty="0"/>
+              <a:t> 및 </a:t>
+            </a:r>
+            <a:r>
+              <a:rPr dirty="0" err="1"/>
+              <a:t>이후</a:t>
+            </a:r>
+            <a:r>
+              <a:rPr dirty="0"/>
+              <a:t> Stage-2 fusion </a:t>
+            </a:r>
+            <a:r>
+              <a:rPr dirty="0" err="1"/>
+              <a:t>시도의</a:t>
+            </a:r>
+            <a:r>
+              <a:rPr dirty="0"/>
+              <a:t> </a:t>
+            </a:r>
+            <a:r>
+              <a:rPr dirty="0" err="1"/>
+              <a:t>근거다</a:t>
+            </a:r>
+            <a:r>
+              <a:rPr dirty="0"/>
+              <a:t>.</a:t>
+            </a:r>
+          </a:p>
+          <a:p>
+            <a:endParaRPr dirty="0"/>
+          </a:p>
+          <a:p>
+            <a:r>
+              <a:rPr dirty="0"/>
+              <a:t>이 </a:t>
+            </a:r>
+            <a:r>
+              <a:rPr dirty="0" err="1"/>
+              <a:t>슬라이드</a:t>
+            </a:r>
+            <a:r>
+              <a:rPr dirty="0"/>
+              <a:t> </a:t>
+            </a:r>
+            <a:r>
+              <a:rPr dirty="0" err="1"/>
+              <a:t>이전</a:t>
+            </a:r>
+            <a:r>
+              <a:rPr dirty="0"/>
+              <a:t> </a:t>
+            </a:r>
+            <a:r>
+              <a:rPr dirty="0" err="1"/>
+              <a:t>맥락</a:t>
+            </a:r>
+            <a:r>
+              <a:rPr dirty="0"/>
+              <a:t>(</a:t>
+            </a:r>
+            <a:r>
+              <a:rPr dirty="0" err="1"/>
+              <a:t>구두</a:t>
+            </a:r>
+            <a:r>
+              <a:rPr dirty="0"/>
+              <a:t> </a:t>
+            </a:r>
+            <a:r>
+              <a:rPr dirty="0" err="1"/>
+              <a:t>설명용</a:t>
+            </a:r>
+            <a:r>
+              <a:rPr dirty="0"/>
+              <a:t>, </a:t>
+            </a:r>
+            <a:r>
+              <a:rPr dirty="0" err="1"/>
+              <a:t>슬라이드엔</a:t>
+            </a:r>
+            <a:r>
+              <a:rPr dirty="0"/>
+              <a:t> </a:t>
+            </a:r>
+            <a:r>
+              <a:rPr dirty="0" err="1"/>
+              <a:t>없음</a:t>
+            </a:r>
+            <a:r>
+              <a:rPr dirty="0"/>
+              <a:t>): raw(</a:t>
+            </a:r>
+            <a:r>
+              <a:rPr dirty="0" err="1"/>
+              <a:t>비매칭</a:t>
+            </a:r>
+            <a:r>
+              <a:rPr dirty="0"/>
+              <a:t>) TP vs FP AEC-128 </a:t>
+            </a:r>
+            <a:r>
+              <a:rPr dirty="0" err="1"/>
+              <a:t>곡선</a:t>
+            </a:r>
+            <a:r>
+              <a:rPr dirty="0"/>
+              <a:t> </a:t>
+            </a:r>
+            <a:r>
+              <a:rPr dirty="0" err="1"/>
+              <a:t>비교는</a:t>
+            </a:r>
+            <a:r>
+              <a:rPr dirty="0"/>
+              <a:t> </a:t>
+            </a:r>
+            <a:r>
+              <a:rPr dirty="0" err="1"/>
+              <a:t>코호트</a:t>
+            </a:r>
+            <a:r>
+              <a:rPr dirty="0"/>
+              <a:t> 간 </a:t>
+            </a:r>
+            <a:r>
+              <a:rPr dirty="0" err="1"/>
+              <a:t>결과가</a:t>
+            </a:r>
+            <a:r>
+              <a:rPr dirty="0"/>
+              <a:t> </a:t>
+            </a:r>
+            <a:r>
+              <a:rPr dirty="0" err="1"/>
+              <a:t>불일치했다</a:t>
+            </a:r>
+            <a:r>
+              <a:rPr dirty="0"/>
+              <a:t> (Gangnam RMSD=0.0155, p=0.227 </a:t>
+            </a:r>
+            <a:r>
+              <a:rPr dirty="0" err="1"/>
+              <a:t>n.s</a:t>
+            </a:r>
+            <a:r>
+              <a:rPr dirty="0"/>
+              <a:t>. / Sinchon RMSD=0.0274, p=0.0175). TP/FP </a:t>
+            </a:r>
+            <a:r>
+              <a:rPr dirty="0" err="1"/>
+              <a:t>그룹이</a:t>
+            </a:r>
+            <a:r>
+              <a:rPr dirty="0"/>
+              <a:t> clinic </a:t>
+            </a:r>
+            <a:r>
+              <a:rPr dirty="0" err="1"/>
+              <a:t>공변량</a:t>
+            </a:r>
+            <a:r>
+              <a:rPr dirty="0"/>
+              <a:t>(</a:t>
+            </a:r>
+            <a:r>
+              <a:rPr dirty="0" err="1"/>
+              <a:t>성별·나이·신장·체중</a:t>
+            </a:r>
+            <a:r>
+              <a:rPr dirty="0"/>
+              <a:t>) </a:t>
+            </a:r>
+            <a:r>
+              <a:rPr dirty="0" err="1"/>
+              <a:t>분포</a:t>
+            </a:r>
+            <a:r>
+              <a:rPr dirty="0"/>
+              <a:t> </a:t>
+            </a:r>
+            <a:r>
+              <a:rPr dirty="0" err="1"/>
+              <a:t>자체가</a:t>
+            </a:r>
+            <a:r>
+              <a:rPr dirty="0"/>
+              <a:t> </a:t>
+            </a:r>
+            <a:r>
+              <a:rPr dirty="0" err="1"/>
+              <a:t>다를</a:t>
+            </a:r>
+            <a:r>
+              <a:rPr dirty="0"/>
+              <a:t> </a:t>
+            </a:r>
+            <a:r>
+              <a:rPr dirty="0" err="1"/>
+              <a:t>가능성</a:t>
+            </a:r>
+            <a:r>
+              <a:rPr dirty="0"/>
+              <a:t>(confound)을 </a:t>
+            </a:r>
+            <a:r>
+              <a:rPr dirty="0" err="1"/>
+              <a:t>배제하기</a:t>
+            </a:r>
+            <a:r>
+              <a:rPr dirty="0"/>
+              <a:t> </a:t>
+            </a:r>
+            <a:r>
+              <a:rPr dirty="0" err="1"/>
+              <a:t>위해</a:t>
+            </a:r>
+            <a:r>
+              <a:rPr dirty="0"/>
+              <a:t>, </a:t>
+            </a:r>
+            <a:r>
+              <a:rPr dirty="0" err="1"/>
+              <a:t>모델</a:t>
+            </a:r>
+            <a:r>
+              <a:rPr dirty="0"/>
+              <a:t> </a:t>
+            </a:r>
+            <a:r>
+              <a:rPr dirty="0" err="1"/>
+              <a:t>기반</a:t>
+            </a:r>
+            <a:r>
+              <a:rPr dirty="0"/>
+              <a:t> </a:t>
+            </a:r>
+            <a:r>
+              <a:rPr dirty="0" err="1"/>
+              <a:t>잔차화</a:t>
+            </a:r>
+            <a:r>
+              <a:rPr dirty="0"/>
+              <a:t> </a:t>
+            </a:r>
+            <a:r>
+              <a:rPr dirty="0" err="1"/>
+              <a:t>대신</a:t>
+            </a:r>
+            <a:r>
+              <a:rPr dirty="0"/>
+              <a:t> </a:t>
+            </a:r>
+            <a:r>
+              <a:rPr dirty="0" err="1"/>
+              <a:t>표본</a:t>
+            </a:r>
+            <a:r>
+              <a:rPr dirty="0"/>
+              <a:t> </a:t>
+            </a:r>
+            <a:r>
+              <a:rPr dirty="0" err="1"/>
+              <a:t>설계</a:t>
+            </a:r>
+            <a:r>
+              <a:rPr dirty="0"/>
+              <a:t> </a:t>
+            </a:r>
+            <a:r>
+              <a:rPr dirty="0" err="1"/>
+              <a:t>단계에서</a:t>
+            </a:r>
+            <a:r>
+              <a:rPr dirty="0"/>
+              <a:t> </a:t>
+            </a:r>
+            <a:r>
+              <a:rPr dirty="0" err="1"/>
+              <a:t>confound를</a:t>
+            </a:r>
+            <a:r>
+              <a:rPr dirty="0"/>
+              <a:t> </a:t>
+            </a:r>
+            <a:r>
+              <a:rPr dirty="0" err="1"/>
+              <a:t>통제하는</a:t>
+            </a:r>
+            <a:r>
+              <a:rPr dirty="0"/>
+              <a:t> propensity-score </a:t>
+            </a:r>
+            <a:r>
+              <a:rPr dirty="0" err="1"/>
+              <a:t>matching을</a:t>
+            </a:r>
+            <a:r>
+              <a:rPr dirty="0"/>
+              <a:t> </a:t>
+            </a:r>
+            <a:r>
+              <a:rPr dirty="0" err="1"/>
+              <a:t>적용했다</a:t>
+            </a:r>
+            <a:r>
+              <a:rPr dirty="0"/>
+              <a:t>.</a:t>
+            </a:r>
+          </a:p>
+          <a:p>
+            <a:endParaRPr dirty="0"/>
+          </a:p>
+          <a:p>
+            <a:r>
+              <a:rPr dirty="0" err="1"/>
+              <a:t>방법</a:t>
+            </a:r>
+            <a:r>
+              <a:rPr dirty="0"/>
+              <a:t>: stage2_input_clin의 </a:t>
+            </a:r>
+            <a:r>
+              <a:rPr dirty="0" err="1"/>
+              <a:t>표준화</a:t>
+            </a:r>
+            <a:r>
+              <a:rPr dirty="0"/>
+              <a:t> </a:t>
+            </a:r>
+            <a:r>
+              <a:rPr dirty="0" err="1"/>
+              <a:t>공변량으로</a:t>
+            </a:r>
+            <a:r>
+              <a:rPr dirty="0"/>
+              <a:t> </a:t>
+            </a:r>
+            <a:r>
+              <a:rPr dirty="0" err="1"/>
+              <a:t>로지스틱회귀</a:t>
+            </a:r>
+            <a:r>
+              <a:rPr dirty="0"/>
+              <a:t> propensity </a:t>
+            </a:r>
+            <a:r>
+              <a:rPr dirty="0" err="1"/>
+              <a:t>score를</a:t>
+            </a:r>
+            <a:r>
+              <a:rPr dirty="0"/>
+              <a:t> </a:t>
+            </a:r>
+            <a:r>
+              <a:rPr dirty="0" err="1"/>
+              <a:t>추정하고</a:t>
+            </a:r>
+            <a:r>
+              <a:rPr dirty="0"/>
+              <a:t>, logit(propensity) </a:t>
+            </a:r>
+            <a:r>
+              <a:rPr dirty="0" err="1"/>
+              <a:t>기준</a:t>
+            </a:r>
+            <a:r>
+              <a:rPr dirty="0"/>
+              <a:t> caliper(0.2×SD) </a:t>
+            </a:r>
+            <a:r>
+              <a:rPr dirty="0" err="1"/>
+              <a:t>안에서</a:t>
+            </a:r>
+            <a:r>
+              <a:rPr dirty="0"/>
+              <a:t> TP-FP </a:t>
+            </a:r>
+            <a:r>
+              <a:rPr dirty="0" err="1"/>
+              <a:t>전체</a:t>
+            </a:r>
+            <a:r>
+              <a:rPr dirty="0"/>
+              <a:t> 총 </a:t>
+            </a:r>
+            <a:r>
+              <a:rPr dirty="0" err="1"/>
+              <a:t>거리를</a:t>
+            </a:r>
+            <a:r>
+              <a:rPr dirty="0"/>
+              <a:t> </a:t>
+            </a:r>
+            <a:r>
+              <a:rPr dirty="0" err="1"/>
+              <a:t>최소화하는</a:t>
+            </a:r>
+            <a:r>
+              <a:rPr dirty="0"/>
+              <a:t> </a:t>
+            </a:r>
+            <a:r>
+              <a:rPr dirty="0" err="1"/>
+              <a:t>전역</a:t>
+            </a:r>
+            <a:r>
+              <a:rPr dirty="0"/>
+              <a:t> </a:t>
+            </a:r>
+            <a:r>
+              <a:rPr dirty="0" err="1"/>
+              <a:t>최적</a:t>
+            </a:r>
+            <a:r>
+              <a:rPr dirty="0"/>
+              <a:t> 1:1 </a:t>
+            </a:r>
+            <a:r>
+              <a:rPr dirty="0" err="1"/>
+              <a:t>할당</a:t>
+            </a:r>
+            <a:r>
+              <a:rPr dirty="0"/>
+              <a:t>(Hungarian algorithm, </a:t>
+            </a:r>
+            <a:r>
+              <a:rPr dirty="0" err="1"/>
+              <a:t>scipy.optimize.linear_sum_assignment</a:t>
+            </a:r>
+            <a:r>
+              <a:rPr dirty="0"/>
+              <a:t>)</a:t>
+            </a:r>
+            <a:r>
+              <a:rPr dirty="0" err="1"/>
+              <a:t>으로</a:t>
+            </a:r>
+            <a:r>
+              <a:rPr dirty="0"/>
+              <a:t> </a:t>
+            </a:r>
+            <a:r>
+              <a:rPr dirty="0" err="1"/>
+              <a:t>매칭했다</a:t>
+            </a:r>
+            <a:r>
+              <a:rPr dirty="0"/>
+              <a:t> (code/stage2_aec_tp_fp_matched_comparison.py). </a:t>
+            </a:r>
+            <a:r>
+              <a:rPr dirty="0" err="1"/>
+              <a:t>매칭</a:t>
+            </a:r>
+            <a:r>
+              <a:rPr dirty="0"/>
+              <a:t> 후 4개 </a:t>
+            </a:r>
+            <a:r>
+              <a:rPr dirty="0" err="1"/>
+              <a:t>공변량</a:t>
+            </a:r>
+            <a:r>
+              <a:rPr dirty="0"/>
+              <a:t> </a:t>
+            </a:r>
+            <a:r>
+              <a:rPr dirty="0" err="1"/>
+              <a:t>SMD가</a:t>
+            </a:r>
+            <a:r>
+              <a:rPr dirty="0"/>
+              <a:t> </a:t>
+            </a:r>
+            <a:r>
+              <a:rPr dirty="0" err="1"/>
+              <a:t>모두</a:t>
+            </a:r>
+            <a:r>
+              <a:rPr dirty="0"/>
+              <a:t> 0.08 </a:t>
+            </a:r>
+            <a:r>
+              <a:rPr dirty="0" err="1"/>
+              <a:t>미만으로</a:t>
+            </a:r>
+            <a:r>
+              <a:rPr dirty="0"/>
+              <a:t> (</a:t>
+            </a:r>
+            <a:r>
+              <a:rPr dirty="0" err="1"/>
+              <a:t>매칭</a:t>
+            </a:r>
+            <a:r>
+              <a:rPr dirty="0"/>
+              <a:t> 전 0.18~0.31) </a:t>
+            </a:r>
+            <a:r>
+              <a:rPr dirty="0" err="1"/>
+              <a:t>balance가</a:t>
+            </a:r>
+            <a:r>
+              <a:rPr dirty="0"/>
+              <a:t> 잘 </a:t>
+            </a:r>
+            <a:r>
+              <a:rPr dirty="0" err="1"/>
+              <a:t>통제됐다</a:t>
+            </a:r>
+            <a:r>
+              <a:rPr dirty="0"/>
+              <a:t>.</a:t>
+            </a:r>
+          </a:p>
+          <a:p>
+            <a:endParaRPr dirty="0"/>
+          </a:p>
+          <a:p>
+            <a:r>
+              <a:rPr dirty="0" err="1"/>
+              <a:t>결과</a:t>
+            </a:r>
+            <a:r>
+              <a:rPr dirty="0"/>
+              <a:t>: </a:t>
+            </a:r>
+            <a:r>
+              <a:rPr dirty="0" err="1"/>
+              <a:t>Gangnam은</a:t>
+            </a:r>
+            <a:r>
+              <a:rPr dirty="0"/>
+              <a:t> </a:t>
+            </a:r>
+            <a:r>
+              <a:rPr dirty="0" err="1"/>
+              <a:t>매칭</a:t>
+            </a:r>
+            <a:r>
+              <a:rPr dirty="0"/>
+              <a:t> 후 더 </a:t>
+            </a:r>
+            <a:r>
+              <a:rPr dirty="0" err="1"/>
+              <a:t>확실히</a:t>
+            </a:r>
+            <a:r>
+              <a:rPr dirty="0"/>
+              <a:t> </a:t>
+            </a:r>
+            <a:r>
+              <a:rPr dirty="0" err="1"/>
+              <a:t>신호</a:t>
+            </a:r>
+            <a:r>
+              <a:rPr dirty="0"/>
+              <a:t> </a:t>
+            </a:r>
+            <a:r>
+              <a:rPr dirty="0" err="1"/>
+              <a:t>없음</a:t>
+            </a:r>
+            <a:r>
+              <a:rPr dirty="0"/>
+              <a:t> (RMSD=0.0057, p=0.983, 97쌍), </a:t>
+            </a:r>
+            <a:r>
+              <a:rPr dirty="0" err="1"/>
+              <a:t>Sinchon은</a:t>
+            </a:r>
+            <a:r>
+              <a:rPr dirty="0"/>
+              <a:t> </a:t>
+            </a:r>
+            <a:r>
+              <a:rPr dirty="0" err="1"/>
+              <a:t>매칭</a:t>
+            </a:r>
+            <a:r>
+              <a:rPr dirty="0"/>
+              <a:t> </a:t>
+            </a:r>
+            <a:r>
+              <a:rPr dirty="0" err="1"/>
+              <a:t>후에도</a:t>
+            </a:r>
+            <a:r>
+              <a:rPr dirty="0"/>
+              <a:t> </a:t>
+            </a:r>
+            <a:r>
+              <a:rPr dirty="0" err="1"/>
+              <a:t>여전히</a:t>
+            </a:r>
+            <a:r>
+              <a:rPr dirty="0"/>
+              <a:t> </a:t>
+            </a:r>
+            <a:r>
+              <a:rPr dirty="0" err="1"/>
+              <a:t>유의</a:t>
+            </a:r>
+            <a:r>
+              <a:rPr dirty="0"/>
+              <a:t> (RMSD=0.0422, p=0.0165, 94쌍). 즉 </a:t>
+            </a:r>
+            <a:r>
+              <a:rPr dirty="0" err="1"/>
+              <a:t>confound를</a:t>
+            </a:r>
+            <a:r>
+              <a:rPr dirty="0"/>
+              <a:t> </a:t>
+            </a:r>
+            <a:r>
+              <a:rPr dirty="0" err="1"/>
+              <a:t>설계로</a:t>
+            </a:r>
+            <a:r>
+              <a:rPr dirty="0"/>
+              <a:t> </a:t>
+            </a:r>
+            <a:r>
+              <a:rPr dirty="0" err="1"/>
+              <a:t>통제해도</a:t>
+            </a:r>
+            <a:r>
+              <a:rPr dirty="0"/>
+              <a:t> </a:t>
+            </a:r>
+            <a:r>
+              <a:rPr dirty="0" err="1"/>
+              <a:t>코호트</a:t>
+            </a:r>
+            <a:r>
+              <a:rPr dirty="0"/>
+              <a:t> 간 </a:t>
+            </a:r>
+            <a:r>
+              <a:rPr dirty="0" err="1"/>
+              <a:t>불일치가</a:t>
+            </a:r>
+            <a:r>
+              <a:rPr dirty="0"/>
+              <a:t> </a:t>
+            </a:r>
+            <a:r>
+              <a:rPr dirty="0" err="1"/>
+              <a:t>그대로</a:t>
+            </a:r>
+            <a:r>
+              <a:rPr dirty="0"/>
+              <a:t> </a:t>
+            </a:r>
+            <a:r>
+              <a:rPr dirty="0" err="1"/>
+              <a:t>남는다</a:t>
+            </a:r>
+            <a:r>
+              <a:rPr dirty="0"/>
+              <a:t> -- </a:t>
+            </a:r>
+            <a:r>
+              <a:rPr dirty="0" err="1"/>
+              <a:t>이는</a:t>
+            </a:r>
+            <a:r>
+              <a:rPr dirty="0"/>
+              <a:t> balance </a:t>
+            </a:r>
+            <a:r>
+              <a:rPr dirty="0" err="1"/>
+              <a:t>문제가</a:t>
+            </a:r>
+            <a:r>
+              <a:rPr dirty="0"/>
+              <a:t> </a:t>
+            </a:r>
+            <a:r>
+              <a:rPr dirty="0" err="1"/>
+              <a:t>아니라</a:t>
+            </a:r>
+            <a:r>
+              <a:rPr dirty="0"/>
+              <a:t> raw AEC-128 </a:t>
+            </a:r>
+            <a:r>
+              <a:rPr dirty="0" err="1"/>
+              <a:t>신호</a:t>
+            </a:r>
+            <a:r>
+              <a:rPr dirty="0"/>
+              <a:t> </a:t>
+            </a:r>
+            <a:r>
+              <a:rPr dirty="0" err="1"/>
+              <a:t>자체가</a:t>
+            </a:r>
+            <a:r>
+              <a:rPr dirty="0"/>
+              <a:t> </a:t>
+            </a:r>
+            <a:r>
+              <a:rPr dirty="0" err="1"/>
+              <a:t>코호트마다</a:t>
+            </a:r>
+            <a:r>
+              <a:rPr dirty="0"/>
+              <a:t> </a:t>
+            </a:r>
+            <a:r>
+              <a:rPr dirty="0" err="1"/>
+              <a:t>다르게</a:t>
+            </a:r>
+            <a:r>
+              <a:rPr dirty="0"/>
+              <a:t> </a:t>
+            </a:r>
+            <a:r>
+              <a:rPr dirty="0" err="1"/>
+              <a:t>나타난다는</a:t>
+            </a:r>
+            <a:r>
+              <a:rPr dirty="0"/>
+              <a:t> </a:t>
+            </a:r>
+            <a:r>
+              <a:rPr dirty="0" err="1"/>
+              <a:t>뜻이며</a:t>
+            </a:r>
+            <a:r>
+              <a:rPr dirty="0"/>
+              <a:t>, </a:t>
+            </a:r>
+            <a:r>
+              <a:rPr dirty="0" err="1"/>
+              <a:t>다음</a:t>
+            </a:r>
+            <a:r>
+              <a:rPr dirty="0"/>
+              <a:t> </a:t>
+            </a:r>
+            <a:r>
+              <a:rPr dirty="0" err="1"/>
+              <a:t>슬라이드의</a:t>
+            </a:r>
+            <a:r>
+              <a:rPr dirty="0"/>
+              <a:t> confound </a:t>
+            </a:r>
+            <a:r>
+              <a:rPr dirty="0" err="1"/>
+              <a:t>제거</a:t>
+            </a:r>
+            <a:r>
+              <a:rPr dirty="0"/>
+              <a:t>/joint fusion </a:t>
+            </a:r>
+            <a:r>
+              <a:rPr dirty="0" err="1"/>
+              <a:t>접근이</a:t>
+            </a:r>
+            <a:r>
+              <a:rPr dirty="0"/>
+              <a:t> </a:t>
+            </a:r>
+            <a:r>
+              <a:rPr dirty="0" err="1"/>
+              <a:t>필요한</a:t>
+            </a:r>
+            <a:r>
+              <a:rPr dirty="0"/>
+              <a:t> </a:t>
+            </a:r>
+            <a:r>
+              <a:rPr dirty="0" err="1"/>
+              <a:t>근거가</a:t>
+            </a:r>
+            <a:r>
+              <a:rPr dirty="0"/>
+              <a:t> </a:t>
+            </a:r>
+            <a:r>
+              <a:rPr dirty="0" err="1"/>
+              <a:t>된다</a:t>
+            </a:r>
+            <a:r>
+              <a:rPr dirty="0"/>
+              <a:t>.</a:t>
             </a:r>
           </a:p>
         </p:txBody>
@@ -7250,13 +7006,7 @@
   <p:cSld>
     <p:spTree>
       <p:nvGrpSpPr>
-        <p:cNvPr id="1" name="">
-          <a:extLst>
-            <a:ext uri="{FF2B5EF4-FFF2-40B4-BE49-F238E27FC236}">
-              <a16:creationId xmlns:a16="http://schemas.microsoft.com/office/drawing/2014/main" id="{BB7E0E5C-04C1-45BB-B829-C4A47540F35A}"/>
-            </a:ext>
-          </a:extLst>
-        </p:cNvPr>
+        <p:cNvPr id="1" name=""/>
         <p:cNvGrpSpPr/>
         <p:nvPr/>
       </p:nvGrpSpPr>
@@ -7270,13 +7020,7 @@
       </p:grpSpPr>
       <p:sp>
         <p:nvSpPr>
-          <p:cNvPr id="2" name="Slide Image Placeholder 1">
-            <a:extLst>
-              <a:ext uri="{FF2B5EF4-FFF2-40B4-BE49-F238E27FC236}">
-                <a16:creationId xmlns:a16="http://schemas.microsoft.com/office/drawing/2014/main" id="{1CDAB559-215F-5DB1-4E7E-701BE7F3379E}"/>
-              </a:ext>
-            </a:extLst>
-          </p:cNvPr>
+          <p:cNvPr id="2" name="Slide Image Placeholder 1"/>
           <p:cNvSpPr>
             <a:spLocks noGrp="1" noRot="1" noChangeAspect="1"/>
           </p:cNvSpPr>
@@ -7288,13 +7032,7 @@
       </p:sp>
       <p:sp>
         <p:nvSpPr>
-          <p:cNvPr id="3" name="Notes Placeholder 2">
-            <a:extLst>
-              <a:ext uri="{FF2B5EF4-FFF2-40B4-BE49-F238E27FC236}">
-                <a16:creationId xmlns:a16="http://schemas.microsoft.com/office/drawing/2014/main" id="{1C596FD6-6801-38EC-8C36-F53F5E1F8D86}"/>
-              </a:ext>
-            </a:extLst>
-          </p:cNvPr>
+          <p:cNvPr id="3" name="Notes Placeholder 2"/>
           <p:cNvSpPr>
             <a:spLocks noGrp="1"/>
           </p:cNvSpPr>
@@ -7308,55 +7046,346 @@
           <a:lstStyle/>
           <a:p>
             <a:r>
-              <a:t>산출: code/stage2_model.py main() (outputs/stage2_model/, CLIN_BRANCH_VARIANT="frozen_lr" 기본값, Stage-1 score를 predict_proba에서 decision_function(log-odds)으로 전환 후 재실행, 2026-07-22).</a:t>
-            </a:r>
-          </a:p>
-          <a:p>
-            <a:r>
-              <a:t>버그: frozen_lr의 z_clin이 Stage-1 raw LR score(decision_function, log-odds)를 그대로 사용 -- 확률이 아니라 log-odds라 부호 자체는 문제가 아니었다(Stage-2 코호트 94%가 음수). 실제 문제는 척도: raw score가 mean=-1.5704/std=0.9154로 원점에서 크게 벗어나 있어, 표준화 없이 그대로 fusion에 넣으면 학습이 이 오프셋에 끌려간다(raw 그대로 학습 시 internal Net NRI=+49/external Net NRI=0 -- 슬라이드7 참고). 수정: raw score를 internal Stage-2 코호트 기준으로 z-score 표준화(mean/std를 internal에서 1회 fit, external엔 frozen 적용 -- clinical feature 표준화와 동일 패턴)하여 이 오프셋을 제거.</a:t>
-            </a:r>
-          </a:p>
-          <a:p>
-            <a:r>
-              <a:t>Net NRI = fp_removed - tp_lost (build_clinical_vs_aec_row) -- Stage-2가 screen-positive(TP/FP)만 재분류하므로 가능한 전이는 Positive-&gt;Negative 한 방향뿐. 특이도/민감도 McNemar는 exact_mcnemar_p(discordant pair 이항검정).</a:t>
-            </a:r>
-          </a:p>
-          <a:p>
-            <a:r>
-              <a:t>internal: Net NRI +71, sens 0.907-&gt;0.868(p=0.0625 n.s.), spec 0.535-&gt;0.614(p&lt;0.0001). NI test: sens 86.8%&gt;=floor 86.2% PASS.</a:t>
-            </a:r>
-          </a:p>
-          <a:p>
-            <a:r>
-              <a:t>external: Net NRI +34(raw 그대로면 0 -- 슬라이드7 참고), sens 0.929-&gt;0.887(p=0.0312), spec 0.493-&gt;0.544(p&lt;0.0001). NI test: sens 88.7%&gt;=floor 88.3% PASS.</a:t>
-            </a:r>
-          </a:p>
-          <a:p>
-            <a:r>
-              <a:t>전체곡선 AUC/DeLong: internal 0.828-&gt;0.828(diff +0.0001, p=0.858 n.s.), external 0.835-&gt;0.835(diff +0.00002, p=0.247 n.s.) -- stage1_vs_full_pipeline_auc.csv. AUC 비교는 marker의 incremental value 검출에 저출력이라(Pepe 2004; Pencina 2008) NRI/McNemar를 1차 유의성 지표로 삼음.</a:t>
-            </a:r>
-          </a:p>
-          <a:p>
-            <a:r>
-              <a:t>해석: raw log-odds를 표준화 없이 그대로 쓰면 external에서 전혀 재분류가 일어나지 않는다(Net NRI=0) -- 표준화가 정보를 추가한 게 아니라 raw score가 갖고 있던 스케일/오프셋 의존성을 제거해 학습이 실제 판별정보에 도달하게 한 것.</a:t>
-            </a:r>
-          </a:p>
-          <a:p>
-            <a:r>
-              <a:t>[참고] 위 mlp-&gt;frozen_lr 비교(+38-&gt;+74 internal, +10-&gt;+15 external)는 클리니컬 브랜치 구조 자체를 바꾼 별도 ablation 결과이며, predict_proba 기반 raw score와 구 표준화 fix 기준이라 이번 decision_function 전환(2026-07-22) 이전 수치임 -- 재실행 전까지 참고용으로만 볼 것 (관련: 슬라이드15 Clinical Branch 비교표도 동일 사유로 재실행 필요).</a:t>
+              <a:rPr dirty="0"/>
+              <a:t>code/stage2_model.py </a:t>
+            </a:r>
+            <a:r>
+              <a:rPr dirty="0" err="1"/>
+              <a:t>LateFusionNet</a:t>
+            </a:r>
+            <a:r>
+              <a:rPr dirty="0"/>
+              <a:t>, CLIN_BRANCH_VARIANT="</a:t>
+            </a:r>
+            <a:r>
+              <a:rPr dirty="0" err="1"/>
+              <a:t>frozen_lr</a:t>
+            </a:r>
+            <a:r>
+              <a:rPr dirty="0"/>
+              <a:t>"(</a:t>
+            </a:r>
+            <a:r>
+              <a:rPr dirty="0" err="1"/>
+              <a:t>기본값</a:t>
+            </a:r>
+            <a:r>
+              <a:rPr dirty="0"/>
+              <a:t>, L64-72/136-164)로 </a:t>
+            </a:r>
+            <a:r>
+              <a:rPr dirty="0" err="1"/>
+              <a:t>시각화</a:t>
+            </a:r>
+            <a:r>
+              <a:rPr dirty="0"/>
+              <a:t>.</a:t>
+            </a:r>
+          </a:p>
+          <a:p>
+            <a:r>
+              <a:t>근거</a:t>
+            </a:r>
+            <a:r>
+              <a:rPr dirty="0"/>
+              <a:t>: code/stage2_model_clinical_branch_ablation.py -- </a:t>
+            </a:r>
+            <a:r>
+              <a:rPr dirty="0" err="1"/>
+              <a:t>동일</a:t>
+            </a:r>
+            <a:r>
+              <a:rPr dirty="0"/>
+              <a:t> OOF/frozen-external </a:t>
+            </a:r>
+            <a:r>
+              <a:rPr dirty="0" err="1"/>
+              <a:t>프로토콜에서</a:t>
+            </a:r>
+            <a:r>
+              <a:rPr dirty="0"/>
+              <a:t> </a:t>
+            </a:r>
+            <a:r>
+              <a:rPr dirty="0" err="1"/>
+              <a:t>mlp</a:t>
+            </a:r>
+            <a:r>
+              <a:rPr dirty="0"/>
+              <a:t>/linear(Linear(4,16),</a:t>
+            </a:r>
+            <a:r>
+              <a:rPr dirty="0" err="1"/>
+              <a:t>활성화없음</a:t>
+            </a:r>
+            <a:r>
+              <a:rPr dirty="0"/>
+              <a:t>)/</a:t>
+            </a:r>
+            <a:r>
+              <a:rPr dirty="0" err="1"/>
+              <a:t>frozen_lr</a:t>
+            </a:r>
+            <a:r>
+              <a:rPr dirty="0"/>
+              <a:t> 세 </a:t>
+            </a:r>
+            <a:r>
+              <a:rPr dirty="0" err="1"/>
+              <a:t>변형을</a:t>
+            </a:r>
+            <a:r>
+              <a:rPr dirty="0"/>
+              <a:t> </a:t>
+            </a:r>
+            <a:r>
+              <a:rPr dirty="0" err="1"/>
+              <a:t>비교</a:t>
+            </a:r>
+            <a:r>
+              <a:rPr dirty="0"/>
+              <a:t>. Net NRI: </a:t>
+            </a:r>
+            <a:r>
+              <a:rPr dirty="0" err="1"/>
+              <a:t>mlp</a:t>
+            </a:r>
+            <a:r>
+              <a:rPr dirty="0"/>
+              <a:t> internal+38/external+10, linear +29/+23, </a:t>
+            </a:r>
+            <a:r>
+              <a:rPr dirty="0" err="1"/>
+              <a:t>frozen_lr</a:t>
+            </a:r>
+            <a:r>
+              <a:rPr dirty="0"/>
+              <a:t> +74/+15 -- </a:t>
+            </a:r>
+            <a:r>
+              <a:rPr dirty="0" err="1"/>
+              <a:t>frozen_lr이</a:t>
+            </a:r>
+            <a:r>
+              <a:rPr dirty="0"/>
+              <a:t> </a:t>
+            </a:r>
+            <a:r>
+              <a:rPr dirty="0" err="1"/>
+              <a:t>internal에서</a:t>
+            </a:r>
+            <a:r>
+              <a:rPr dirty="0"/>
+              <a:t> </a:t>
+            </a:r>
+            <a:r>
+              <a:rPr dirty="0" err="1"/>
+              <a:t>거의</a:t>
+            </a:r>
+            <a:r>
+              <a:rPr dirty="0"/>
+              <a:t> 2배, </a:t>
+            </a:r>
+            <a:r>
+              <a:rPr dirty="0" err="1"/>
+              <a:t>external에서도</a:t>
+            </a:r>
+            <a:r>
+              <a:rPr dirty="0"/>
+              <a:t> </a:t>
+            </a:r>
+            <a:r>
+              <a:rPr dirty="0" err="1"/>
+              <a:t>mlp보다</a:t>
+            </a:r>
+            <a:r>
+              <a:rPr dirty="0"/>
+              <a:t> </a:t>
+            </a:r>
+            <a:r>
+              <a:rPr dirty="0" err="1"/>
+              <a:t>우세</a:t>
+            </a:r>
+            <a:r>
+              <a:rPr dirty="0"/>
+              <a:t>. AEC branch(Conv1d 1-&gt;8,k7 / Conv1d 8-&gt;16,k5 / AdaptiveAvgPool1d(1) / Linear 16-&gt;16, </a:t>
+            </a:r>
+            <a:r>
+              <a:rPr dirty="0" err="1"/>
+              <a:t>전부</a:t>
+            </a:r>
+            <a:r>
+              <a:rPr dirty="0"/>
+              <a:t> code/stage2_model.py L109-130)는 </a:t>
+            </a:r>
+            <a:r>
+              <a:rPr dirty="0" err="1"/>
+              <a:t>그대로</a:t>
+            </a:r>
+            <a:r>
+              <a:rPr dirty="0"/>
+              <a:t> </a:t>
+            </a:r>
+            <a:r>
+              <a:rPr dirty="0" err="1"/>
+              <a:t>유지</a:t>
+            </a:r>
+            <a:r>
+              <a:rPr dirty="0"/>
+              <a:t> -- 4-input </a:t>
+            </a:r>
+            <a:r>
+              <a:rPr dirty="0" err="1"/>
+              <a:t>clinical만</a:t>
+            </a:r>
+            <a:r>
+              <a:rPr dirty="0"/>
+              <a:t> MLP </a:t>
+            </a:r>
+            <a:r>
+              <a:rPr dirty="0" err="1"/>
+              <a:t>용량이</a:t>
+            </a:r>
+            <a:r>
+              <a:rPr dirty="0"/>
+              <a:t> </a:t>
+            </a:r>
+            <a:r>
+              <a:rPr dirty="0" err="1"/>
+              <a:t>과했다는</a:t>
+            </a:r>
+            <a:r>
+              <a:rPr dirty="0"/>
+              <a:t> 뜻(TP=117/131 </a:t>
+            </a:r>
+            <a:r>
+              <a:rPr dirty="0" err="1"/>
+              <a:t>표본에</a:t>
+            </a:r>
+            <a:r>
+              <a:rPr dirty="0"/>
+              <a:t> 688 </a:t>
+            </a:r>
+            <a:r>
+              <a:rPr dirty="0" err="1"/>
+              <a:t>파라미터를</a:t>
+            </a:r>
+            <a:r>
+              <a:rPr dirty="0"/>
+              <a:t> </a:t>
+            </a:r>
+            <a:r>
+              <a:rPr dirty="0" err="1"/>
+              <a:t>같이</a:t>
+            </a:r>
+            <a:r>
+              <a:rPr dirty="0"/>
+              <a:t> </a:t>
+            </a:r>
+            <a:r>
+              <a:rPr dirty="0" err="1"/>
+              <a:t>학습시키면서</a:t>
+            </a:r>
+            <a:r>
+              <a:rPr dirty="0"/>
+              <a:t> AEC </a:t>
+            </a:r>
+            <a:r>
+              <a:rPr dirty="0" err="1"/>
+              <a:t>신호를</a:t>
+            </a:r>
+            <a:r>
+              <a:rPr dirty="0"/>
+              <a:t> </a:t>
+            </a:r>
+            <a:r>
+              <a:rPr dirty="0" err="1"/>
+              <a:t>오히려</a:t>
+            </a:r>
+            <a:r>
+              <a:rPr dirty="0"/>
+              <a:t> </a:t>
+            </a:r>
+            <a:r>
+              <a:rPr dirty="0" err="1"/>
+              <a:t>희석했을</a:t>
+            </a:r>
+            <a:r>
+              <a:rPr dirty="0"/>
+              <a:t> </a:t>
+            </a:r>
+            <a:r>
+              <a:rPr dirty="0" err="1"/>
+              <a:t>가능성</a:t>
+            </a:r>
+            <a:r>
+              <a:rPr dirty="0"/>
+              <a:t>).</a:t>
+            </a:r>
+          </a:p>
+          <a:p>
+            <a:r>
+              <a:rPr dirty="0" err="1"/>
+              <a:t>fusion_head</a:t>
+            </a:r>
+            <a:r>
+              <a:rPr dirty="0"/>
+              <a:t> </a:t>
+            </a:r>
+            <a:r>
+              <a:rPr dirty="0" err="1"/>
+              <a:t>입력</a:t>
+            </a:r>
+            <a:r>
+              <a:rPr dirty="0"/>
+              <a:t> </a:t>
+            </a:r>
+            <a:r>
+              <a:rPr dirty="0" err="1"/>
+              <a:t>차원도</a:t>
+            </a:r>
+            <a:r>
+              <a:rPr dirty="0"/>
+              <a:t> 32(16+16)-&gt;17(1+16)로 </a:t>
+            </a:r>
+            <a:r>
+              <a:rPr dirty="0" err="1"/>
+              <a:t>줄어듦</a:t>
+            </a:r>
+            <a:r>
+              <a:rPr dirty="0"/>
+              <a:t> (</a:t>
+            </a:r>
+            <a:r>
+              <a:rPr dirty="0" err="1"/>
+              <a:t>LateFusionNet</a:t>
+            </a:r>
+            <a:r>
+              <a:rPr dirty="0"/>
+              <a:t>.__</a:t>
+            </a:r>
+            <a:r>
+              <a:rPr dirty="0" err="1"/>
+              <a:t>init</a:t>
+            </a:r>
+            <a:r>
+              <a:rPr dirty="0"/>
+              <a:t>__, </a:t>
+            </a:r>
+            <a:r>
+              <a:rPr dirty="0" err="1"/>
+              <a:t>embed_dim+clin_embed_dim</a:t>
+            </a:r>
+            <a:r>
+              <a:rPr dirty="0"/>
+              <a:t>).</a:t>
             </a:r>
           </a:p>
         </p:txBody>
       </p:sp>
       <p:sp>
         <p:nvSpPr>
-          <p:cNvPr id="4" name="Slide Number Placeholder 3">
-            <a:extLst>
-              <a:ext uri="{FF2B5EF4-FFF2-40B4-BE49-F238E27FC236}">
-                <a16:creationId xmlns:a16="http://schemas.microsoft.com/office/drawing/2014/main" id="{5A06CFD1-2C5C-893A-DFA3-8C07CCEC77D4}"/>
-              </a:ext>
-            </a:extLst>
-          </p:cNvPr>
+          <p:cNvPr id="4" name="Slide Number Placeholder 3"/>
           <p:cNvSpPr>
             <a:spLocks noGrp="1"/>
           </p:cNvSpPr>
@@ -7367,11 +7396,6 @@
         <p:spPr/>
       </p:sp>
     </p:spTree>
-    <p:extLst>
-      <p:ext uri="{BB962C8B-B14F-4D97-AF65-F5344CB8AC3E}">
-        <p14:creationId xmlns:p14="http://schemas.microsoft.com/office/powerpoint/2010/main" val="2301682998"/>
-      </p:ext>
-    </p:extLst>
   </p:cSld>
   <p:clrMapOvr>
     <a:masterClrMapping/>
@@ -7384,13 +7408,7 @@
   <p:cSld>
     <p:spTree>
       <p:nvGrpSpPr>
-        <p:cNvPr id="1" name="">
-          <a:extLst>
-            <a:ext uri="{FF2B5EF4-FFF2-40B4-BE49-F238E27FC236}">
-              <a16:creationId xmlns:a16="http://schemas.microsoft.com/office/drawing/2014/main" id="{43184DDD-DB88-1198-AE20-99EE558424C0}"/>
-            </a:ext>
-          </a:extLst>
-        </p:cNvPr>
+        <p:cNvPr id="1" name=""/>
         <p:cNvGrpSpPr/>
         <p:nvPr/>
       </p:nvGrpSpPr>
@@ -7404,13 +7422,7 @@
       </p:grpSpPr>
       <p:sp>
         <p:nvSpPr>
-          <p:cNvPr id="2" name="Slide Image Placeholder 1">
-            <a:extLst>
-              <a:ext uri="{FF2B5EF4-FFF2-40B4-BE49-F238E27FC236}">
-                <a16:creationId xmlns:a16="http://schemas.microsoft.com/office/drawing/2014/main" id="{F7E975FB-D658-DC16-816D-FF3FDA948C88}"/>
-              </a:ext>
-            </a:extLst>
-          </p:cNvPr>
+          <p:cNvPr id="2" name="Slide Image Placeholder 1"/>
           <p:cNvSpPr>
             <a:spLocks noGrp="1" noRot="1" noChangeAspect="1"/>
           </p:cNvSpPr>
@@ -7422,13 +7434,7 @@
       </p:sp>
       <p:sp>
         <p:nvSpPr>
-          <p:cNvPr id="3" name="Notes Placeholder 2">
-            <a:extLst>
-              <a:ext uri="{FF2B5EF4-FFF2-40B4-BE49-F238E27FC236}">
-                <a16:creationId xmlns:a16="http://schemas.microsoft.com/office/drawing/2014/main" id="{DD142530-BB5E-9577-34FA-97B57F1BE2D6}"/>
-              </a:ext>
-            </a:extLst>
-          </p:cNvPr>
+          <p:cNvPr id="3" name="Notes Placeholder 2"/>
           <p:cNvSpPr>
             <a:spLocks noGrp="1"/>
           </p:cNvSpPr>
@@ -7442,28 +7448,29 @@
           <a:lstStyle/>
           <a:p>
             <a:r>
-              <a:t>[초안 -- 슬라이드 본문이 아직 비어 있어 앞선 슬라이드(6번, confound 제거 후보 4가지) 논리를 이어 구두 설명용으로 작성함. 슬라이드 본문 채울 때 참고]</a:t>
-            </a:r>
-          </a:p>
-          <a:p>
-            <a:endParaRPr/>
-          </a:p>
-          <a:p>
-            <a:r>
-              <a:t>우선순위: ④ joint fusion은 이미 stage2_model.py에 적용 중이므로, 나머지 confound 제거 후보 중 ① cross-validated confound regression(Snoek 2019, fold별 재적합)을 가장 먼저 재도입 -- 기존 잔차화가 internal 전체에 1회만 적합해 생긴 편향을 바로잡는 가장 직접적인 수정이기 때문. 그다음 external 잔여confound가 여전히 남을 경우 ② counterfactual adjustment(Chaibub Neto 2021)로 dataset shift에 더 안정적인 대안을 시도. ③ covariate-adjusted subspace projection(Li 2017)은 파이프라인 전체를 재설계해야 해서 우선순위가 가장 낮음.</a:t>
+              <a:t>산출: code/stage2_model.py fit_score_standardizer() (2026-07-22 decision_function 전환 후 재적합). internal Stage-2 코호트(screen-positive, TP=117/FP=447, n=564)의 raw score(Stage-1 LR decision_function, log-odds)에서 mean/std를 1회 fit하고, external에는 이 값을 그대로(frozen) 적용 -- raw clinical feature 표준화(fit_clinical_standardizer)와 동일한 패턴.</a:t>
+            </a:r>
+          </a:p>
+          <a:p>
+            <a:r>
+              <a:t>문제: raw score는 predict_proba가 아니라 decision_function(log-odds)이라 부호 자체는 문제가 아님 -- Stage-2 코호트(screen-positive, score&gt;=th=-2.7083) 중 94%(530/564)가 여전히 음수. 실제 문제는 척도: mean=-1.5704, std=0.9154로 원점에서 크게 벗어나 있고(min=-2.7083, 25%=-2.2636, 중앙값=-1.8144, 75%=-1.0498, max=3.0610), 표준화 없이 그대로 fusion에 넣으면 학습이 이 오프셋에 끌려간다. A/B로 확인: raw 그대로 학습 시 internal Net NRI=+49, external Net NRI=0(재분류 전무, stage-1-only와 완전히 동일) -- 표준화 없이는 external에서 전혀 작동하지 않음.</a:t>
+            </a:r>
+          </a:p>
+          <a:p>
+            <a:r>
+              <a:t>해결: z_clin = (score - (-1.5704)) / 0.9154. 결과 분포는 564명 중 41%가 양수/59%가 음수로 재배치. 판별정보는 보존: FP 평균 환자 z=-0.195, TP 평균 환자 z=+0.746 -- TP가 더 높다는 순서는 그대로.</a:t>
+            </a:r>
+          </a:p>
+          <a:p>
+            <a:r>
+              <a:t>효과: 표준화 전(raw log-odds 그대로) internal Net NRI=+49/external Net NRI=0 -&gt; 표준화 후 internal +71/external +34. external은 0에서 +34로 처음 작동하기 시작한 것 -- raw score가 갖던 스케일/오프셋 의존성이 제거되며 external 전이(일반화)가 비로소 가능해진 것으로 해석. 상세 A/B 비교 스크립트: 대화 중 임시 비교 실행 참고(같은 코드베이스, 표준화만 on/off).</a:t>
             </a:r>
           </a:p>
         </p:txBody>
       </p:sp>
       <p:sp>
         <p:nvSpPr>
-          <p:cNvPr id="4" name="Slide Number Placeholder 3">
-            <a:extLst>
-              <a:ext uri="{FF2B5EF4-FFF2-40B4-BE49-F238E27FC236}">
-                <a16:creationId xmlns:a16="http://schemas.microsoft.com/office/drawing/2014/main" id="{E283E6E2-A4F3-0543-FDD9-B032A1CF5983}"/>
-              </a:ext>
-            </a:extLst>
-          </p:cNvPr>
+          <p:cNvPr id="4" name="Slide Number Placeholder 3"/>
           <p:cNvSpPr>
             <a:spLocks noGrp="1"/>
           </p:cNvSpPr>
@@ -7474,11 +7481,6 @@
         <p:spPr/>
       </p:sp>
     </p:spTree>
-    <p:extLst>
-      <p:ext uri="{BB962C8B-B14F-4D97-AF65-F5344CB8AC3E}">
-        <p14:creationId xmlns:p14="http://schemas.microsoft.com/office/powerpoint/2010/main" val="150755397"/>
-      </p:ext>
-    </p:extLst>
   </p:cSld>
   <p:clrMapOvr>
     <a:masterClrMapping/>
@@ -11092,6 +11094,361 @@
   <p:cSld>
     <p:spTree>
       <p:nvGrpSpPr>
+        <p:cNvPr id="1" name="">
+          <a:extLst>
+            <a:ext uri="{FF2B5EF4-FFF2-40B4-BE49-F238E27FC236}">
+              <a16:creationId xmlns:a16="http://schemas.microsoft.com/office/drawing/2014/main" id="{5F6FE867-999D-E74B-26DA-5E08AC9CECD2}"/>
+            </a:ext>
+          </a:extLst>
+        </p:cNvPr>
+        <p:cNvGrpSpPr/>
+        <p:nvPr/>
+      </p:nvGrpSpPr>
+      <p:grpSpPr>
+        <a:xfrm>
+          <a:off x="0" y="0"/>
+          <a:ext cx="0" cy="0"/>
+          <a:chOff x="0" y="0"/>
+          <a:chExt cx="0" cy="0"/>
+        </a:xfrm>
+      </p:grpSpPr>
+      <p:sp>
+        <p:nvSpPr>
+          <p:cNvPr id="2" name="Title 1">
+            <a:extLst>
+              <a:ext uri="{FF2B5EF4-FFF2-40B4-BE49-F238E27FC236}">
+                <a16:creationId xmlns:a16="http://schemas.microsoft.com/office/drawing/2014/main" id="{297D8841-7808-5AD1-44DF-79F7608785A4}"/>
+              </a:ext>
+            </a:extLst>
+          </p:cNvPr>
+          <p:cNvSpPr>
+            <a:spLocks noGrp="1"/>
+          </p:cNvSpPr>
+          <p:nvPr>
+            <p:ph type="title"/>
+          </p:nvPr>
+        </p:nvSpPr>
+        <p:spPr/>
+        <p:txBody>
+          <a:bodyPr/>
+          <a:lstStyle/>
+          <a:p>
+            <a:r>
+              <a:t>Detailed progress</a:t>
+            </a:r>
+          </a:p>
+        </p:txBody>
+      </p:sp>
+      <p:sp>
+        <p:nvSpPr>
+          <p:cNvPr id="3" name="Content Placeholder 2">
+            <a:extLst>
+              <a:ext uri="{FF2B5EF4-FFF2-40B4-BE49-F238E27FC236}">
+                <a16:creationId xmlns:a16="http://schemas.microsoft.com/office/drawing/2014/main" id="{A1BF983B-FA06-6CA4-C7D2-78C1F756A120}"/>
+              </a:ext>
+            </a:extLst>
+          </p:cNvPr>
+          <p:cNvSpPr>
+            <a:spLocks noGrp="1"/>
+          </p:cNvSpPr>
+          <p:nvPr>
+            <p:ph idx="1"/>
+          </p:nvPr>
+        </p:nvSpPr>
+        <p:spPr/>
+        <p:txBody>
+          <a:bodyPr/>
+          <a:lstStyle/>
+          <a:p>
+            <a:r>
+              <a:rPr sz="2200" b="1" dirty="0" err="1"/>
+              <a:t>개별</a:t>
+            </a:r>
+            <a:r>
+              <a:rPr sz="2200" b="1" dirty="0"/>
+              <a:t> </a:t>
+            </a:r>
+            <a:r>
+              <a:rPr sz="2200" b="1" dirty="0" err="1"/>
+              <a:t>feature는</a:t>
+            </a:r>
+            <a:r>
+              <a:rPr sz="2200" b="1" dirty="0"/>
+              <a:t> </a:t>
+            </a:r>
+            <a:r>
+              <a:rPr sz="2200" b="1" dirty="0" err="1"/>
+              <a:t>비유의</a:t>
+            </a:r>
+            <a:r>
+              <a:rPr sz="2200" b="1" dirty="0"/>
+              <a:t> → Stage-1 LR </a:t>
+            </a:r>
+            <a:r>
+              <a:rPr sz="2200" b="1" dirty="0" err="1"/>
+              <a:t>재사용</a:t>
+            </a:r>
+            <a:r>
+              <a:rPr sz="2200" b="1" dirty="0"/>
+              <a:t> </a:t>
+            </a:r>
+            <a:r>
+              <a:rPr sz="2200" b="1" dirty="0" err="1"/>
+              <a:t>fusion은</a:t>
+            </a:r>
+            <a:r>
+              <a:rPr sz="2200" b="1" dirty="0"/>
+              <a:t> </a:t>
+            </a:r>
+            <a:r>
+              <a:rPr sz="2200" b="1" dirty="0" err="1"/>
+              <a:t>유의한</a:t>
+            </a:r>
+            <a:r>
+              <a:rPr sz="2200" b="1" dirty="0"/>
+              <a:t> FP→TN</a:t>
+            </a:r>
+          </a:p>
+          <a:p>
+            <a:pPr lvl="1"/>
+            <a:r>
+              <a:rPr sz="1800" b="0" dirty="0"/>
+              <a:t>Net NRI: internal +71 / external +34</a:t>
+            </a:r>
+          </a:p>
+          <a:p>
+            <a:pPr lvl="1"/>
+            <a:r>
+              <a:rPr sz="1800" b="0" dirty="0"/>
+              <a:t>Stage-1 score </a:t>
+            </a:r>
+            <a:r>
+              <a:rPr sz="1800" b="0" dirty="0" err="1"/>
+              <a:t>표준화</a:t>
+            </a:r>
+            <a:r>
+              <a:rPr sz="1800" b="0" dirty="0"/>
+              <a:t> </a:t>
+            </a:r>
+            <a:r>
+              <a:rPr sz="1800" b="0" dirty="0" err="1"/>
+              <a:t>반영</a:t>
+            </a:r>
+            <a:r>
+              <a:rPr sz="1800" b="0" dirty="0"/>
+              <a:t> (raw log-odds </a:t>
+            </a:r>
+            <a:r>
+              <a:rPr sz="1800" b="0" dirty="0" err="1"/>
+              <a:t>그대로</a:t>
+            </a:r>
+            <a:r>
+              <a:rPr sz="1800" b="0" dirty="0"/>
+              <a:t> </a:t>
+            </a:r>
+            <a:r>
+              <a:rPr sz="1800" b="0" dirty="0" err="1"/>
+              <a:t>사용</a:t>
+            </a:r>
+            <a:r>
+              <a:rPr sz="1800" b="0" dirty="0"/>
+              <a:t> 시 external Net NRI 0 -&gt; </a:t>
+            </a:r>
+            <a:r>
+              <a:rPr sz="1800" b="0" dirty="0" err="1"/>
+              <a:t>표준화</a:t>
+            </a:r>
+            <a:r>
+              <a:rPr sz="1800" b="0" dirty="0"/>
+              <a:t> 후 +34)</a:t>
+            </a:r>
+          </a:p>
+          <a:p>
+            <a:pPr lvl="1"/>
+            <a:r>
+              <a:rPr lang="en-US" sz="1800" b="0" dirty="0"/>
+              <a:t>Spec</a:t>
+            </a:r>
+            <a:r>
+              <a:rPr sz="1800" b="0" dirty="0"/>
+              <a:t> </a:t>
+            </a:r>
+            <a:r>
+              <a:rPr sz="1800" b="0" dirty="0" err="1"/>
+              <a:t>개선</a:t>
+            </a:r>
+            <a:r>
+              <a:rPr sz="1800" b="0" dirty="0"/>
+              <a:t> McNemar p&lt;0.001 (양 </a:t>
+            </a:r>
+            <a:r>
+              <a:rPr sz="1800" b="0" dirty="0" err="1"/>
+              <a:t>코호트</a:t>
+            </a:r>
+            <a:r>
+              <a:rPr sz="1800" b="0" dirty="0"/>
+              <a:t>)</a:t>
+            </a:r>
+            <a:r>
+              <a:rPr lang="en-US" sz="1800" b="0" dirty="0"/>
+              <a:t>, Sens</a:t>
+            </a:r>
+            <a:r>
+              <a:rPr sz="1800" b="0" dirty="0"/>
+              <a:t> </a:t>
+            </a:r>
+            <a:r>
+              <a:rPr sz="1800" b="0" dirty="0" err="1"/>
+              <a:t>손실</a:t>
+            </a:r>
+            <a:r>
+              <a:rPr sz="1800" b="0" dirty="0"/>
+              <a:t> NI margin </a:t>
+            </a:r>
+            <a:r>
+              <a:rPr sz="1800" b="0" dirty="0" err="1"/>
+              <a:t>이내</a:t>
+            </a:r>
+            <a:r>
+              <a:rPr sz="1800" b="0" dirty="0"/>
+              <a:t> → PASS</a:t>
+            </a:r>
+          </a:p>
+        </p:txBody>
+      </p:sp>
+      <p:pic>
+        <p:nvPicPr>
+          <p:cNvPr id="4" name="Picture 3" descr="clinical_vs_aec_assisted_table.png"/>
+          <p:cNvPicPr>
+            <a:picLocks noChangeAspect="1"/>
+          </p:cNvPicPr>
+          <p:nvPr/>
+        </p:nvPicPr>
+        <p:blipFill>
+          <a:blip r:embed="rId3"/>
+          <a:srcRect t="14257"/>
+          <a:stretch>
+            <a:fillRect/>
+          </a:stretch>
+        </p:blipFill>
+        <p:spPr>
+          <a:xfrm>
+            <a:off x="1531176" y="3232298"/>
+            <a:ext cx="9129648" cy="2981669"/>
+          </a:xfrm>
+          <a:prstGeom prst="rect">
+            <a:avLst/>
+          </a:prstGeom>
+        </p:spPr>
+      </p:pic>
+    </p:spTree>
+    <p:extLst>
+      <p:ext uri="{BB962C8B-B14F-4D97-AF65-F5344CB8AC3E}">
+        <p14:creationId xmlns:p14="http://schemas.microsoft.com/office/powerpoint/2010/main" val="2699504877"/>
+      </p:ext>
+    </p:extLst>
+  </p:cSld>
+  <p:clrMapOvr>
+    <a:masterClrMapping/>
+  </p:clrMapOvr>
+</p:sld>
+</file>
+
+<file path=ppt/slides/slide11.xml><?xml version="1.0" encoding="utf-8"?>
+<p:sld xmlns:a="http://schemas.openxmlformats.org/drawingml/2006/main" xmlns:r="http://schemas.openxmlformats.org/officeDocument/2006/relationships" xmlns:p="http://schemas.openxmlformats.org/presentationml/2006/main">
+  <p:cSld>
+    <p:spTree>
+      <p:nvGrpSpPr>
+        <p:cNvPr id="1" name="">
+          <a:extLst>
+            <a:ext uri="{FF2B5EF4-FFF2-40B4-BE49-F238E27FC236}">
+              <a16:creationId xmlns:a16="http://schemas.microsoft.com/office/drawing/2014/main" id="{32EBB4E5-8F3F-87A4-5FDB-5025F5753BAC}"/>
+            </a:ext>
+          </a:extLst>
+        </p:cNvPr>
+        <p:cNvGrpSpPr/>
+        <p:nvPr/>
+      </p:nvGrpSpPr>
+      <p:grpSpPr>
+        <a:xfrm>
+          <a:off x="0" y="0"/>
+          <a:ext cx="0" cy="0"/>
+          <a:chOff x="0" y="0"/>
+          <a:chExt cx="0" cy="0"/>
+        </a:xfrm>
+      </p:grpSpPr>
+      <p:sp>
+        <p:nvSpPr>
+          <p:cNvPr id="2" name="Title 1">
+            <a:extLst>
+              <a:ext uri="{FF2B5EF4-FFF2-40B4-BE49-F238E27FC236}">
+                <a16:creationId xmlns:a16="http://schemas.microsoft.com/office/drawing/2014/main" id="{0A9A0E3D-B0CF-EE1C-1EAF-A2B3460F3F32}"/>
+              </a:ext>
+            </a:extLst>
+          </p:cNvPr>
+          <p:cNvSpPr>
+            <a:spLocks noGrp="1"/>
+          </p:cNvSpPr>
+          <p:nvPr>
+            <p:ph type="title"/>
+          </p:nvPr>
+        </p:nvSpPr>
+        <p:spPr/>
+        <p:txBody>
+          <a:bodyPr/>
+          <a:lstStyle/>
+          <a:p>
+            <a:r>
+              <a:rPr lang="en-US" dirty="0"/>
+              <a:t>Next Plans</a:t>
+            </a:r>
+            <a:endParaRPr dirty="0"/>
+          </a:p>
+        </p:txBody>
+      </p:sp>
+      <p:sp>
+        <p:nvSpPr>
+          <p:cNvPr id="4" name="내용 개체 틀 3">
+            <a:extLst>
+              <a:ext uri="{FF2B5EF4-FFF2-40B4-BE49-F238E27FC236}">
+                <a16:creationId xmlns:a16="http://schemas.microsoft.com/office/drawing/2014/main" id="{EFCFAC3E-E19A-9D86-DE71-14B244B9BE42}"/>
+              </a:ext>
+            </a:extLst>
+          </p:cNvPr>
+          <p:cNvSpPr>
+            <a:spLocks noGrp="1"/>
+          </p:cNvSpPr>
+          <p:nvPr>
+            <p:ph idx="1"/>
+          </p:nvPr>
+        </p:nvSpPr>
+        <p:spPr/>
+        <p:txBody>
+          <a:bodyPr/>
+          <a:lstStyle/>
+          <a:p>
+            <a:endParaRPr lang="ko-KR" altLang="en-US"/>
+          </a:p>
+        </p:txBody>
+      </p:sp>
+    </p:spTree>
+    <p:extLst>
+      <p:ext uri="{BB962C8B-B14F-4D97-AF65-F5344CB8AC3E}">
+        <p14:creationId xmlns:p14="http://schemas.microsoft.com/office/powerpoint/2010/main" val="1324803453"/>
+      </p:ext>
+    </p:extLst>
+  </p:cSld>
+  <p:clrMapOvr>
+    <a:masterClrMapping/>
+  </p:clrMapOvr>
+</p:sld>
+</file>
+
+<file path=ppt/slides/slide12.xml><?xml version="1.0" encoding="utf-8"?>
+<p:sld xmlns:a="http://schemas.openxmlformats.org/drawingml/2006/main" xmlns:r="http://schemas.openxmlformats.org/officeDocument/2006/relationships" xmlns:p="http://schemas.openxmlformats.org/presentationml/2006/main">
+  <p:cSld>
+    <p:spTree>
+      <p:nvGrpSpPr>
         <p:cNvPr id="1" name="Shape 1175"/>
         <p:cNvGrpSpPr/>
         <p:nvPr/>
@@ -11145,7 +11502,7 @@
 </p:sld>
 </file>
 
-<file path=ppt/slides/slide11.xml><?xml version="1.0" encoding="utf-8"?>
+<file path=ppt/slides/slide13.xml><?xml version="1.0" encoding="utf-8"?>
 <p:sld xmlns:a="http://schemas.openxmlformats.org/drawingml/2006/main" xmlns:r="http://schemas.openxmlformats.org/officeDocument/2006/relationships" xmlns:p="http://schemas.openxmlformats.org/presentationml/2006/main">
   <p:cSld>
     <p:spTree>
@@ -11663,7 +12020,7 @@
 </p:sld>
 </file>
 
-<file path=ppt/slides/slide12.xml><?xml version="1.0" encoding="utf-8"?>
+<file path=ppt/slides/slide14.xml><?xml version="1.0" encoding="utf-8"?>
 <p:sld xmlns:a="http://schemas.openxmlformats.org/drawingml/2006/main" xmlns:r="http://schemas.openxmlformats.org/officeDocument/2006/relationships" xmlns:p="http://schemas.openxmlformats.org/presentationml/2006/main">
   <p:cSld>
     <p:spTree>
@@ -12435,7 +12792,7 @@
 </p:sld>
 </file>
 
-<file path=ppt/slides/slide13.xml><?xml version="1.0" encoding="utf-8"?>
+<file path=ppt/slides/slide15.xml><?xml version="1.0" encoding="utf-8"?>
 <p:sld xmlns:a="http://schemas.openxmlformats.org/drawingml/2006/main" xmlns:r="http://schemas.openxmlformats.org/officeDocument/2006/relationships" xmlns:p="http://schemas.openxmlformats.org/presentationml/2006/main">
   <p:cSld>
     <p:spTree>
@@ -12524,7 +12881,7 @@
 </p:sld>
 </file>
 
-<file path=ppt/slides/slide14.xml><?xml version="1.0" encoding="utf-8"?>
+<file path=ppt/slides/slide16.xml><?xml version="1.0" encoding="utf-8"?>
 <p:sld xmlns:a="http://schemas.openxmlformats.org/drawingml/2006/main" xmlns:r="http://schemas.openxmlformats.org/officeDocument/2006/relationships" xmlns:p="http://schemas.openxmlformats.org/presentationml/2006/main">
   <p:cSld>
     <p:spTree>
@@ -12613,7 +12970,7 @@
 </p:sld>
 </file>
 
-<file path=ppt/slides/slide15.xml><?xml version="1.0" encoding="utf-8"?>
+<file path=ppt/slides/slide17.xml><?xml version="1.0" encoding="utf-8"?>
 <p:sld xmlns:a="http://schemas.openxmlformats.org/drawingml/2006/main" xmlns:r="http://schemas.openxmlformats.org/officeDocument/2006/relationships" xmlns:p="http://schemas.openxmlformats.org/presentationml/2006/main">
   <p:cSld>
     <p:spTree>
@@ -13075,7 +13432,7 @@
 </p:sld>
 </file>
 
-<file path=ppt/slides/slide16.xml><?xml version="1.0" encoding="utf-8"?>
+<file path=ppt/slides/slide18.xml><?xml version="1.0" encoding="utf-8"?>
 <p:sld xmlns:a="http://schemas.openxmlformats.org/drawingml/2006/main" xmlns:r="http://schemas.openxmlformats.org/officeDocument/2006/relationships" xmlns:p="http://schemas.openxmlformats.org/presentationml/2006/main">
   <p:cSld>
     <p:spTree>
@@ -13665,8 +14022,8 @@
 </p:sld>
 </file>
 
-<file path=ppt/slides/slide17.xml><?xml version="1.0" encoding="utf-8"?>
-<p:sld xmlns:a="http://schemas.openxmlformats.org/drawingml/2006/main" xmlns:p="http://schemas.openxmlformats.org/presentationml/2006/main" xmlns:r="http://schemas.openxmlformats.org/officeDocument/2006/relationships">
+<file path=ppt/slides/slide2.xml><?xml version="1.0" encoding="utf-8"?>
+<p:sld xmlns:a="http://schemas.openxmlformats.org/drawingml/2006/main" xmlns:r="http://schemas.openxmlformats.org/officeDocument/2006/relationships" xmlns:p="http://schemas.openxmlformats.org/presentationml/2006/main">
   <p:cSld>
     <p:spTree>
       <p:nvGrpSpPr>
@@ -13674,7 +14031,14 @@
         <p:cNvGrpSpPr/>
         <p:nvPr/>
       </p:nvGrpSpPr>
-      <p:grpSpPr/>
+      <p:grpSpPr>
+        <a:xfrm>
+          <a:off x="0" y="0"/>
+          <a:ext cx="0" cy="0"/>
+          <a:chOff x="0" y="0"/>
+          <a:chExt cx="0" cy="0"/>
+        </a:xfrm>
+      </p:grpSpPr>
       <p:sp>
         <p:nvSpPr>
           <p:cNvPr id="2" name="Title 1"/>
@@ -13724,21 +14088,39 @@
           <p:cNvGraphicFramePr>
             <a:graphicFrameLocks noGrp="1"/>
           </p:cNvGraphicFramePr>
-          <p:nvPr/>
+          <p:nvPr>
+            <p:extLst>
+              <p:ext uri="{D42A27DB-BD31-4B8C-83A1-F6EECF244321}">
+                <p14:modId xmlns:p14="http://schemas.microsoft.com/office/powerpoint/2010/main" val="3132498266"/>
+              </p:ext>
+            </p:extLst>
+          </p:nvPr>
         </p:nvGraphicFramePr>
         <p:xfrm>
           <a:off x="508000" y="1750000"/>
-          <a:ext cx="11176000" cy="4050000"/>
+          <a:ext cx="11176000" cy="4108539"/>
         </p:xfrm>
         <a:graphic>
           <a:graphicData uri="http://schemas.openxmlformats.org/drawingml/2006/table">
             <a:tbl>
               <a:tblPr firstRow="1" bandRow="1">
-                <a:tableStyleId>{5C22544A-7EE6-4342-B048-85BDC9FD1C3A}</a:tableStyleId>
+                <a:tableStyleId>{9D7B26C5-4107-4FEC-AEDC-1716B250A1EF}</a:tableStyleId>
               </a:tblPr>
               <a:tblGrid>
-                <a:gridCol w="4700000"/>
-                <a:gridCol w="6476000"/>
+                <a:gridCol w="4700000">
+                  <a:extLst>
+                    <a:ext uri="{9D8B030D-6E8A-4147-A177-3AD203B41FA5}">
+                      <a16:colId xmlns:a16="http://schemas.microsoft.com/office/drawing/2014/main" val="20000"/>
+                    </a:ext>
+                  </a:extLst>
+                </a:gridCol>
+                <a:gridCol w="6476000">
+                  <a:extLst>
+                    <a:ext uri="{9D8B030D-6E8A-4147-A177-3AD203B41FA5}">
+                      <a16:colId xmlns:a16="http://schemas.microsoft.com/office/drawing/2014/main" val="20001"/>
+                    </a:ext>
+                  </a:extLst>
+                </a:gridCol>
               </a:tblGrid>
               <a:tr h="368181">
                 <a:tc>
@@ -13752,7 +14134,7 @@
                       </a:r>
                     </a:p>
                   </a:txBody>
-                  <a:tcPr/>
+                  <a:tcPr anchor="ctr"/>
                 </a:tc>
                 <a:tc>
                   <a:txBody>
@@ -13765,13 +14147,18 @@
                       </a:r>
                     </a:p>
                   </a:txBody>
-                  <a:tcPr/>
+                  <a:tcPr anchor="ctr"/>
                 </a:tc>
+                <a:extLst>
+                  <a:ext uri="{0D108BD9-81ED-4DB2-BD59-A6C34878D82A}">
+                    <a16:rowId xmlns:a16="http://schemas.microsoft.com/office/drawing/2014/main" val="10000"/>
+                  </a:ext>
+                </a:extLst>
               </a:tr>
               <a:tr h="368181">
                 <a:tc>
                   <a:txBody>
-                    <a:bodyPr wrap="square"/>
+                    <a:bodyPr/>
                     <a:lstStyle/>
                     <a:p>
                       <a:r>
@@ -13780,11 +14167,11 @@
                       </a:r>
                     </a:p>
                   </a:txBody>
-                  <a:tcPr/>
+                  <a:tcPr anchor="ctr"/>
                 </a:tc>
                 <a:tc>
                   <a:txBody>
-                    <a:bodyPr wrap="square"/>
+                    <a:bodyPr/>
                     <a:lstStyle/>
                     <a:p>
                       <a:r>
@@ -13793,13 +14180,18 @@
                       </a:r>
                     </a:p>
                   </a:txBody>
-                  <a:tcPr/>
+                  <a:tcPr anchor="ctr"/>
                 </a:tc>
+                <a:extLst>
+                  <a:ext uri="{0D108BD9-81ED-4DB2-BD59-A6C34878D82A}">
+                    <a16:rowId xmlns:a16="http://schemas.microsoft.com/office/drawing/2014/main" val="10001"/>
+                  </a:ext>
+                </a:extLst>
               </a:tr>
               <a:tr h="368181">
                 <a:tc>
                   <a:txBody>
-                    <a:bodyPr wrap="square"/>
+                    <a:bodyPr/>
                     <a:lstStyle/>
                     <a:p>
                       <a:r>
@@ -13808,11 +14200,11 @@
                       </a:r>
                     </a:p>
                   </a:txBody>
-                  <a:tcPr/>
+                  <a:tcPr anchor="ctr"/>
                 </a:tc>
                 <a:tc>
                   <a:txBody>
-                    <a:bodyPr wrap="square"/>
+                    <a:bodyPr/>
                     <a:lstStyle/>
                     <a:p>
                       <a:r>
@@ -13821,13 +14213,18 @@
                       </a:r>
                     </a:p>
                   </a:txBody>
-                  <a:tcPr/>
+                  <a:tcPr anchor="ctr"/>
                 </a:tc>
+                <a:extLst>
+                  <a:ext uri="{0D108BD9-81ED-4DB2-BD59-A6C34878D82A}">
+                    <a16:rowId xmlns:a16="http://schemas.microsoft.com/office/drawing/2014/main" val="10002"/>
+                  </a:ext>
+                </a:extLst>
               </a:tr>
               <a:tr h="368181">
                 <a:tc>
                   <a:txBody>
-                    <a:bodyPr wrap="square"/>
+                    <a:bodyPr/>
                     <a:lstStyle/>
                     <a:p>
                       <a:r>
@@ -13836,11 +14233,11 @@
                       </a:r>
                     </a:p>
                   </a:txBody>
-                  <a:tcPr/>
+                  <a:tcPr anchor="ctr"/>
                 </a:tc>
                 <a:tc>
                   <a:txBody>
-                    <a:bodyPr wrap="square"/>
+                    <a:bodyPr/>
                     <a:lstStyle/>
                     <a:p>
                       <a:r>
@@ -13849,13 +14246,18 @@
                       </a:r>
                     </a:p>
                   </a:txBody>
-                  <a:tcPr/>
+                  <a:tcPr anchor="ctr"/>
                 </a:tc>
+                <a:extLst>
+                  <a:ext uri="{0D108BD9-81ED-4DB2-BD59-A6C34878D82A}">
+                    <a16:rowId xmlns:a16="http://schemas.microsoft.com/office/drawing/2014/main" val="10003"/>
+                  </a:ext>
+                </a:extLst>
               </a:tr>
               <a:tr h="368181">
                 <a:tc>
                   <a:txBody>
-                    <a:bodyPr wrap="square"/>
+                    <a:bodyPr/>
                     <a:lstStyle/>
                     <a:p>
                       <a:r>
@@ -13864,11 +14266,11 @@
                       </a:r>
                     </a:p>
                   </a:txBody>
-                  <a:tcPr/>
+                  <a:tcPr anchor="ctr"/>
                 </a:tc>
                 <a:tc>
                   <a:txBody>
-                    <a:bodyPr wrap="square"/>
+                    <a:bodyPr/>
                     <a:lstStyle/>
                     <a:p>
                       <a:r>
@@ -13877,13 +14279,18 @@
                       </a:r>
                     </a:p>
                   </a:txBody>
-                  <a:tcPr/>
+                  <a:tcPr anchor="ctr"/>
                 </a:tc>
+                <a:extLst>
+                  <a:ext uri="{0D108BD9-81ED-4DB2-BD59-A6C34878D82A}">
+                    <a16:rowId xmlns:a16="http://schemas.microsoft.com/office/drawing/2014/main" val="10004"/>
+                  </a:ext>
+                </a:extLst>
               </a:tr>
               <a:tr h="368181">
                 <a:tc>
                   <a:txBody>
-                    <a:bodyPr wrap="square"/>
+                    <a:bodyPr/>
                     <a:lstStyle/>
                     <a:p>
                       <a:r>
@@ -13892,11 +14299,11 @@
                       </a:r>
                     </a:p>
                   </a:txBody>
-                  <a:tcPr/>
+                  <a:tcPr anchor="ctr"/>
                 </a:tc>
                 <a:tc>
                   <a:txBody>
-                    <a:bodyPr wrap="square"/>
+                    <a:bodyPr/>
                     <a:lstStyle/>
                     <a:p>
                       <a:r>
@@ -13905,13 +14312,18 @@
                       </a:r>
                     </a:p>
                   </a:txBody>
-                  <a:tcPr/>
+                  <a:tcPr anchor="ctr"/>
                 </a:tc>
+                <a:extLst>
+                  <a:ext uri="{0D108BD9-81ED-4DB2-BD59-A6C34878D82A}">
+                    <a16:rowId xmlns:a16="http://schemas.microsoft.com/office/drawing/2014/main" val="10005"/>
+                  </a:ext>
+                </a:extLst>
               </a:tr>
               <a:tr h="368181">
                 <a:tc>
                   <a:txBody>
-                    <a:bodyPr wrap="square"/>
+                    <a:bodyPr/>
                     <a:lstStyle/>
                     <a:p>
                       <a:r>
@@ -13920,11 +14332,11 @@
                       </a:r>
                     </a:p>
                   </a:txBody>
-                  <a:tcPr/>
+                  <a:tcPr anchor="ctr"/>
                 </a:tc>
                 <a:tc>
                   <a:txBody>
-                    <a:bodyPr wrap="square"/>
+                    <a:bodyPr/>
                     <a:lstStyle/>
                     <a:p>
                       <a:r>
@@ -13933,13 +14345,18 @@
                       </a:r>
                     </a:p>
                   </a:txBody>
-                  <a:tcPr/>
+                  <a:tcPr anchor="ctr"/>
                 </a:tc>
+                <a:extLst>
+                  <a:ext uri="{0D108BD9-81ED-4DB2-BD59-A6C34878D82A}">
+                    <a16:rowId xmlns:a16="http://schemas.microsoft.com/office/drawing/2014/main" val="10006"/>
+                  </a:ext>
+                </a:extLst>
               </a:tr>
               <a:tr h="368181">
                 <a:tc>
                   <a:txBody>
-                    <a:bodyPr wrap="square"/>
+                    <a:bodyPr/>
                     <a:lstStyle/>
                     <a:p>
                       <a:r>
@@ -13948,11 +14365,11 @@
                       </a:r>
                     </a:p>
                   </a:txBody>
-                  <a:tcPr/>
+                  <a:tcPr anchor="ctr"/>
                 </a:tc>
                 <a:tc>
                   <a:txBody>
-                    <a:bodyPr wrap="square"/>
+                    <a:bodyPr/>
                     <a:lstStyle/>
                     <a:p>
                       <a:r>
@@ -13961,13 +14378,18 @@
                       </a:r>
                     </a:p>
                   </a:txBody>
-                  <a:tcPr/>
+                  <a:tcPr anchor="ctr"/>
                 </a:tc>
+                <a:extLst>
+                  <a:ext uri="{0D108BD9-81ED-4DB2-BD59-A6C34878D82A}">
+                    <a16:rowId xmlns:a16="http://schemas.microsoft.com/office/drawing/2014/main" val="10007"/>
+                  </a:ext>
+                </a:extLst>
               </a:tr>
               <a:tr h="368181">
                 <a:tc>
                   <a:txBody>
-                    <a:bodyPr wrap="square"/>
+                    <a:bodyPr/>
                     <a:lstStyle/>
                     <a:p>
                       <a:r>
@@ -13976,11 +14398,11 @@
                       </a:r>
                     </a:p>
                   </a:txBody>
-                  <a:tcPr/>
+                  <a:tcPr anchor="ctr"/>
                 </a:tc>
                 <a:tc>
                   <a:txBody>
-                    <a:bodyPr wrap="square"/>
+                    <a:bodyPr/>
                     <a:lstStyle/>
                     <a:p>
                       <a:r>
@@ -13989,13 +14411,18 @@
                       </a:r>
                     </a:p>
                   </a:txBody>
-                  <a:tcPr/>
+                  <a:tcPr anchor="ctr"/>
                 </a:tc>
+                <a:extLst>
+                  <a:ext uri="{0D108BD9-81ED-4DB2-BD59-A6C34878D82A}">
+                    <a16:rowId xmlns:a16="http://schemas.microsoft.com/office/drawing/2014/main" val="10008"/>
+                  </a:ext>
+                </a:extLst>
               </a:tr>
               <a:tr h="368181">
                 <a:tc>
                   <a:txBody>
-                    <a:bodyPr wrap="square"/>
+                    <a:bodyPr/>
                     <a:lstStyle/>
                     <a:p>
                       <a:r>
@@ -14004,11 +14431,11 @@
                       </a:r>
                     </a:p>
                   </a:txBody>
-                  <a:tcPr/>
+                  <a:tcPr anchor="ctr"/>
                 </a:tc>
                 <a:tc>
                   <a:txBody>
-                    <a:bodyPr wrap="square"/>
+                    <a:bodyPr/>
                     <a:lstStyle/>
                     <a:p>
                       <a:r>
@@ -14017,13 +14444,18 @@
                       </a:r>
                     </a:p>
                   </a:txBody>
-                  <a:tcPr/>
+                  <a:tcPr anchor="ctr"/>
                 </a:tc>
+                <a:extLst>
+                  <a:ext uri="{0D108BD9-81ED-4DB2-BD59-A6C34878D82A}">
+                    <a16:rowId xmlns:a16="http://schemas.microsoft.com/office/drawing/2014/main" val="10009"/>
+                  </a:ext>
+                </a:extLst>
               </a:tr>
               <a:tr h="368190">
                 <a:tc>
                   <a:txBody>
-                    <a:bodyPr wrap="square"/>
+                    <a:bodyPr/>
                     <a:lstStyle/>
                     <a:p>
                       <a:r>
@@ -14032,21 +14464,26 @@
                       </a:r>
                     </a:p>
                   </a:txBody>
-                  <a:tcPr/>
+                  <a:tcPr anchor="ctr"/>
                 </a:tc>
                 <a:tc>
                   <a:txBody>
-                    <a:bodyPr wrap="square"/>
+                    <a:bodyPr/>
                     <a:lstStyle/>
                     <a:p>
                       <a:r>
-                        <a:rPr sz="1050"/>
+                        <a:rPr sz="1050" dirty="0"/>
                         <a:t>Piaggio et al. 2006, JAMA (CONSORT NI extension)</a:t>
                       </a:r>
                     </a:p>
                   </a:txBody>
-                  <a:tcPr/>
+                  <a:tcPr anchor="ctr"/>
                 </a:tc>
+                <a:extLst>
+                  <a:ext uri="{0D108BD9-81ED-4DB2-BD59-A6C34878D82A}">
+                    <a16:rowId xmlns:a16="http://schemas.microsoft.com/office/drawing/2014/main" val="10010"/>
+                  </a:ext>
+                </a:extLst>
               </a:tr>
             </a:tbl>
           </a:graphicData>
@@ -14060,8 +14497,8 @@
 </p:sld>
 </file>
 
-<file path=ppt/slides/slide18.xml><?xml version="1.0" encoding="utf-8"?>
-<p:sld xmlns:a="http://schemas.openxmlformats.org/drawingml/2006/main" xmlns:p="http://schemas.openxmlformats.org/presentationml/2006/main" xmlns:r="http://schemas.openxmlformats.org/officeDocument/2006/relationships">
+<file path=ppt/slides/slide3.xml><?xml version="1.0" encoding="utf-8"?>
+<p:sld xmlns:a="http://schemas.openxmlformats.org/drawingml/2006/main" xmlns:r="http://schemas.openxmlformats.org/officeDocument/2006/relationships" xmlns:p="http://schemas.openxmlformats.org/presentationml/2006/main">
   <p:cSld>
     <p:spTree>
       <p:nvGrpSpPr>
@@ -14069,7 +14506,14 @@
         <p:cNvGrpSpPr/>
         <p:nvPr/>
       </p:nvGrpSpPr>
-      <p:grpSpPr/>
+      <p:grpSpPr>
+        <a:xfrm>
+          <a:off x="0" y="0"/>
+          <a:ext cx="0" cy="0"/>
+          <a:chOff x="0" y="0"/>
+          <a:chExt cx="0" cy="0"/>
+        </a:xfrm>
+      </p:grpSpPr>
       <p:sp>
         <p:nvSpPr>
           <p:cNvPr id="2" name="Title 1"/>
@@ -14121,7 +14565,7 @@
         </p:nvSpPr>
         <p:spPr>
           <a:xfrm>
-            <a:off x="1496000" y="1650000"/>
+            <a:off x="1496000" y="1840532"/>
             <a:ext cx="9200000" cy="460000"/>
           </a:xfrm>
           <a:prstGeom prst="roundRect">
@@ -14152,7 +14596,7 @@
           </a:fontRef>
         </p:style>
         <p:txBody>
-          <a:bodyPr rtlCol="0" anchor="ctr" wrap="square"/>
+          <a:bodyPr wrap="square" rtlCol="0" anchor="ctr"/>
           <a:lstStyle/>
           <a:p>
             <a:pPr algn="ctr"/>
@@ -14186,7 +14630,7 @@
         </p:nvCxnSpPr>
         <p:spPr>
           <a:xfrm>
-            <a:off x="6096000" y="2110000"/>
+            <a:off x="6096000" y="2300532"/>
             <a:ext cx="0" cy="150000"/>
           </a:xfrm>
           <a:prstGeom prst="line">
@@ -14222,7 +14666,7 @@
         </p:nvSpPr>
         <p:spPr>
           <a:xfrm>
-            <a:off x="1496000" y="2260000"/>
+            <a:off x="1496000" y="2450532"/>
             <a:ext cx="9200000" cy="460000"/>
           </a:xfrm>
           <a:prstGeom prst="roundRect">
@@ -14253,7 +14697,7 @@
           </a:fontRef>
         </p:style>
         <p:txBody>
-          <a:bodyPr rtlCol="0" anchor="ctr" wrap="square"/>
+          <a:bodyPr wrap="square" rtlCol="0" anchor="ctr"/>
           <a:lstStyle/>
           <a:p>
             <a:pPr algn="ctr"/>
@@ -14287,7 +14731,7 @@
         </p:nvCxnSpPr>
         <p:spPr>
           <a:xfrm>
-            <a:off x="6096000" y="2720000"/>
+            <a:off x="6096000" y="2910532"/>
             <a:ext cx="0" cy="150000"/>
           </a:xfrm>
           <a:prstGeom prst="line">
@@ -14323,7 +14767,7 @@
         </p:nvSpPr>
         <p:spPr>
           <a:xfrm>
-            <a:off x="1496000" y="2870000"/>
+            <a:off x="1496000" y="3060532"/>
             <a:ext cx="9200000" cy="460000"/>
           </a:xfrm>
           <a:prstGeom prst="roundRect">
@@ -14354,7 +14798,7 @@
           </a:fontRef>
         </p:style>
         <p:txBody>
-          <a:bodyPr rtlCol="0" anchor="ctr" wrap="square"/>
+          <a:bodyPr wrap="square" rtlCol="0" anchor="ctr"/>
           <a:lstStyle/>
           <a:p>
             <a:pPr algn="ctr"/>
@@ -14388,7 +14832,7 @@
         </p:nvCxnSpPr>
         <p:spPr>
           <a:xfrm>
-            <a:off x="6096000" y="3330000"/>
+            <a:off x="6096000" y="3520532"/>
             <a:ext cx="0" cy="150000"/>
           </a:xfrm>
           <a:prstGeom prst="line">
@@ -14424,7 +14868,7 @@
         </p:nvSpPr>
         <p:spPr>
           <a:xfrm>
-            <a:off x="1496000" y="3480000"/>
+            <a:off x="1496000" y="3670532"/>
             <a:ext cx="9200000" cy="460000"/>
           </a:xfrm>
           <a:prstGeom prst="roundRect">
@@ -14455,7 +14899,7 @@
           </a:fontRef>
         </p:style>
         <p:txBody>
-          <a:bodyPr rtlCol="0" anchor="ctr" wrap="square"/>
+          <a:bodyPr wrap="square" rtlCol="0" anchor="ctr"/>
           <a:lstStyle/>
           <a:p>
             <a:pPr algn="ctr"/>
@@ -14489,7 +14933,7 @@
         </p:nvCxnSpPr>
         <p:spPr>
           <a:xfrm>
-            <a:off x="6096000" y="3940000"/>
+            <a:off x="6096000" y="4130532"/>
             <a:ext cx="0" cy="150000"/>
           </a:xfrm>
           <a:prstGeom prst="line">
@@ -14525,7 +14969,7 @@
         </p:nvSpPr>
         <p:spPr>
           <a:xfrm>
-            <a:off x="1496000" y="4090000"/>
+            <a:off x="1496000" y="4280532"/>
             <a:ext cx="9200000" cy="460000"/>
           </a:xfrm>
           <a:prstGeom prst="roundRect">
@@ -14556,7 +15000,7 @@
           </a:fontRef>
         </p:style>
         <p:txBody>
-          <a:bodyPr rtlCol="0" anchor="ctr" wrap="square"/>
+          <a:bodyPr wrap="square" rtlCol="0" anchor="ctr"/>
           <a:lstStyle/>
           <a:p>
             <a:pPr algn="ctr"/>
@@ -14590,7 +15034,7 @@
         </p:nvCxnSpPr>
         <p:spPr>
           <a:xfrm>
-            <a:off x="6096000" y="4550000"/>
+            <a:off x="6096000" y="4740532"/>
             <a:ext cx="0" cy="150000"/>
           </a:xfrm>
           <a:prstGeom prst="line">
@@ -14626,7 +15070,7 @@
         </p:nvSpPr>
         <p:spPr>
           <a:xfrm>
-            <a:off x="1496000" y="4700000"/>
+            <a:off x="1496000" y="4890532"/>
             <a:ext cx="9200000" cy="460000"/>
           </a:xfrm>
           <a:prstGeom prst="roundRect">
@@ -14657,7 +15101,7 @@
           </a:fontRef>
         </p:style>
         <p:txBody>
-          <a:bodyPr rtlCol="0" anchor="ctr" wrap="square"/>
+          <a:bodyPr wrap="square" rtlCol="0" anchor="ctr"/>
           <a:lstStyle/>
           <a:p>
             <a:pPr algn="ctr"/>
@@ -14691,7 +15135,7 @@
         </p:nvCxnSpPr>
         <p:spPr>
           <a:xfrm>
-            <a:off x="6096000" y="5160000"/>
+            <a:off x="6096000" y="5350532"/>
             <a:ext cx="0" cy="150000"/>
           </a:xfrm>
           <a:prstGeom prst="line">
@@ -14727,7 +15171,7 @@
         </p:nvSpPr>
         <p:spPr>
           <a:xfrm>
-            <a:off x="1496000" y="5310000"/>
+            <a:off x="1496000" y="5500532"/>
             <a:ext cx="9200000" cy="460000"/>
           </a:xfrm>
           <a:prstGeom prst="roundRect">
@@ -14758,7 +15202,7 @@
           </a:fontRef>
         </p:style>
         <p:txBody>
-          <a:bodyPr rtlCol="0" anchor="ctr" wrap="square"/>
+          <a:bodyPr wrap="square" rtlCol="0" anchor="ctr"/>
           <a:lstStyle/>
           <a:p>
             <a:pPr algn="ctr"/>
@@ -14792,7 +15236,7 @@
 </p:sld>
 </file>
 
-<file path=ppt/slides/slide2.xml><?xml version="1.0" encoding="utf-8"?>
+<file path=ppt/slides/slide4.xml><?xml version="1.0" encoding="utf-8"?>
 <p:sld xmlns:a="http://schemas.openxmlformats.org/drawingml/2006/main" xmlns:r="http://schemas.openxmlformats.org/officeDocument/2006/relationships" xmlns:p="http://schemas.openxmlformats.org/presentationml/2006/main">
   <p:cSld>
     <p:spTree>
@@ -14991,7 +15435,7 @@
 </p:sld>
 </file>
 
-<file path=ppt/slides/slide3.xml><?xml version="1.0" encoding="utf-8"?>
+<file path=ppt/slides/slide5.xml><?xml version="1.0" encoding="utf-8"?>
 <p:sld xmlns:a="http://schemas.openxmlformats.org/drawingml/2006/main" xmlns:r="http://schemas.openxmlformats.org/officeDocument/2006/relationships" xmlns:p="http://schemas.openxmlformats.org/presentationml/2006/main">
   <p:cSld>
     <p:spTree>
@@ -16117,7 +16561,7 @@
 </p:sld>
 </file>
 
-<file path=ppt/slides/slide4.xml><?xml version="1.0" encoding="utf-8"?>
+<file path=ppt/slides/slide6.xml><?xml version="1.0" encoding="utf-8"?>
 <p:sld xmlns:a="http://schemas.openxmlformats.org/drawingml/2006/main" xmlns:r="http://schemas.openxmlformats.org/officeDocument/2006/relationships" xmlns:p="http://schemas.openxmlformats.org/presentationml/2006/main">
   <p:cSld>
     <p:spTree>
@@ -16310,7 +16754,7 @@
 </p:sld>
 </file>
 
-<file path=ppt/slides/slide5.xml><?xml version="1.0" encoding="utf-8"?>
+<file path=ppt/slides/slide7.xml><?xml version="1.0" encoding="utf-8"?>
 <p:sld xmlns:a="http://schemas.openxmlformats.org/drawingml/2006/main" xmlns:r="http://schemas.openxmlformats.org/officeDocument/2006/relationships" xmlns:p="http://schemas.openxmlformats.org/presentationml/2006/main">
   <p:cSld>
     <p:spTree>
@@ -16724,7 +17168,7 @@
 </p:sld>
 </file>
 
-<file path=ppt/slides/slide6.xml><?xml version="1.0" encoding="utf-8"?>
+<file path=ppt/slides/slide8.xml><?xml version="1.0" encoding="utf-8"?>
 <p:sld xmlns:a="http://schemas.openxmlformats.org/drawingml/2006/main" xmlns:r="http://schemas.openxmlformats.org/officeDocument/2006/relationships" xmlns:p="http://schemas.openxmlformats.org/presentationml/2006/main">
   <p:cSld>
     <p:spTree>
@@ -17755,7 +18199,7 @@
 </p:sld>
 </file>
 
-<file path=ppt/slides/slide7.xml><?xml version="1.0" encoding="utf-8"?>
+<file path=ppt/slides/slide9.xml><?xml version="1.0" encoding="utf-8"?>
 <p:sld xmlns:a="http://schemas.openxmlformats.org/drawingml/2006/main" xmlns:r="http://schemas.openxmlformats.org/officeDocument/2006/relationships" xmlns:p="http://schemas.openxmlformats.org/presentationml/2006/main">
   <p:cSld>
     <p:spTree>
@@ -18290,361 +18734,6 @@
         </a:graphic>
       </p:graphicFrame>
     </p:spTree>
-  </p:cSld>
-  <p:clrMapOvr>
-    <a:masterClrMapping/>
-  </p:clrMapOvr>
-</p:sld>
-</file>
-
-<file path=ppt/slides/slide8.xml><?xml version="1.0" encoding="utf-8"?>
-<p:sld xmlns:a="http://schemas.openxmlformats.org/drawingml/2006/main" xmlns:r="http://schemas.openxmlformats.org/officeDocument/2006/relationships" xmlns:p="http://schemas.openxmlformats.org/presentationml/2006/main">
-  <p:cSld>
-    <p:spTree>
-      <p:nvGrpSpPr>
-        <p:cNvPr id="1" name="">
-          <a:extLst>
-            <a:ext uri="{FF2B5EF4-FFF2-40B4-BE49-F238E27FC236}">
-              <a16:creationId xmlns:a16="http://schemas.microsoft.com/office/drawing/2014/main" id="{5F6FE867-999D-E74B-26DA-5E08AC9CECD2}"/>
-            </a:ext>
-          </a:extLst>
-        </p:cNvPr>
-        <p:cNvGrpSpPr/>
-        <p:nvPr/>
-      </p:nvGrpSpPr>
-      <p:grpSpPr>
-        <a:xfrm>
-          <a:off x="0" y="0"/>
-          <a:ext cx="0" cy="0"/>
-          <a:chOff x="0" y="0"/>
-          <a:chExt cx="0" cy="0"/>
-        </a:xfrm>
-      </p:grpSpPr>
-      <p:sp>
-        <p:nvSpPr>
-          <p:cNvPr id="2" name="Title 1">
-            <a:extLst>
-              <a:ext uri="{FF2B5EF4-FFF2-40B4-BE49-F238E27FC236}">
-                <a16:creationId xmlns:a16="http://schemas.microsoft.com/office/drawing/2014/main" id="{297D8841-7808-5AD1-44DF-79F7608785A4}"/>
-              </a:ext>
-            </a:extLst>
-          </p:cNvPr>
-          <p:cNvSpPr>
-            <a:spLocks noGrp="1"/>
-          </p:cNvSpPr>
-          <p:nvPr>
-            <p:ph type="title"/>
-          </p:nvPr>
-        </p:nvSpPr>
-        <p:spPr/>
-        <p:txBody>
-          <a:bodyPr/>
-          <a:lstStyle/>
-          <a:p>
-            <a:r>
-              <a:t>Detailed progress</a:t>
-            </a:r>
-          </a:p>
-        </p:txBody>
-      </p:sp>
-      <p:sp>
-        <p:nvSpPr>
-          <p:cNvPr id="3" name="Content Placeholder 2">
-            <a:extLst>
-              <a:ext uri="{FF2B5EF4-FFF2-40B4-BE49-F238E27FC236}">
-                <a16:creationId xmlns:a16="http://schemas.microsoft.com/office/drawing/2014/main" id="{A1BF983B-FA06-6CA4-C7D2-78C1F756A120}"/>
-              </a:ext>
-            </a:extLst>
-          </p:cNvPr>
-          <p:cNvSpPr>
-            <a:spLocks noGrp="1"/>
-          </p:cNvSpPr>
-          <p:nvPr>
-            <p:ph idx="1"/>
-          </p:nvPr>
-        </p:nvSpPr>
-        <p:spPr/>
-        <p:txBody>
-          <a:bodyPr/>
-          <a:lstStyle/>
-          <a:p>
-            <a:r>
-              <a:rPr sz="2200" b="1" dirty="0" err="1"/>
-              <a:t>개별</a:t>
-            </a:r>
-            <a:r>
-              <a:rPr sz="2200" b="1" dirty="0"/>
-              <a:t> </a:t>
-            </a:r>
-            <a:r>
-              <a:rPr sz="2200" b="1" dirty="0" err="1"/>
-              <a:t>feature는</a:t>
-            </a:r>
-            <a:r>
-              <a:rPr sz="2200" b="1" dirty="0"/>
-              <a:t> </a:t>
-            </a:r>
-            <a:r>
-              <a:rPr sz="2200" b="1" dirty="0" err="1"/>
-              <a:t>비유의</a:t>
-            </a:r>
-            <a:r>
-              <a:rPr sz="2200" b="1" dirty="0"/>
-              <a:t> → Stage-1 LR </a:t>
-            </a:r>
-            <a:r>
-              <a:rPr sz="2200" b="1" dirty="0" err="1"/>
-              <a:t>재사용</a:t>
-            </a:r>
-            <a:r>
-              <a:rPr sz="2200" b="1" dirty="0"/>
-              <a:t> </a:t>
-            </a:r>
-            <a:r>
-              <a:rPr sz="2200" b="1" dirty="0" err="1"/>
-              <a:t>fusion은</a:t>
-            </a:r>
-            <a:r>
-              <a:rPr sz="2200" b="1" dirty="0"/>
-              <a:t> </a:t>
-            </a:r>
-            <a:r>
-              <a:rPr sz="2200" b="1" dirty="0" err="1"/>
-              <a:t>유의한</a:t>
-            </a:r>
-            <a:r>
-              <a:rPr sz="2200" b="1" dirty="0"/>
-              <a:t> FP→TN</a:t>
-            </a:r>
-          </a:p>
-          <a:p>
-            <a:pPr lvl="1"/>
-            <a:r>
-              <a:rPr sz="1800" b="0" dirty="0"/>
-              <a:t>Net NRI: internal +71 / external +34</a:t>
-            </a:r>
-          </a:p>
-          <a:p>
-            <a:pPr lvl="1"/>
-            <a:r>
-              <a:rPr sz="1800" b="0" dirty="0"/>
-              <a:t>Stage-1 score </a:t>
-            </a:r>
-            <a:r>
-              <a:rPr sz="1800" b="0" dirty="0" err="1"/>
-              <a:t>표준화</a:t>
-            </a:r>
-            <a:r>
-              <a:rPr sz="1800" b="0" dirty="0"/>
-              <a:t> </a:t>
-            </a:r>
-            <a:r>
-              <a:rPr sz="1800" b="0" dirty="0" err="1"/>
-              <a:t>반영</a:t>
-            </a:r>
-            <a:r>
-              <a:rPr sz="1800" b="0" dirty="0"/>
-              <a:t> (raw log-odds </a:t>
-            </a:r>
-            <a:r>
-              <a:rPr sz="1800" b="0" dirty="0" err="1"/>
-              <a:t>그대로</a:t>
-            </a:r>
-            <a:r>
-              <a:rPr sz="1800" b="0" dirty="0"/>
-              <a:t> </a:t>
-            </a:r>
-            <a:r>
-              <a:rPr sz="1800" b="0" dirty="0" err="1"/>
-              <a:t>사용</a:t>
-            </a:r>
-            <a:r>
-              <a:rPr sz="1800" b="0" dirty="0"/>
-              <a:t> 시 external Net NRI 0 -&gt; </a:t>
-            </a:r>
-            <a:r>
-              <a:rPr sz="1800" b="0" dirty="0" err="1"/>
-              <a:t>표준화</a:t>
-            </a:r>
-            <a:r>
-              <a:rPr sz="1800" b="0" dirty="0"/>
-              <a:t> 후 +34)</a:t>
-            </a:r>
-          </a:p>
-          <a:p>
-            <a:pPr lvl="1"/>
-            <a:r>
-              <a:rPr lang="en-US" sz="1800" b="0" dirty="0"/>
-              <a:t>Spec</a:t>
-            </a:r>
-            <a:r>
-              <a:rPr sz="1800" b="0" dirty="0"/>
-              <a:t> </a:t>
-            </a:r>
-            <a:r>
-              <a:rPr sz="1800" b="0" dirty="0" err="1"/>
-              <a:t>개선</a:t>
-            </a:r>
-            <a:r>
-              <a:rPr sz="1800" b="0" dirty="0"/>
-              <a:t> McNemar p&lt;0.001 (양 </a:t>
-            </a:r>
-            <a:r>
-              <a:rPr sz="1800" b="0" dirty="0" err="1"/>
-              <a:t>코호트</a:t>
-            </a:r>
-            <a:r>
-              <a:rPr sz="1800" b="0" dirty="0"/>
-              <a:t>)</a:t>
-            </a:r>
-            <a:r>
-              <a:rPr lang="en-US" sz="1800" b="0" dirty="0"/>
-              <a:t>, Sens</a:t>
-            </a:r>
-            <a:r>
-              <a:rPr sz="1800" b="0" dirty="0"/>
-              <a:t> </a:t>
-            </a:r>
-            <a:r>
-              <a:rPr sz="1800" b="0" dirty="0" err="1"/>
-              <a:t>손실</a:t>
-            </a:r>
-            <a:r>
-              <a:rPr sz="1800" b="0" dirty="0"/>
-              <a:t> NI margin </a:t>
-            </a:r>
-            <a:r>
-              <a:rPr sz="1800" b="0" dirty="0" err="1"/>
-              <a:t>이내</a:t>
-            </a:r>
-            <a:r>
-              <a:rPr sz="1800" b="0" dirty="0"/>
-              <a:t> → PASS</a:t>
-            </a:r>
-          </a:p>
-        </p:txBody>
-      </p:sp>
-      <p:pic>
-        <p:nvPicPr>
-          <p:cNvPr id="4" name="Picture 3" descr="clinical_vs_aec_assisted_table.png"/>
-          <p:cNvPicPr>
-            <a:picLocks noChangeAspect="1"/>
-          </p:cNvPicPr>
-          <p:nvPr/>
-        </p:nvPicPr>
-        <p:blipFill>
-          <a:blip r:embed="rId3"/>
-          <a:srcRect t="14257"/>
-          <a:stretch>
-            <a:fillRect/>
-          </a:stretch>
-        </p:blipFill>
-        <p:spPr>
-          <a:xfrm>
-            <a:off x="1531176" y="3232298"/>
-            <a:ext cx="9129648" cy="2981669"/>
-          </a:xfrm>
-          <a:prstGeom prst="rect">
-            <a:avLst/>
-          </a:prstGeom>
-        </p:spPr>
-      </p:pic>
-    </p:spTree>
-    <p:extLst>
-      <p:ext uri="{BB962C8B-B14F-4D97-AF65-F5344CB8AC3E}">
-        <p14:creationId xmlns:p14="http://schemas.microsoft.com/office/powerpoint/2010/main" val="2699504877"/>
-      </p:ext>
-    </p:extLst>
-  </p:cSld>
-  <p:clrMapOvr>
-    <a:masterClrMapping/>
-  </p:clrMapOvr>
-</p:sld>
-</file>
-
-<file path=ppt/slides/slide9.xml><?xml version="1.0" encoding="utf-8"?>
-<p:sld xmlns:a="http://schemas.openxmlformats.org/drawingml/2006/main" xmlns:r="http://schemas.openxmlformats.org/officeDocument/2006/relationships" xmlns:p="http://schemas.openxmlformats.org/presentationml/2006/main">
-  <p:cSld>
-    <p:spTree>
-      <p:nvGrpSpPr>
-        <p:cNvPr id="1" name="">
-          <a:extLst>
-            <a:ext uri="{FF2B5EF4-FFF2-40B4-BE49-F238E27FC236}">
-              <a16:creationId xmlns:a16="http://schemas.microsoft.com/office/drawing/2014/main" id="{32EBB4E5-8F3F-87A4-5FDB-5025F5753BAC}"/>
-            </a:ext>
-          </a:extLst>
-        </p:cNvPr>
-        <p:cNvGrpSpPr/>
-        <p:nvPr/>
-      </p:nvGrpSpPr>
-      <p:grpSpPr>
-        <a:xfrm>
-          <a:off x="0" y="0"/>
-          <a:ext cx="0" cy="0"/>
-          <a:chOff x="0" y="0"/>
-          <a:chExt cx="0" cy="0"/>
-        </a:xfrm>
-      </p:grpSpPr>
-      <p:sp>
-        <p:nvSpPr>
-          <p:cNvPr id="2" name="Title 1">
-            <a:extLst>
-              <a:ext uri="{FF2B5EF4-FFF2-40B4-BE49-F238E27FC236}">
-                <a16:creationId xmlns:a16="http://schemas.microsoft.com/office/drawing/2014/main" id="{0A9A0E3D-B0CF-EE1C-1EAF-A2B3460F3F32}"/>
-              </a:ext>
-            </a:extLst>
-          </p:cNvPr>
-          <p:cNvSpPr>
-            <a:spLocks noGrp="1"/>
-          </p:cNvSpPr>
-          <p:nvPr>
-            <p:ph type="title"/>
-          </p:nvPr>
-        </p:nvSpPr>
-        <p:spPr/>
-        <p:txBody>
-          <a:bodyPr/>
-          <a:lstStyle/>
-          <a:p>
-            <a:r>
-              <a:rPr lang="en-US" dirty="0"/>
-              <a:t>Next Plans</a:t>
-            </a:r>
-            <a:endParaRPr dirty="0"/>
-          </a:p>
-        </p:txBody>
-      </p:sp>
-      <p:sp>
-        <p:nvSpPr>
-          <p:cNvPr id="4" name="내용 개체 틀 3">
-            <a:extLst>
-              <a:ext uri="{FF2B5EF4-FFF2-40B4-BE49-F238E27FC236}">
-                <a16:creationId xmlns:a16="http://schemas.microsoft.com/office/drawing/2014/main" id="{EFCFAC3E-E19A-9D86-DE71-14B244B9BE42}"/>
-              </a:ext>
-            </a:extLst>
-          </p:cNvPr>
-          <p:cNvSpPr>
-            <a:spLocks noGrp="1"/>
-          </p:cNvSpPr>
-          <p:nvPr>
-            <p:ph idx="1"/>
-          </p:nvPr>
-        </p:nvSpPr>
-        <p:spPr/>
-        <p:txBody>
-          <a:bodyPr/>
-          <a:lstStyle/>
-          <a:p>
-            <a:endParaRPr lang="ko-KR" altLang="en-US"/>
-          </a:p>
-        </p:txBody>
-      </p:sp>
-    </p:spTree>
-    <p:extLst>
-      <p:ext uri="{BB962C8B-B14F-4D97-AF65-F5344CB8AC3E}">
-        <p14:creationId xmlns:p14="http://schemas.microsoft.com/office/powerpoint/2010/main" val="1324803453"/>
-      </p:ext>
-    </p:extLst>
   </p:cSld>
   <p:clrMapOvr>
     <a:masterClrMapping/>
